--- a/Agent_K_Deployment_Strategy.pptx
+++ b/Agent_K_Deployment_Strategy.pptx
@@ -21,6 +21,7 @@
     <p:sldId id="269" r:id="rId21"/>
     <p:sldId id="270" r:id="rId22"/>
     <p:sldId id="271" r:id="rId23"/>
+    <p:sldId id="272" r:id="rId24"/>
   </p:sldIdLst>
   <p:sldSz cx="12191695" cy="6858000" type="screen4x3"/>
   <p:notesSz cx="6858000" cy="9144000"/>
@@ -1017,52 +1018,170 @@
           <a:lstStyle/>
           <a:p>
             <a:r>
-              <a:t>THIS IS THE MOST IMPORTANT SLIDE.</a:t>
+              <a:t>N8N vs AI AGENT — CRITICAL COST STRATEGY:</a:t>
             </a:r>
           </a:p>
           <a:p/>
           <a:p>
             <a:r>
-              <a:t>The firm is not betting on 400 lines of JavaScript. They're betting on:</a:t>
-            </a:r>
-          </a:p>
-          <a:p>
-            <a:r>
-              <a:t>1. Claude getting better (Anthropic's core business, billions invested)</a:t>
-            </a:r>
-          </a:p>
-          <a:p>
-            <a:r>
-              <a:t>2. Skills being the right abstraction (SKILL.md works better as model improves)</a:t>
-            </a:r>
-          </a:p>
-          <a:p>
-            <a:r>
-              <a:t>3. MCP ecosystem growing (more community-maintained tool servers)</a:t>
+              <a:t>This slide addresses the most common mistake firms make: using the AI agent for everything.</a:t>
             </a:r>
           </a:p>
           <a:p/>
           <a:p>
             <a:r>
-              <a:t>All three bets are on Anthropic's roadmap, not on custom code.</a:t>
+              <a:t>AI AGENT COSTS:</a:t>
+            </a:r>
+          </a:p>
+          <a:p>
+            <a:r>
+              <a:t>- Claude API: ~USD 3/million input tokens, ~USD 15/million output tokens (Sonnet)</a:t>
+            </a:r>
+          </a:p>
+          <a:p>
+            <a:r>
+              <a:t>- A single tax computation might use 50K-200K tokens = ~RM 0.30-1.50</a:t>
+            </a:r>
+          </a:p>
+          <a:p>
+            <a:r>
+              <a:t>- 100 requests/day = RM 30-150/day = RM 600-3000/month in API costs alone</a:t>
+            </a:r>
+          </a:p>
+          <a:p>
+            <a:r>
+              <a:t>- Claude Max subscription ($100/mo) is more predictable but has rate limits</a:t>
             </a:r>
           </a:p>
           <a:p/>
           <a:p>
             <a:r>
-              <a:t>Example: When Anthropic released Claude 3.5 Sonnet, every Agent K deployment automatically got better at reading Excel files, understanding tax law, and generating more accurate financial statements. Zero code changes.</a:t>
+              <a:t>N8N WORKFLOW COSTS:</a:t>
+            </a:r>
+          </a:p>
+          <a:p>
+            <a:r>
+              <a:t>- Self-hosted on same Mac Mini: FREE</a:t>
+            </a:r>
+          </a:p>
+          <a:p>
+            <a:r>
+              <a:t>- Cloud n8n: starts free, ~$20/mo for more workflows</a:t>
+            </a:r>
+          </a:p>
+          <a:p>
+            <a:r>
+              <a:t>- No AI tokens consumed. Just HTTP calls, file operations, simple logic.</a:t>
             </a:r>
           </a:p>
           <a:p/>
           <a:p>
             <a:r>
-              <a:t>This is fundamentally different from building a custom AI framework where you'd have to maintain prompt chains, retry logic, context management — all of which Anthropic is already doing inside Claude CLI.</a:t>
+              <a:t>REAL EXAMPLES FOR AN ACCOUNTING FIRM:</a:t>
             </a:r>
           </a:p>
           <a:p/>
           <a:p>
             <a:r>
-              <a:t>Even the Telegram bot layer benefits: faster model = shorter wait times for staff.</a:t>
+              <a:t>USE N8N:</a:t>
+            </a:r>
+          </a:p>
+          <a:p>
+            <a:r>
+              <a:t>- Every Monday, email all clients whose documents are overdue (query DB, send template email)</a:t>
+            </a:r>
+          </a:p>
+          <a:p>
+            <a:r>
+              <a:t>- When a signed engagement letter arrives in Gmail, save to /engagements/{client}/ and notify team</a:t>
+            </a:r>
+          </a:p>
+          <a:p>
+            <a:r>
+              <a:t>- Daily at 6pm, backup today's work to Google Drive</a:t>
+            </a:r>
+          </a:p>
+          <a:p>
+            <a:r>
+              <a:t>- When invoice is marked paid in accounting software, update status tracker</a:t>
+            </a:r>
+          </a:p>
+          <a:p>
+            <a:r>
+              <a:t>- Monthly: generate list of upcoming FYE deadlines from database</a:t>
+            </a:r>
+          </a:p>
+          <a:p/>
+          <a:p>
+            <a:r>
+              <a:t>USE AI AGENT:</a:t>
+            </a:r>
+          </a:p>
+          <a:p>
+            <a:r>
+              <a:t>- Prepare tax computation (needs to READ the P&amp;L, UNDERSTAND the numbers, APPLY tax rules)</a:t>
+            </a:r>
+          </a:p>
+          <a:p>
+            <a:r>
+              <a:t>- Draft audit report (needs JUDGMENT about qualifications, emphasis of matter)</a:t>
+            </a:r>
+          </a:p>
+          <a:p>
+            <a:r>
+              <a:t>- Summarize a new contract's key terms (needs to READ and COMPREHEND unique document)</a:t>
+            </a:r>
+          </a:p>
+          <a:p>
+            <a:r>
+              <a:t>- Answer: 'Is this lease operating or finance under MPERS?' (needs REASONING)</a:t>
+            </a:r>
+          </a:p>
+          <a:p>
+            <a:r>
+              <a:t>- Create a custom workpaper for an unusual transaction</a:t>
+            </a:r>
+          </a:p>
+          <a:p/>
+          <a:p>
+            <a:r>
+              <a:t>HYBRID PATTERN:</a:t>
+            </a:r>
+          </a:p>
+          <a:p>
+            <a:r>
+              <a:t>n8n triggers the agent only when needed.</a:t>
+            </a:r>
+          </a:p>
+          <a:p>
+            <a:r>
+              <a:t>Example: n8n monitors Gmail → new P&amp;L received → n8n saves file → n8n sends Telegram message</a:t>
+            </a:r>
+          </a:p>
+          <a:p>
+            <a:r>
+              <a:t>to Agent K: 'Prepare tax computation for {client} using the P&amp;L at {path}'</a:t>
+            </a:r>
+          </a:p>
+          <a:p>
+            <a:r>
+              <a:t>The workflow handles the predictable routing. The agent handles the thinking.</a:t>
+            </a:r>
+          </a:p>
+          <a:p/>
+          <a:p>
+            <a:r>
+              <a:t>RULE OF THUMB:</a:t>
+            </a:r>
+          </a:p>
+          <a:p>
+            <a:r>
+              <a:t>If you can draw the workflow as a flowchart with no 'it depends' branches → use n8n.</a:t>
+            </a:r>
+          </a:p>
+          <a:p>
+            <a:r>
+              <a:t>If the task requires reading, understanding, or making judgment calls → use the agent.</a:t>
             </a:r>
           </a:p>
         </p:txBody>
@@ -1132,61 +1251,52 @@
           <a:lstStyle/>
           <a:p>
             <a:r>
-              <a:t>KEY POINT: The firm does NOT need a developer to maintain the system.</a:t>
+              <a:t>THIS IS THE MOST IMPORTANT SLIDE.</a:t>
             </a:r>
           </a:p>
           <a:p/>
           <a:p>
             <a:r>
-              <a:t>Because Claude CLI has full filesystem access (Read, Write, Edit, Bash tools), the Telegram user can instruct it to modify ANYTHING on the Mac Mini:</a:t>
+              <a:t>The firm is not betting on 400 lines of JavaScript. They're betting on:</a:t>
+            </a:r>
+          </a:p>
+          <a:p>
+            <a:r>
+              <a:t>1. Claude getting better (Anthropic's core business, billions invested)</a:t>
+            </a:r>
+          </a:p>
+          <a:p>
+            <a:r>
+              <a:t>2. Skills being the right abstraction (SKILL.md works better as model improves)</a:t>
+            </a:r>
+          </a:p>
+          <a:p>
+            <a:r>
+              <a:t>3. MCP ecosystem growing (more community-maintained tool servers)</a:t>
             </a:r>
           </a:p>
           <a:p/>
           <a:p>
             <a:r>
-              <a:t>- Skills: SKILL.md files are just text. Claude can create/edit them.</a:t>
-            </a:r>
-          </a:p>
-          <a:p>
-            <a:r>
-              <a:t>- Templates: Excel/Word files can be modified via MCP servers.</a:t>
-            </a:r>
-          </a:p>
-          <a:p>
-            <a:r>
-              <a:t>- Bot code: Even index.js and claude-runner.js can be edited.</a:t>
-            </a:r>
-          </a:p>
-          <a:p>
-            <a:r>
-              <a:t>- Environment: .env variables can be updated.</a:t>
-            </a:r>
-          </a:p>
-          <a:p>
-            <a:r>
-              <a:t>- Database: SQLite tables can be queried and modified.</a:t>
+              <a:t>All three bets are on Anthropic's roadmap, not on custom code.</a:t>
             </a:r>
           </a:p>
           <a:p/>
           <a:p>
             <a:r>
-              <a:t>No git required. No terminal required. No developer required.</a:t>
-            </a:r>
-          </a:p>
-          <a:p>
-            <a:r>
-              <a:t>The bot IS the terminal.</a:t>
+              <a:t>Example: When Anthropic released Claude 3.5 Sonnet, every Agent K deployment automatically got better at reading Excel files, understanding tax law, and generating more accurate financial statements. Zero code changes.</a:t>
             </a:r>
           </a:p>
           <a:p/>
           <a:p>
             <a:r>
-              <a:t>Git is optional — useful only for version history or syncing across machines.</a:t>
-            </a:r>
-          </a:p>
-          <a:p>
-            <a:r>
-              <a:t>For a single Mac Mini operation, the filesystem IS the repository.</a:t>
+              <a:t>This is fundamentally different from building a custom AI framework where you'd have to maintain prompt chains, retry logic, context management — all of which Anthropic is already doing inside Claude CLI.</a:t>
+            </a:r>
+          </a:p>
+          <a:p/>
+          <a:p>
+            <a:r>
+              <a:t>Even the Telegram bot layer benefits: faster model = shorter wait times for staff.</a:t>
             </a:r>
           </a:p>
         </p:txBody>
@@ -1256,81 +1366,61 @@
           <a:lstStyle/>
           <a:p>
             <a:r>
-              <a:t>CONCURRENT SESSIONS — TECHNICAL DETAILS:</a:t>
+              <a:t>KEY POINT: The firm does NOT need a developer to maintain the system.</a:t>
             </a:r>
           </a:p>
           <a:p/>
           <a:p>
             <a:r>
-              <a:t>The bot tracks users via a processingUsers Map keyed by userId.</a:t>
-            </a:r>
-          </a:p>
-          <a:p>
-            <a:r>
-              <a:t>Different users can send requests simultaneously — each spawns a separate claude CLI process. These are independent OS processes that don't share memory.</a:t>
+              <a:t>Because Claude CLI has full filesystem access (Read, Write, Edit, Bash tools), the Telegram user can instruct it to modify ANYTHING on the Mac Mini:</a:t>
             </a:r>
           </a:p>
           <a:p/>
           <a:p>
             <a:r>
-              <a:t>The heavy compute (AI inference) happens on Anthropic's cloud servers, NOT on the Mac Mini.</a:t>
-            </a:r>
-          </a:p>
-          <a:p>
-            <a:r>
-              <a:t>The Mac Mini only runs:</a:t>
-            </a:r>
-          </a:p>
-          <a:p>
-            <a:r>
-              <a:t>- Node.js bot process (~100MB)</a:t>
-            </a:r>
-          </a:p>
-          <a:p>
-            <a:r>
-              <a:t>- Claude CLI processes (~200MB each, mostly just making API calls)</a:t>
-            </a:r>
-          </a:p>
-          <a:p>
-            <a:r>
-              <a:t>- MCP servers (Playwright/Chromium ~300MB each if needed)</a:t>
+              <a:t>- Skills: SKILL.md files are just text. Claude can create/edit them.</a:t>
+            </a:r>
+          </a:p>
+          <a:p>
+            <a:r>
+              <a:t>- Templates: Excel/Word files can be modified via MCP servers.</a:t>
+            </a:r>
+          </a:p>
+          <a:p>
+            <a:r>
+              <a:t>- Bot code: Even index.js and claude-runner.js can be edited.</a:t>
+            </a:r>
+          </a:p>
+          <a:p>
+            <a:r>
+              <a:t>- Environment: .env variables can be updated.</a:t>
+            </a:r>
+          </a:p>
+          <a:p>
+            <a:r>
+              <a:t>- Database: SQLite tables can be queried and modified.</a:t>
             </a:r>
           </a:p>
           <a:p/>
           <a:p>
             <a:r>
-              <a:t>API RATE LIMITS (the real ceiling):</a:t>
-            </a:r>
-          </a:p>
-          <a:p>
-            <a:r>
-              <a:t>- All concurrent sessions share the same API key</a:t>
-            </a:r>
-          </a:p>
-          <a:p>
-            <a:r>
-              <a:t>- Claude Max ($100/mo): comfortable for 4-6 concurrent sessions</a:t>
-            </a:r>
-          </a:p>
-          <a:p>
-            <a:r>
-              <a:t>- API key (pay-per-use): scales with spend, tier-dependent</a:t>
-            </a:r>
-          </a:p>
-          <a:p>
-            <a:r>
-              <a:t>- When rate-limited, Claude CLI just waits — doesn't crash</a:t>
+              <a:t>No git required. No terminal required. No developer required.</a:t>
+            </a:r>
+          </a:p>
+          <a:p>
+            <a:r>
+              <a:t>The bot IS the terminal.</a:t>
             </a:r>
           </a:p>
           <a:p/>
           <a:p>
             <a:r>
-              <a:t>LIMITATION: Same user can't run two requests simultaneously.</a:t>
-            </a:r>
-          </a:p>
-          <a:p>
-            <a:r>
-              <a:t>This is by design (prevent confusion), but could be changed by modifying the session tracking from per-user to per-user-per-engagement.</a:t>
+              <a:t>Git is optional — useful only for version history or syncing across machines.</a:t>
+            </a:r>
+          </a:p>
+          <a:p>
+            <a:r>
+              <a:t>For a single Mac Mini operation, the filesystem IS the repository.</a:t>
             </a:r>
           </a:p>
         </p:txBody>
@@ -1400,77 +1490,81 @@
           <a:lstStyle/>
           <a:p>
             <a:r>
-              <a:t>HYBRID APPROACH — WHY THIS WORKS:</a:t>
+              <a:t>CONCURRENT SESSIONS — TECHNICAL DETAILS:</a:t>
             </a:r>
           </a:p>
           <a:p/>
           <a:p>
             <a:r>
-              <a:t>The key insight is that you don't need EVERYONE to be a power user.</a:t>
-            </a:r>
-          </a:p>
-          <a:p>
-            <a:r>
-              <a:t>You need everyone to USE the system (Telegram) and 1-2 people to MAINTAIN it (CLI).</a:t>
+              <a:t>The bot tracks users via a processingUsers Map keyed by userId.</a:t>
+            </a:r>
+          </a:p>
+          <a:p>
+            <a:r>
+              <a:t>Different users can send requests simultaneously — each spawns a separate claude CLI process. These are independent OS processes that don't share memory.</a:t>
             </a:r>
           </a:p>
           <a:p/>
           <a:p>
             <a:r>
-              <a:t>Analogy: A firm doesn't need every accountant to know how to set up the server. They need every accountant to use the software, and one IT person to keep it running.</a:t>
+              <a:t>The heavy compute (AI inference) happens on Anthropic's cloud servers, NOT on the Mac Mini.</a:t>
+            </a:r>
+          </a:p>
+          <a:p>
+            <a:r>
+              <a:t>The Mac Mini only runs:</a:t>
+            </a:r>
+          </a:p>
+          <a:p>
+            <a:r>
+              <a:t>- Node.js bot process (~100MB)</a:t>
+            </a:r>
+          </a:p>
+          <a:p>
+            <a:r>
+              <a:t>- Claude CLI processes (~200MB each, mostly just making API calls)</a:t>
+            </a:r>
+          </a:p>
+          <a:p>
+            <a:r>
+              <a:t>- MCP servers (Playwright/Chromium ~300MB each if needed)</a:t>
             </a:r>
           </a:p>
           <a:p/>
           <a:p>
             <a:r>
-              <a:t>TRAINING PLAN:</a:t>
-            </a:r>
-          </a:p>
-          <a:p>
-            <a:r>
-              <a:t>- All staff: 30-minute Telegram orientation. 'Here's the bot, here's how to send a request.'</a:t>
-            </a:r>
-          </a:p>
-          <a:p>
-            <a:r>
-              <a:t>- Power users: 2-day Claude Code training. Skills, MCP, debugging, maintenance.</a:t>
+              <a:t>API RATE LIMITS (the real ceiling):</a:t>
+            </a:r>
+          </a:p>
+          <a:p>
+            <a:r>
+              <a:t>- All concurrent sessions share the same API key</a:t>
+            </a:r>
+          </a:p>
+          <a:p>
+            <a:r>
+              <a:t>- Claude Max ($100/mo): comfortable for 4-6 concurrent sessions</a:t>
+            </a:r>
+          </a:p>
+          <a:p>
+            <a:r>
+              <a:t>- API key (pay-per-use): scales with spend, tier-dependent</a:t>
+            </a:r>
+          </a:p>
+          <a:p>
+            <a:r>
+              <a:t>- When rate-limited, Claude CLI just waits — doesn't crash</a:t>
             </a:r>
           </a:p>
           <a:p/>
           <a:p>
             <a:r>
-              <a:t>COST:</a:t>
-            </a:r>
-          </a:p>
-          <a:p>
-            <a:r>
-              <a:t>- Mac Mini M4: ~RM 3,000-5,000 (one-time)</a:t>
-            </a:r>
-          </a:p>
-          <a:p>
-            <a:r>
-              <a:t>- Claude Max subscription: ~RM 450/month</a:t>
-            </a:r>
-          </a:p>
-          <a:p>
-            <a:r>
-              <a:t>- Your setup &amp; training fee: one-time</a:t>
-            </a:r>
-          </a:p>
-          <a:p>
-            <a:r>
-              <a:t>- Ongoing: near-zero if power users are competent</a:t>
-            </a:r>
-          </a:p>
-          <a:p/>
-          <a:p>
-            <a:r>
-              <a:t>Compare to hiring one additional audit junior: RM 3,000-4,000/month + EPF + SOCSO.</a:t>
-            </a:r>
-          </a:p>
-          <a:p>
-            <a:r>
-              <a:t>The AI staff costs less and works 24/7.</a:t>
+              <a:t>LIMITATION: Same user can't run two requests simultaneously.</a:t>
+            </a:r>
+          </a:p>
+          <a:p>
+            <a:r>
+              <a:t>This is by design (prevent confusion), but could be changed by modifying the session tracking from per-user to per-user-per-engagement.</a:t>
             </a:r>
           </a:p>
         </p:txBody>
@@ -1496,6 +1590,146 @@
 </file>
 
 <file path=ppt/notesSlides/notesSlide16.xml><?xml version="1.0" encoding="utf-8"?>
+<p:notes xmlns:a="http://schemas.openxmlformats.org/drawingml/2006/main" xmlns:p="http://schemas.openxmlformats.org/presentationml/2006/main" xmlns:r="http://schemas.openxmlformats.org/officeDocument/2006/relationships">
+  <p:cSld>
+    <p:spTree>
+      <p:nvGrpSpPr>
+        <p:cNvPr id="1" name=""/>
+        <p:cNvGrpSpPr/>
+        <p:nvPr/>
+      </p:nvGrpSpPr>
+      <p:grpSpPr>
+        <a:xfrm>
+          <a:off x="0" y="0"/>
+          <a:ext cx="0" cy="0"/>
+          <a:chOff x="0" y="0"/>
+          <a:chExt cx="0" cy="0"/>
+        </a:xfrm>
+      </p:grpSpPr>
+      <p:sp>
+        <p:nvSpPr>
+          <p:cNvPr id="2" name="Slide Image Placeholder 1"/>
+          <p:cNvSpPr>
+            <a:spLocks noGrp="1"/>
+          </p:cNvSpPr>
+          <p:nvPr>
+            <p:ph type="sldImg" idx="2"/>
+          </p:nvPr>
+        </p:nvSpPr>
+        <p:spPr/>
+      </p:sp>
+      <p:sp>
+        <p:nvSpPr>
+          <p:cNvPr id="3" name="Notes Placeholder 2"/>
+          <p:cNvSpPr>
+            <a:spLocks noGrp="1"/>
+          </p:cNvSpPr>
+          <p:nvPr>
+            <p:ph type="body" idx="3" sz="quarter"/>
+          </p:nvPr>
+        </p:nvSpPr>
+        <p:spPr/>
+        <p:txBody>
+          <a:bodyPr/>
+          <a:lstStyle/>
+          <a:p>
+            <a:r>
+              <a:t>HYBRID APPROACH — WHY THIS WORKS:</a:t>
+            </a:r>
+          </a:p>
+          <a:p/>
+          <a:p>
+            <a:r>
+              <a:t>The key insight is that you don't need EVERYONE to be a power user.</a:t>
+            </a:r>
+          </a:p>
+          <a:p>
+            <a:r>
+              <a:t>You need everyone to USE the system (Telegram) and 1-2 people to MAINTAIN it (CLI).</a:t>
+            </a:r>
+          </a:p>
+          <a:p/>
+          <a:p>
+            <a:r>
+              <a:t>Analogy: A firm doesn't need every accountant to know how to set up the server. They need every accountant to use the software, and one IT person to keep it running.</a:t>
+            </a:r>
+          </a:p>
+          <a:p/>
+          <a:p>
+            <a:r>
+              <a:t>TRAINING PLAN:</a:t>
+            </a:r>
+          </a:p>
+          <a:p>
+            <a:r>
+              <a:t>- All staff: 30-minute Telegram orientation. 'Here's the bot, here's how to send a request.'</a:t>
+            </a:r>
+          </a:p>
+          <a:p>
+            <a:r>
+              <a:t>- Power users: 2-day Claude Code training. Skills, MCP, debugging, maintenance.</a:t>
+            </a:r>
+          </a:p>
+          <a:p/>
+          <a:p>
+            <a:r>
+              <a:t>COST:</a:t>
+            </a:r>
+          </a:p>
+          <a:p>
+            <a:r>
+              <a:t>- Mac Mini M4: ~RM 3,000-5,000 (one-time)</a:t>
+            </a:r>
+          </a:p>
+          <a:p>
+            <a:r>
+              <a:t>- Claude Max subscription: ~RM 450/month</a:t>
+            </a:r>
+          </a:p>
+          <a:p>
+            <a:r>
+              <a:t>- Your setup &amp; training fee: one-time</a:t>
+            </a:r>
+          </a:p>
+          <a:p>
+            <a:r>
+              <a:t>- Ongoing: near-zero if power users are competent</a:t>
+            </a:r>
+          </a:p>
+          <a:p/>
+          <a:p>
+            <a:r>
+              <a:t>Compare to hiring one additional audit junior: RM 3,000-4,000/month + EPF + SOCSO.</a:t>
+            </a:r>
+          </a:p>
+          <a:p>
+            <a:r>
+              <a:t>The AI staff costs less and works 24/7.</a:t>
+            </a:r>
+          </a:p>
+        </p:txBody>
+      </p:sp>
+      <p:sp>
+        <p:nvSpPr>
+          <p:cNvPr id="4" name="Slide Number Placeholder 3"/>
+          <p:cNvSpPr>
+            <a:spLocks noGrp="1"/>
+          </p:cNvSpPr>
+          <p:nvPr>
+            <p:ph type="sldNum" idx="5" sz="quarter"/>
+          </p:nvPr>
+        </p:nvSpPr>
+        <p:spPr/>
+      </p:sp>
+    </p:spTree>
+  </p:cSld>
+  <p:clrMapOvr>
+    <a:masterClrMapping/>
+  </p:clrMapOvr>
+</p:notes>
+</file>
+
+<file path=ppt/notesSlides/notesSlide17.xml><?xml version="1.0" encoding="utf-8"?>
 <p:notes xmlns:a="http://schemas.openxmlformats.org/drawingml/2006/main" xmlns:p="http://schemas.openxmlformats.org/presentationml/2006/main" xmlns:r="http://schemas.openxmlformats.org/officeDocument/2006/relationships">
   <p:cSld>
     <p:spTree>
@@ -10161,7 +10395,7 @@
               </a:defRPr>
             </a:pPr>
             <a:r>
-              <a:t>When Anthropic Improves, You Improve</a:t>
+              <a:t>n8n Workflows vs AI Agent: Right Tool for the Job</a:t>
             </a:r>
           </a:p>
         </p:txBody>
@@ -10197,7 +10431,7 @@
               </a:defRPr>
             </a:pPr>
             <a:r>
-              <a:t>Free upgrades, no code changes needed</a:t>
+              <a:t>Agents are powerful but expensive — use workflows for repetitive, predictable tasks</a:t>
             </a:r>
           </a:p>
         </p:txBody>
@@ -10210,8 +10444,114 @@
         </p:nvSpPr>
         <p:spPr>
           <a:xfrm>
-            <a:off x="457200" y="1280160"/>
-            <a:ext cx="4114800" cy="822960"/>
+            <a:off x="457200" y="1143000"/>
+            <a:ext cx="11247120" cy="502920"/>
+          </a:xfrm>
+          <a:prstGeom prst="roundRect">
+            <a:avLst/>
+          </a:prstGeom>
+          <a:solidFill>
+            <a:srgbClr val="C0392B"/>
+          </a:solidFill>
+          <a:ln>
+            <a:noFill/>
+          </a:ln>
+        </p:spPr>
+        <p:style>
+          <a:lnRef idx="1">
+            <a:schemeClr val="accent1"/>
+          </a:lnRef>
+          <a:fillRef idx="3">
+            <a:schemeClr val="accent1"/>
+          </a:fillRef>
+          <a:effectRef idx="2">
+            <a:schemeClr val="accent1"/>
+          </a:effectRef>
+          <a:fontRef idx="minor">
+            <a:schemeClr val="lt1"/>
+          </a:fontRef>
+        </p:style>
+        <p:txBody>
+          <a:bodyPr rtlCol="0" anchor="ctr" wrap="square" lIns="182880" rIns="182880" tIns="91440" bIns="91440"/>
+          <a:lstStyle/>
+          <a:p>
+            <a:pPr algn="ctr">
+              <a:defRPr sz="1400" b="1">
+                <a:solidFill>
+                  <a:srgbClr val="FFFFFF"/>
+                </a:solidFill>
+                <a:latin typeface="Calibri"/>
+              </a:defRPr>
+            </a:pPr>
+            <a:r>
+              <a:t>Core Principle:  AI agent calls cost tokens.  Every message = API cost.  If the task is the same every time, don't pay an AI to think about it — automate it.</a:t>
+            </a:r>
+          </a:p>
+        </p:txBody>
+      </p:sp>
+      <p:sp>
+        <p:nvSpPr>
+          <p:cNvPr id="6" name="Rounded Rectangle 5"/>
+          <p:cNvSpPr/>
+          <p:nvPr/>
+        </p:nvSpPr>
+        <p:spPr>
+          <a:xfrm>
+            <a:off x="365760" y="1920240"/>
+            <a:ext cx="5669280" cy="411480"/>
+          </a:xfrm>
+          <a:prstGeom prst="roundRect">
+            <a:avLst/>
+          </a:prstGeom>
+          <a:solidFill>
+            <a:srgbClr val="27AE60"/>
+          </a:solidFill>
+          <a:ln>
+            <a:noFill/>
+          </a:ln>
+        </p:spPr>
+        <p:style>
+          <a:lnRef idx="1">
+            <a:schemeClr val="accent1"/>
+          </a:lnRef>
+          <a:fillRef idx="3">
+            <a:schemeClr val="accent1"/>
+          </a:fillRef>
+          <a:effectRef idx="2">
+            <a:schemeClr val="accent1"/>
+          </a:effectRef>
+          <a:fontRef idx="minor">
+            <a:schemeClr val="lt1"/>
+          </a:fontRef>
+        </p:style>
+        <p:txBody>
+          <a:bodyPr rtlCol="0" anchor="ctr" lIns="137160"/>
+          <a:lstStyle/>
+          <a:p>
+            <a:pPr algn="ctr">
+              <a:defRPr sz="1400" b="1">
+                <a:solidFill>
+                  <a:srgbClr val="FFFFFF"/>
+                </a:solidFill>
+                <a:latin typeface="Calibri"/>
+              </a:defRPr>
+            </a:pPr>
+            <a:r>
+              <a:t>n8n Workflow  (Low Cost, High Volume)</a:t>
+            </a:r>
+          </a:p>
+        </p:txBody>
+      </p:sp>
+      <p:sp>
+        <p:nvSpPr>
+          <p:cNvPr id="7" name="Rounded Rectangle 6"/>
+          <p:cNvSpPr/>
+          <p:nvPr/>
+        </p:nvSpPr>
+        <p:spPr>
+          <a:xfrm>
+            <a:off x="365760" y="2286000"/>
+            <a:ext cx="5669280" cy="2560320"/>
           </a:xfrm>
           <a:prstGeom prst="roundRect">
             <a:avLst/>
@@ -10240,43 +10580,212 @@
           </a:fontRef>
         </p:style>
         <p:txBody>
-          <a:bodyPr rtlCol="0" anchor="ctr" wrap="square" lIns="182880" rIns="182880" tIns="91440" bIns="91440"/>
+          <a:bodyPr rtlCol="0" anchor="ctr" wrap="square" lIns="137160" tIns="137160"/>
           <a:lstStyle/>
           <a:p>
             <a:pPr algn="ctr">
-              <a:defRPr sz="1300" b="1">
-                <a:solidFill>
-                  <a:srgbClr val="1B2A4A"/>
-                </a:solidFill>
-                <a:latin typeface="Calibri"/>
-              </a:defRPr>
-            </a:pPr>
-            <a:r>
-              <a:t>Better reasoning</a:t>
-            </a:r>
-            <a:br/>
-            <a:r>
-              <a:t>(Opus 5, Sonnet 5)</a:t>
-            </a:r>
-          </a:p>
-        </p:txBody>
-      </p:sp>
-      <p:sp>
-        <p:nvSpPr>
-          <p:cNvPr id="6" name="Right Arrow 5"/>
+              <a:spcAft>
+                <a:spcPts val="400"/>
+              </a:spcAft>
+              <a:defRPr sz="1100">
+                <a:solidFill>
+                  <a:srgbClr val="1A1A2E"/>
+                </a:solidFill>
+                <a:latin typeface="Calibri"/>
+              </a:defRPr>
+            </a:pPr>
+            <a:r>
+              <a:t>Best for: Repetitive, predictable, rule-based tasks</a:t>
+            </a:r>
+          </a:p>
+          <a:p>
+            <a:pPr>
+              <a:spcAft>
+                <a:spcPts val="400"/>
+              </a:spcAft>
+              <a:defRPr sz="1100">
+                <a:solidFill>
+                  <a:srgbClr val="1A1A2E"/>
+                </a:solidFill>
+                <a:latin typeface="Calibri"/>
+              </a:defRPr>
+            </a:pPr>
+          </a:p>
+          <a:p>
+            <a:pPr>
+              <a:spcAft>
+                <a:spcPts val="400"/>
+              </a:spcAft>
+              <a:defRPr sz="1100">
+                <a:solidFill>
+                  <a:srgbClr val="1A1A2E"/>
+                </a:solidFill>
+                <a:latin typeface="Calibri"/>
+              </a:defRPr>
+            </a:pPr>
+            <a:r>
+              <a:t>•  Send monthly invoice reminders to all clients</a:t>
+            </a:r>
+          </a:p>
+          <a:p>
+            <a:pPr>
+              <a:spcAft>
+                <a:spcPts val="400"/>
+              </a:spcAft>
+              <a:defRPr sz="1100">
+                <a:solidFill>
+                  <a:srgbClr val="1A1A2E"/>
+                </a:solidFill>
+                <a:latin typeface="Calibri"/>
+              </a:defRPr>
+            </a:pPr>
+            <a:r>
+              <a:t>•  Auto-file incoming emails to client folders</a:t>
+            </a:r>
+          </a:p>
+          <a:p>
+            <a:pPr>
+              <a:spcAft>
+                <a:spcPts val="400"/>
+              </a:spcAft>
+              <a:defRPr sz="1100">
+                <a:solidFill>
+                  <a:srgbClr val="1A1A2E"/>
+                </a:solidFill>
+                <a:latin typeface="Calibri"/>
+              </a:defRPr>
+            </a:pPr>
+            <a:r>
+              <a:t>•  Daily backup of engagement files to Google Drive</a:t>
+            </a:r>
+          </a:p>
+          <a:p>
+            <a:pPr>
+              <a:spcAft>
+                <a:spcPts val="400"/>
+              </a:spcAft>
+              <a:defRPr sz="1100">
+                <a:solidFill>
+                  <a:srgbClr val="1A1A2E"/>
+                </a:solidFill>
+                <a:latin typeface="Calibri"/>
+              </a:defRPr>
+            </a:pPr>
+            <a:r>
+              <a:t>•  Forward signed documents to the right team</a:t>
+            </a:r>
+          </a:p>
+          <a:p>
+            <a:pPr>
+              <a:spcAft>
+                <a:spcPts val="400"/>
+              </a:spcAft>
+              <a:defRPr sz="1100">
+                <a:solidFill>
+                  <a:srgbClr val="1A1A2E"/>
+                </a:solidFill>
+                <a:latin typeface="Calibri"/>
+              </a:defRPr>
+            </a:pPr>
+            <a:r>
+              <a:t>•  Sync data between systems on a schedule</a:t>
+            </a:r>
+          </a:p>
+          <a:p>
+            <a:pPr>
+              <a:spcAft>
+                <a:spcPts val="400"/>
+              </a:spcAft>
+              <a:defRPr sz="1100">
+                <a:solidFill>
+                  <a:srgbClr val="1A1A2E"/>
+                </a:solidFill>
+                <a:latin typeface="Calibri"/>
+              </a:defRPr>
+            </a:pPr>
+            <a:r>
+              <a:t>•  Generate standard recurring reports (same format)</a:t>
+            </a:r>
+          </a:p>
+          <a:p>
+            <a:pPr>
+              <a:spcAft>
+                <a:spcPts val="400"/>
+              </a:spcAft>
+              <a:defRPr sz="1100">
+                <a:solidFill>
+                  <a:srgbClr val="1A1A2E"/>
+                </a:solidFill>
+                <a:latin typeface="Calibri"/>
+              </a:defRPr>
+            </a:pPr>
+          </a:p>
+          <a:p>
+            <a:pPr>
+              <a:spcAft>
+                <a:spcPts val="400"/>
+              </a:spcAft>
+              <a:defRPr sz="1100">
+                <a:solidFill>
+                  <a:srgbClr val="1A1A2E"/>
+                </a:solidFill>
+                <a:latin typeface="Calibri"/>
+              </a:defRPr>
+            </a:pPr>
+            <a:r>
+              <a:t>Cost: Near-zero  (self-hosted, no AI tokens)</a:t>
+            </a:r>
+          </a:p>
+          <a:p>
+            <a:pPr>
+              <a:spcAft>
+                <a:spcPts val="400"/>
+              </a:spcAft>
+              <a:defRPr sz="1100">
+                <a:solidFill>
+                  <a:srgbClr val="1A1A2E"/>
+                </a:solidFill>
+                <a:latin typeface="Calibri"/>
+              </a:defRPr>
+            </a:pPr>
+            <a:r>
+              <a:t>Speed: Instant  (no model inference)</a:t>
+            </a:r>
+          </a:p>
+          <a:p>
+            <a:pPr>
+              <a:spcAft>
+                <a:spcPts val="400"/>
+              </a:spcAft>
+              <a:defRPr sz="1100">
+                <a:solidFill>
+                  <a:srgbClr val="1A1A2E"/>
+                </a:solidFill>
+                <a:latin typeface="Calibri"/>
+              </a:defRPr>
+            </a:pPr>
+            <a:r>
+              <a:t>Setup: Visual drag-and-drop workflow builder</a:t>
+            </a:r>
+          </a:p>
+        </p:txBody>
+      </p:sp>
+      <p:sp>
+        <p:nvSpPr>
+          <p:cNvPr id="8" name="Rounded Rectangle 7"/>
           <p:cNvSpPr/>
           <p:nvPr/>
         </p:nvSpPr>
         <p:spPr>
           <a:xfrm>
-            <a:off x="4663440" y="1508760"/>
-            <a:ext cx="457200" cy="320040"/>
-          </a:xfrm>
-          <a:prstGeom prst="rightArrow">
-            <a:avLst/>
-          </a:prstGeom>
-          <a:solidFill>
-            <a:srgbClr val="27AE60"/>
+            <a:off x="6217920" y="1920240"/>
+            <a:ext cx="5669280" cy="411480"/>
+          </a:xfrm>
+          <a:prstGeom prst="roundRect">
+            <a:avLst/>
+          </a:prstGeom>
+          <a:solidFill>
+            <a:srgbClr val="2C5F8A"/>
           </a:solidFill>
           <a:ln>
             <a:noFill/>
@@ -10297,33 +10806,43 @@
           </a:fontRef>
         </p:style>
         <p:txBody>
-          <a:bodyPr rtlCol="0" anchor="ctr"/>
-          <a:lstStyle/>
-          <a:p>
-            <a:pPr algn="ctr"/>
-          </a:p>
-        </p:txBody>
-      </p:sp>
-      <p:sp>
-        <p:nvSpPr>
-          <p:cNvPr id="7" name="Rounded Rectangle 6"/>
+          <a:bodyPr rtlCol="0" anchor="ctr" lIns="137160"/>
+          <a:lstStyle/>
+          <a:p>
+            <a:pPr algn="ctr">
+              <a:defRPr sz="1400" b="1">
+                <a:solidFill>
+                  <a:srgbClr val="FFFFFF"/>
+                </a:solidFill>
+                <a:latin typeface="Calibri"/>
+              </a:defRPr>
+            </a:pPr>
+            <a:r>
+              <a:t>AI Agent  (Higher Cost, High Value)</a:t>
+            </a:r>
+          </a:p>
+        </p:txBody>
+      </p:sp>
+      <p:sp>
+        <p:nvSpPr>
+          <p:cNvPr id="9" name="Rounded Rectangle 8"/>
           <p:cNvSpPr/>
           <p:nvPr/>
         </p:nvSpPr>
         <p:spPr>
           <a:xfrm>
-            <a:off x="5212080" y="1280160"/>
-            <a:ext cx="5029200" cy="822960"/>
+            <a:off x="6217920" y="2286000"/>
+            <a:ext cx="5669280" cy="2560320"/>
           </a:xfrm>
           <a:prstGeom prst="roundRect">
             <a:avLst/>
           </a:prstGeom>
           <a:solidFill>
-            <a:srgbClr val="E8F5E9"/>
+            <a:srgbClr val="FFFFFF"/>
           </a:solidFill>
           <a:ln w="12700">
             <a:solidFill>
-              <a:srgbClr val="27AE60"/>
+              <a:srgbClr val="DDDDEE"/>
             </a:solidFill>
           </a:ln>
         </p:spPr>
@@ -10342,48 +10861,251 @@
           </a:fontRef>
         </p:style>
         <p:txBody>
-          <a:bodyPr rtlCol="0" anchor="ctr" wrap="square" lIns="182880" rIns="182880" tIns="91440" bIns="91440"/>
+          <a:bodyPr rtlCol="0" anchor="ctr" wrap="square" lIns="137160" tIns="137160"/>
           <a:lstStyle/>
           <a:p>
             <a:pPr algn="ctr">
-              <a:defRPr sz="1300" b="0">
-                <a:solidFill>
-                  <a:srgbClr val="27AE60"/>
-                </a:solidFill>
-                <a:latin typeface="Calibri"/>
-              </a:defRPr>
-            </a:pPr>
-            <a:r>
-              <a:t>More accurate tax computations,</a:t>
-            </a:r>
-            <a:br/>
-            <a:r>
-              <a:t>catches more audit issues</a:t>
-            </a:r>
-          </a:p>
-        </p:txBody>
-      </p:sp>
-      <p:sp>
-        <p:nvSpPr>
-          <p:cNvPr id="8" name="Rounded Rectangle 7"/>
+              <a:spcAft>
+                <a:spcPts val="400"/>
+              </a:spcAft>
+              <a:defRPr sz="1100">
+                <a:solidFill>
+                  <a:srgbClr val="1A1A2E"/>
+                </a:solidFill>
+                <a:latin typeface="Calibri"/>
+              </a:defRPr>
+            </a:pPr>
+            <a:r>
+              <a:t>Best for: Dynamic, judgment-heavy, varied tasks</a:t>
+            </a:r>
+          </a:p>
+          <a:p>
+            <a:pPr>
+              <a:spcAft>
+                <a:spcPts val="400"/>
+              </a:spcAft>
+              <a:defRPr sz="1100">
+                <a:solidFill>
+                  <a:srgbClr val="1A1A2E"/>
+                </a:solidFill>
+                <a:latin typeface="Calibri"/>
+              </a:defRPr>
+            </a:pPr>
+          </a:p>
+          <a:p>
+            <a:pPr>
+              <a:spcAft>
+                <a:spcPts val="400"/>
+              </a:spcAft>
+              <a:defRPr sz="1100">
+                <a:solidFill>
+                  <a:srgbClr val="1A1A2E"/>
+                </a:solidFill>
+                <a:latin typeface="Calibri"/>
+              </a:defRPr>
+            </a:pPr>
+            <a:r>
+              <a:t>•  Prepare tax computation (different P&amp;L each time)</a:t>
+            </a:r>
+          </a:p>
+          <a:p>
+            <a:pPr>
+              <a:spcAft>
+                <a:spcPts val="400"/>
+              </a:spcAft>
+              <a:defRPr sz="1100">
+                <a:solidFill>
+                  <a:srgbClr val="1A1A2E"/>
+                </a:solidFill>
+                <a:latin typeface="Calibri"/>
+              </a:defRPr>
+            </a:pPr>
+            <a:r>
+              <a:t>•  Draft audit report with professional judgment</a:t>
+            </a:r>
+          </a:p>
+          <a:p>
+            <a:pPr>
+              <a:spcAft>
+                <a:spcPts val="400"/>
+              </a:spcAft>
+              <a:defRPr sz="1100">
+                <a:solidFill>
+                  <a:srgbClr val="1A1A2E"/>
+                </a:solidFill>
+                <a:latin typeface="Calibri"/>
+              </a:defRPr>
+            </a:pPr>
+            <a:r>
+              <a:t>•  Read and summarize a new contract</a:t>
+            </a:r>
+          </a:p>
+          <a:p>
+            <a:pPr>
+              <a:spcAft>
+                <a:spcPts val="400"/>
+              </a:spcAft>
+              <a:defRPr sz="1100">
+                <a:solidFill>
+                  <a:srgbClr val="1A1A2E"/>
+                </a:solidFill>
+                <a:latin typeface="Calibri"/>
+              </a:defRPr>
+            </a:pPr>
+            <a:r>
+              <a:t>•  Answer staff questions about standards</a:t>
+            </a:r>
+          </a:p>
+          <a:p>
+            <a:pPr>
+              <a:spcAft>
+                <a:spcPts val="400"/>
+              </a:spcAft>
+              <a:defRPr sz="1100">
+                <a:solidFill>
+                  <a:srgbClr val="1A1A2E"/>
+                </a:solidFill>
+                <a:latin typeface="Calibri"/>
+              </a:defRPr>
+            </a:pPr>
+            <a:r>
+              <a:t>•  Create custom workpapers for unique situations</a:t>
+            </a:r>
+          </a:p>
+          <a:p>
+            <a:pPr>
+              <a:spcAft>
+                <a:spcPts val="400"/>
+              </a:spcAft>
+              <a:defRPr sz="1100">
+                <a:solidFill>
+                  <a:srgbClr val="1A1A2E"/>
+                </a:solidFill>
+                <a:latin typeface="Calibri"/>
+              </a:defRPr>
+            </a:pPr>
+            <a:r>
+              <a:t>•  Handle tasks that need reasoning and context</a:t>
+            </a:r>
+          </a:p>
+          <a:p>
+            <a:pPr>
+              <a:spcAft>
+                <a:spcPts val="400"/>
+              </a:spcAft>
+              <a:defRPr sz="1100">
+                <a:solidFill>
+                  <a:srgbClr val="1A1A2E"/>
+                </a:solidFill>
+                <a:latin typeface="Calibri"/>
+              </a:defRPr>
+            </a:pPr>
+          </a:p>
+          <a:p>
+            <a:pPr>
+              <a:spcAft>
+                <a:spcPts val="400"/>
+              </a:spcAft>
+              <a:defRPr sz="1100">
+                <a:solidFill>
+                  <a:srgbClr val="1A1A2E"/>
+                </a:solidFill>
+                <a:latin typeface="Calibri"/>
+              </a:defRPr>
+            </a:pPr>
+            <a:r>
+              <a:t>Cost: ~RM 0.10–0.50 per request  (API tokens)</a:t>
+            </a:r>
+          </a:p>
+          <a:p>
+            <a:pPr>
+              <a:spcAft>
+                <a:spcPts val="400"/>
+              </a:spcAft>
+              <a:defRPr sz="1100">
+                <a:solidFill>
+                  <a:srgbClr val="1A1A2E"/>
+                </a:solidFill>
+                <a:latin typeface="Calibri"/>
+              </a:defRPr>
+            </a:pPr>
+            <a:r>
+              <a:t>Speed: 30s–5min  (depends on complexity)</a:t>
+            </a:r>
+          </a:p>
+          <a:p>
+            <a:pPr>
+              <a:spcAft>
+                <a:spcPts val="400"/>
+              </a:spcAft>
+              <a:defRPr sz="1100">
+                <a:solidFill>
+                  <a:srgbClr val="1A1A2E"/>
+                </a:solidFill>
+                <a:latin typeface="Calibri"/>
+              </a:defRPr>
+            </a:pPr>
+            <a:r>
+              <a:t>Setup: Skills + CLAUDE.md (plain English)</a:t>
+            </a:r>
+          </a:p>
+        </p:txBody>
+      </p:sp>
+      <p:sp>
+        <p:nvSpPr>
+          <p:cNvPr id="10" name="TextBox 9"/>
+          <p:cNvSpPr txBox="1"/>
+          <p:nvPr/>
+        </p:nvSpPr>
+        <p:spPr>
+          <a:xfrm>
+            <a:off x="365760" y="5029200"/>
+            <a:ext cx="10972800" cy="320040"/>
+          </a:xfrm>
+          <a:prstGeom prst="rect">
+            <a:avLst/>
+          </a:prstGeom>
+          <a:noFill/>
+        </p:spPr>
+        <p:txBody>
+          <a:bodyPr wrap="square">
+            <a:spAutoFit/>
+          </a:bodyPr>
+          <a:lstStyle/>
+          <a:p>
+            <a:pPr algn="l">
+              <a:defRPr sz="1500" b="1">
+                <a:solidFill>
+                  <a:srgbClr val="1B2A4A"/>
+                </a:solidFill>
+                <a:latin typeface="Calibri"/>
+              </a:defRPr>
+            </a:pPr>
+            <a:r>
+              <a:t>Quick Decision Guide:</a:t>
+            </a:r>
+          </a:p>
+        </p:txBody>
+      </p:sp>
+      <p:sp>
+        <p:nvSpPr>
+          <p:cNvPr id="11" name="Rounded Rectangle 10"/>
           <p:cNvSpPr/>
           <p:nvPr/>
         </p:nvSpPr>
         <p:spPr>
           <a:xfrm>
-            <a:off x="457200" y="2240280"/>
-            <a:ext cx="4114800" cy="822960"/>
+            <a:off x="457200" y="5349240"/>
+            <a:ext cx="4754880" cy="320040"/>
           </a:xfrm>
           <a:prstGeom prst="roundRect">
             <a:avLst/>
           </a:prstGeom>
           <a:solidFill>
-            <a:srgbClr val="FFFFFF"/>
-          </a:solidFill>
-          <a:ln w="12700">
-            <a:solidFill>
-              <a:srgbClr val="DDDDEE"/>
-            </a:solidFill>
+            <a:srgbClr val="1B2A4A"/>
+          </a:solidFill>
+          <a:ln>
+            <a:noFill/>
           </a:ln>
         </p:spPr>
         <p:style>
@@ -10405,35 +11127,35 @@
           <a:lstStyle/>
           <a:p>
             <a:pPr algn="ctr">
-              <a:defRPr sz="1300" b="1">
-                <a:solidFill>
-                  <a:srgbClr val="1B2A4A"/>
-                </a:solidFill>
-                <a:latin typeface="Calibri"/>
-              </a:defRPr>
-            </a:pPr>
-            <a:r>
-              <a:t>Larger context window</a:t>
-            </a:r>
-          </a:p>
-        </p:txBody>
-      </p:sp>
-      <p:sp>
-        <p:nvSpPr>
-          <p:cNvPr id="9" name="Right Arrow 8"/>
+              <a:defRPr sz="1000" b="1">
+                <a:solidFill>
+                  <a:srgbClr val="FFFFFF"/>
+                </a:solidFill>
+                <a:latin typeface="Calibri"/>
+              </a:defRPr>
+            </a:pPr>
+            <a:r>
+              <a:t>Question</a:t>
+            </a:r>
+          </a:p>
+        </p:txBody>
+      </p:sp>
+      <p:sp>
+        <p:nvSpPr>
+          <p:cNvPr id="12" name="Rounded Rectangle 11"/>
           <p:cNvSpPr/>
           <p:nvPr/>
         </p:nvSpPr>
         <p:spPr>
           <a:xfrm>
-            <a:off x="4663440" y="2468880"/>
-            <a:ext cx="457200" cy="320040"/>
-          </a:xfrm>
-          <a:prstGeom prst="rightArrow">
-            <a:avLst/>
-          </a:prstGeom>
-          <a:solidFill>
-            <a:srgbClr val="27AE60"/>
+            <a:off x="5212080" y="5349240"/>
+            <a:ext cx="3108960" cy="320040"/>
+          </a:xfrm>
+          <a:prstGeom prst="roundRect">
+            <a:avLst/>
+          </a:prstGeom>
+          <a:solidFill>
+            <a:srgbClr val="1B2A4A"/>
           </a:solidFill>
           <a:ln>
             <a:noFill/>
@@ -10454,34 +11176,42 @@
           </a:fontRef>
         </p:style>
         <p:txBody>
-          <a:bodyPr rtlCol="0" anchor="ctr"/>
-          <a:lstStyle/>
-          <a:p>
-            <a:pPr algn="ctr"/>
-          </a:p>
-        </p:txBody>
-      </p:sp>
-      <p:sp>
-        <p:nvSpPr>
-          <p:cNvPr id="10" name="Rounded Rectangle 9"/>
+          <a:bodyPr rtlCol="0" anchor="ctr" wrap="square" lIns="182880" rIns="182880" tIns="91440" bIns="91440"/>
+          <a:lstStyle/>
+          <a:p>
+            <a:pPr algn="ctr">
+              <a:defRPr sz="1000" b="1">
+                <a:solidFill>
+                  <a:srgbClr val="FFFFFF"/>
+                </a:solidFill>
+                <a:latin typeface="Calibri"/>
+              </a:defRPr>
+            </a:pPr>
+            <a:r>
+              <a:t>n8n Workflow</a:t>
+            </a:r>
+          </a:p>
+        </p:txBody>
+      </p:sp>
+      <p:sp>
+        <p:nvSpPr>
+          <p:cNvPr id="13" name="Rounded Rectangle 12"/>
           <p:cNvSpPr/>
           <p:nvPr/>
         </p:nvSpPr>
         <p:spPr>
           <a:xfrm>
-            <a:off x="5212080" y="2240280"/>
-            <a:ext cx="5029200" cy="822960"/>
+            <a:off x="8321040" y="5349240"/>
+            <a:ext cx="3108960" cy="320040"/>
           </a:xfrm>
           <a:prstGeom prst="roundRect">
             <a:avLst/>
           </a:prstGeom>
           <a:solidFill>
-            <a:srgbClr val="E8F5E9"/>
-          </a:solidFill>
-          <a:ln w="12700">
-            <a:solidFill>
-              <a:srgbClr val="27AE60"/>
-            </a:solidFill>
+            <a:srgbClr val="1B2A4A"/>
+          </a:solidFill>
+          <a:ln>
+            <a:noFill/>
           </a:ln>
         </p:spPr>
         <p:style>
@@ -10503,33 +11233,29 @@
           <a:lstStyle/>
           <a:p>
             <a:pPr algn="ctr">
-              <a:defRPr sz="1300" b="0">
-                <a:solidFill>
-                  <a:srgbClr val="27AE60"/>
-                </a:solidFill>
-                <a:latin typeface="Calibri"/>
-              </a:defRPr>
-            </a:pPr>
-            <a:r>
-              <a:t>Handles bigger trial balances,</a:t>
-            </a:r>
-            <a:br/>
-            <a:r>
-              <a:t>reads longer contracts in one pass</a:t>
-            </a:r>
-          </a:p>
-        </p:txBody>
-      </p:sp>
-      <p:sp>
-        <p:nvSpPr>
-          <p:cNvPr id="11" name="Rounded Rectangle 10"/>
+              <a:defRPr sz="1000" b="1">
+                <a:solidFill>
+                  <a:srgbClr val="FFFFFF"/>
+                </a:solidFill>
+                <a:latin typeface="Calibri"/>
+              </a:defRPr>
+            </a:pPr>
+            <a:r>
+              <a:t>AI Agent</a:t>
+            </a:r>
+          </a:p>
+        </p:txBody>
+      </p:sp>
+      <p:sp>
+        <p:nvSpPr>
+          <p:cNvPr id="14" name="Rounded Rectangle 13"/>
           <p:cNvSpPr/>
           <p:nvPr/>
         </p:nvSpPr>
         <p:spPr>
           <a:xfrm>
-            <a:off x="457200" y="3200400"/>
-            <a:ext cx="4114800" cy="822960"/>
+            <a:off x="457200" y="5669280"/>
+            <a:ext cx="4754880" cy="256032"/>
           </a:xfrm>
           <a:prstGeom prst="roundRect">
             <a:avLst/>
@@ -10537,10 +11263,8 @@
           <a:solidFill>
             <a:srgbClr val="FFFFFF"/>
           </a:solidFill>
-          <a:ln w="12700">
-            <a:solidFill>
-              <a:srgbClr val="DDDDEE"/>
-            </a:solidFill>
+          <a:ln>
+            <a:noFill/>
           </a:ln>
         </p:spPr>
         <p:style>
@@ -10561,36 +11285,36 @@
           <a:bodyPr rtlCol="0" anchor="ctr" wrap="square" lIns="182880" rIns="182880" tIns="91440" bIns="91440"/>
           <a:lstStyle/>
           <a:p>
-            <a:pPr algn="ctr">
-              <a:defRPr sz="1300" b="1">
-                <a:solidFill>
-                  <a:srgbClr val="1B2A4A"/>
-                </a:solidFill>
-                <a:latin typeface="Calibri"/>
-              </a:defRPr>
-            </a:pPr>
-            <a:r>
-              <a:t>Better tool use</a:t>
-            </a:r>
-          </a:p>
-        </p:txBody>
-      </p:sp>
-      <p:sp>
-        <p:nvSpPr>
-          <p:cNvPr id="12" name="Right Arrow 11"/>
+            <a:pPr algn="l">
+              <a:defRPr sz="900" b="1">
+                <a:solidFill>
+                  <a:srgbClr val="1A1A2E"/>
+                </a:solidFill>
+                <a:latin typeface="Calibri"/>
+              </a:defRPr>
+            </a:pPr>
+            <a:r>
+              <a:t>Is the task the same every time?</a:t>
+            </a:r>
+          </a:p>
+        </p:txBody>
+      </p:sp>
+      <p:sp>
+        <p:nvSpPr>
+          <p:cNvPr id="15" name="Rounded Rectangle 14"/>
           <p:cNvSpPr/>
           <p:nvPr/>
         </p:nvSpPr>
         <p:spPr>
           <a:xfrm>
-            <a:off x="4663440" y="3429000"/>
-            <a:ext cx="457200" cy="320040"/>
-          </a:xfrm>
-          <a:prstGeom prst="rightArrow">
-            <a:avLst/>
-          </a:prstGeom>
-          <a:solidFill>
-            <a:srgbClr val="27AE60"/>
+            <a:off x="5212080" y="5669280"/>
+            <a:ext cx="3108960" cy="256032"/>
+          </a:xfrm>
+          <a:prstGeom prst="roundRect">
+            <a:avLst/>
+          </a:prstGeom>
+          <a:solidFill>
+            <a:srgbClr val="FFFFFF"/>
           </a:solidFill>
           <a:ln>
             <a:noFill/>
@@ -10611,34 +11335,42 @@
           </a:fontRef>
         </p:style>
         <p:txBody>
-          <a:bodyPr rtlCol="0" anchor="ctr"/>
-          <a:lstStyle/>
-          <a:p>
-            <a:pPr algn="ctr"/>
-          </a:p>
-        </p:txBody>
-      </p:sp>
-      <p:sp>
-        <p:nvSpPr>
-          <p:cNvPr id="13" name="Rounded Rectangle 12"/>
+          <a:bodyPr rtlCol="0" anchor="ctr" wrap="square" lIns="182880" rIns="182880" tIns="91440" bIns="91440"/>
+          <a:lstStyle/>
+          <a:p>
+            <a:pPr algn="ctr">
+              <a:defRPr sz="900" b="0">
+                <a:solidFill>
+                  <a:srgbClr val="27AE60"/>
+                </a:solidFill>
+                <a:latin typeface="Calibri"/>
+              </a:defRPr>
+            </a:pPr>
+            <a:r>
+              <a:t>YES → n8n</a:t>
+            </a:r>
+          </a:p>
+        </p:txBody>
+      </p:sp>
+      <p:sp>
+        <p:nvSpPr>
+          <p:cNvPr id="16" name="Rounded Rectangle 15"/>
           <p:cNvSpPr/>
           <p:nvPr/>
         </p:nvSpPr>
         <p:spPr>
           <a:xfrm>
-            <a:off x="5212080" y="3200400"/>
-            <a:ext cx="5029200" cy="822960"/>
+            <a:off x="8321040" y="5669280"/>
+            <a:ext cx="3108960" cy="256032"/>
           </a:xfrm>
           <a:prstGeom prst="roundRect">
             <a:avLst/>
           </a:prstGeom>
           <a:solidFill>
-            <a:srgbClr val="E8F5E9"/>
-          </a:solidFill>
-          <a:ln w="12700">
-            <a:solidFill>
-              <a:srgbClr val="27AE60"/>
-            </a:solidFill>
+            <a:srgbClr val="FFFFFF"/>
+          </a:solidFill>
+          <a:ln>
+            <a:noFill/>
           </a:ln>
         </p:spPr>
         <p:style>
@@ -10660,44 +11392,38 @@
           <a:lstStyle/>
           <a:p>
             <a:pPr algn="ctr">
-              <a:defRPr sz="1300" b="0">
-                <a:solidFill>
-                  <a:srgbClr val="27AE60"/>
-                </a:solidFill>
-                <a:latin typeface="Calibri"/>
-              </a:defRPr>
-            </a:pPr>
-            <a:r>
-              <a:t>More reliable Excel/Word operations,</a:t>
-            </a:r>
-            <a:br/>
-            <a:r>
-              <a:t>fewer MCP errors</a:t>
-            </a:r>
-          </a:p>
-        </p:txBody>
-      </p:sp>
-      <p:sp>
-        <p:nvSpPr>
-          <p:cNvPr id="14" name="Rounded Rectangle 13"/>
+              <a:defRPr sz="900" b="0">
+                <a:solidFill>
+                  <a:srgbClr val="2C5F8A"/>
+                </a:solidFill>
+                <a:latin typeface="Calibri"/>
+              </a:defRPr>
+            </a:pPr>
+            <a:r>
+              <a:t>NO → Agent</a:t>
+            </a:r>
+          </a:p>
+        </p:txBody>
+      </p:sp>
+      <p:sp>
+        <p:nvSpPr>
+          <p:cNvPr id="17" name="Rounded Rectangle 16"/>
           <p:cNvSpPr/>
           <p:nvPr/>
         </p:nvSpPr>
         <p:spPr>
           <a:xfrm>
-            <a:off x="457200" y="4160520"/>
-            <a:ext cx="4114800" cy="822960"/>
+            <a:off x="457200" y="5943600"/>
+            <a:ext cx="4754880" cy="256032"/>
           </a:xfrm>
           <a:prstGeom prst="roundRect">
             <a:avLst/>
           </a:prstGeom>
           <a:solidFill>
-            <a:srgbClr val="FFFFFF"/>
-          </a:solidFill>
-          <a:ln w="12700">
-            <a:solidFill>
-              <a:srgbClr val="DDDDEE"/>
-            </a:solidFill>
+            <a:srgbClr val="F5F7FA"/>
+          </a:solidFill>
+          <a:ln>
+            <a:noFill/>
           </a:ln>
         </p:spPr>
         <p:style>
@@ -10718,36 +11444,36 @@
           <a:bodyPr rtlCol="0" anchor="ctr" wrap="square" lIns="182880" rIns="182880" tIns="91440" bIns="91440"/>
           <a:lstStyle/>
           <a:p>
-            <a:pPr algn="ctr">
-              <a:defRPr sz="1300" b="1">
-                <a:solidFill>
-                  <a:srgbClr val="1B2A4A"/>
-                </a:solidFill>
-                <a:latin typeface="Calibri"/>
-              </a:defRPr>
-            </a:pPr>
-            <a:r>
-              <a:t>Faster inference</a:t>
-            </a:r>
-          </a:p>
-        </p:txBody>
-      </p:sp>
-      <p:sp>
-        <p:nvSpPr>
-          <p:cNvPr id="15" name="Right Arrow 14"/>
+            <a:pPr algn="l">
+              <a:defRPr sz="900" b="1">
+                <a:solidFill>
+                  <a:srgbClr val="1A1A2E"/>
+                </a:solidFill>
+                <a:latin typeface="Calibri"/>
+              </a:defRPr>
+            </a:pPr>
+            <a:r>
+              <a:t>Does it require reading/understanding new documents?</a:t>
+            </a:r>
+          </a:p>
+        </p:txBody>
+      </p:sp>
+      <p:sp>
+        <p:nvSpPr>
+          <p:cNvPr id="18" name="Rounded Rectangle 17"/>
           <p:cNvSpPr/>
           <p:nvPr/>
         </p:nvSpPr>
         <p:spPr>
           <a:xfrm>
-            <a:off x="4663440" y="4389120"/>
-            <a:ext cx="457200" cy="320040"/>
-          </a:xfrm>
-          <a:prstGeom prst="rightArrow">
-            <a:avLst/>
-          </a:prstGeom>
-          <a:solidFill>
-            <a:srgbClr val="27AE60"/>
+            <a:off x="5212080" y="5943600"/>
+            <a:ext cx="3108960" cy="256032"/>
+          </a:xfrm>
+          <a:prstGeom prst="roundRect">
+            <a:avLst/>
+          </a:prstGeom>
+          <a:solidFill>
+            <a:srgbClr val="F5F7FA"/>
           </a:solidFill>
           <a:ln>
             <a:noFill/>
@@ -10768,34 +11494,42 @@
           </a:fontRef>
         </p:style>
         <p:txBody>
-          <a:bodyPr rtlCol="0" anchor="ctr"/>
-          <a:lstStyle/>
-          <a:p>
-            <a:pPr algn="ctr"/>
-          </a:p>
-        </p:txBody>
-      </p:sp>
-      <p:sp>
-        <p:nvSpPr>
-          <p:cNvPr id="16" name="Rounded Rectangle 15"/>
+          <a:bodyPr rtlCol="0" anchor="ctr" wrap="square" lIns="182880" rIns="182880" tIns="91440" bIns="91440"/>
+          <a:lstStyle/>
+          <a:p>
+            <a:pPr algn="ctr">
+              <a:defRPr sz="900" b="0">
+                <a:solidFill>
+                  <a:srgbClr val="27AE60"/>
+                </a:solidFill>
+                <a:latin typeface="Calibri"/>
+              </a:defRPr>
+            </a:pPr>
+            <a:r>
+              <a:t>NO → n8n</a:t>
+            </a:r>
+          </a:p>
+        </p:txBody>
+      </p:sp>
+      <p:sp>
+        <p:nvSpPr>
+          <p:cNvPr id="19" name="Rounded Rectangle 18"/>
           <p:cNvSpPr/>
           <p:nvPr/>
         </p:nvSpPr>
         <p:spPr>
           <a:xfrm>
-            <a:off x="5212080" y="4160520"/>
-            <a:ext cx="5029200" cy="822960"/>
+            <a:off x="8321040" y="5943600"/>
+            <a:ext cx="3108960" cy="256032"/>
           </a:xfrm>
           <a:prstGeom prst="roundRect">
             <a:avLst/>
           </a:prstGeom>
           <a:solidFill>
-            <a:srgbClr val="E8F5E9"/>
-          </a:solidFill>
-          <a:ln w="12700">
-            <a:solidFill>
-              <a:srgbClr val="27AE60"/>
-            </a:solidFill>
+            <a:srgbClr val="F5F7FA"/>
+          </a:solidFill>
+          <a:ln>
+            <a:noFill/>
           </a:ln>
         </p:spPr>
         <p:style>
@@ -10817,33 +11551,29 @@
           <a:lstStyle/>
           <a:p>
             <a:pPr algn="ctr">
-              <a:defRPr sz="1300" b="0">
-                <a:solidFill>
-                  <a:srgbClr val="27AE60"/>
-                </a:solidFill>
-                <a:latin typeface="Calibri"/>
-              </a:defRPr>
-            </a:pPr>
-            <a:r>
-              <a:t>Quicker responses,</a:t>
-            </a:r>
-            <a:br/>
-            <a:r>
-              <a:t>shorter wait times in Telegram</a:t>
-            </a:r>
-          </a:p>
-        </p:txBody>
-      </p:sp>
-      <p:sp>
-        <p:nvSpPr>
-          <p:cNvPr id="17" name="Rounded Rectangle 16"/>
+              <a:defRPr sz="900" b="0">
+                <a:solidFill>
+                  <a:srgbClr val="2C5F8A"/>
+                </a:solidFill>
+                <a:latin typeface="Calibri"/>
+              </a:defRPr>
+            </a:pPr>
+            <a:r>
+              <a:t>YES → Agent</a:t>
+            </a:r>
+          </a:p>
+        </p:txBody>
+      </p:sp>
+      <p:sp>
+        <p:nvSpPr>
+          <p:cNvPr id="20" name="Rounded Rectangle 19"/>
           <p:cNvSpPr/>
           <p:nvPr/>
         </p:nvSpPr>
         <p:spPr>
           <a:xfrm>
-            <a:off x="457200" y="5120640"/>
-            <a:ext cx="4114800" cy="822960"/>
+            <a:off x="457200" y="6217920"/>
+            <a:ext cx="4754880" cy="256032"/>
           </a:xfrm>
           <a:prstGeom prst="roundRect">
             <a:avLst/>
@@ -10851,10 +11581,8 @@
           <a:solidFill>
             <a:srgbClr val="FFFFFF"/>
           </a:solidFill>
-          <a:ln w="12700">
-            <a:solidFill>
-              <a:srgbClr val="DDDDEE"/>
-            </a:solidFill>
+          <a:ln>
+            <a:noFill/>
           </a:ln>
         </p:spPr>
         <p:style>
@@ -10875,36 +11603,36 @@
           <a:bodyPr rtlCol="0" anchor="ctr" wrap="square" lIns="182880" rIns="182880" tIns="91440" bIns="91440"/>
           <a:lstStyle/>
           <a:p>
-            <a:pPr algn="ctr">
-              <a:defRPr sz="1300" b="1">
-                <a:solidFill>
-                  <a:srgbClr val="1B2A4A"/>
-                </a:solidFill>
-                <a:latin typeface="Calibri"/>
-              </a:defRPr>
-            </a:pPr>
-            <a:r>
-              <a:t>New CLI features</a:t>
-            </a:r>
-          </a:p>
-        </p:txBody>
-      </p:sp>
-      <p:sp>
-        <p:nvSpPr>
-          <p:cNvPr id="18" name="Right Arrow 17"/>
+            <a:pPr algn="l">
+              <a:defRPr sz="900" b="1">
+                <a:solidFill>
+                  <a:srgbClr val="1A1A2E"/>
+                </a:solidFill>
+                <a:latin typeface="Calibri"/>
+              </a:defRPr>
+            </a:pPr>
+            <a:r>
+              <a:t>Does it need professional judgment?</a:t>
+            </a:r>
+          </a:p>
+        </p:txBody>
+      </p:sp>
+      <p:sp>
+        <p:nvSpPr>
+          <p:cNvPr id="21" name="Rounded Rectangle 20"/>
           <p:cNvSpPr/>
           <p:nvPr/>
         </p:nvSpPr>
         <p:spPr>
           <a:xfrm>
-            <a:off x="4663440" y="5349240"/>
-            <a:ext cx="457200" cy="320040"/>
-          </a:xfrm>
-          <a:prstGeom prst="rightArrow">
-            <a:avLst/>
-          </a:prstGeom>
-          <a:solidFill>
-            <a:srgbClr val="27AE60"/>
+            <a:off x="5212080" y="6217920"/>
+            <a:ext cx="3108960" cy="256032"/>
+          </a:xfrm>
+          <a:prstGeom prst="roundRect">
+            <a:avLst/>
+          </a:prstGeom>
+          <a:solidFill>
+            <a:srgbClr val="FFFFFF"/>
           </a:solidFill>
           <a:ln>
             <a:noFill/>
@@ -10925,34 +11653,42 @@
           </a:fontRef>
         </p:style>
         <p:txBody>
-          <a:bodyPr rtlCol="0" anchor="ctr"/>
-          <a:lstStyle/>
-          <a:p>
-            <a:pPr algn="ctr"/>
-          </a:p>
-        </p:txBody>
-      </p:sp>
-      <p:sp>
-        <p:nvSpPr>
-          <p:cNvPr id="19" name="Rounded Rectangle 18"/>
+          <a:bodyPr rtlCol="0" anchor="ctr" wrap="square" lIns="182880" rIns="182880" tIns="91440" bIns="91440"/>
+          <a:lstStyle/>
+          <a:p>
+            <a:pPr algn="ctr">
+              <a:defRPr sz="900" b="0">
+                <a:solidFill>
+                  <a:srgbClr val="27AE60"/>
+                </a:solidFill>
+                <a:latin typeface="Calibri"/>
+              </a:defRPr>
+            </a:pPr>
+            <a:r>
+              <a:t>NO → n8n</a:t>
+            </a:r>
+          </a:p>
+        </p:txBody>
+      </p:sp>
+      <p:sp>
+        <p:nvSpPr>
+          <p:cNvPr id="22" name="Rounded Rectangle 21"/>
           <p:cNvSpPr/>
           <p:nvPr/>
         </p:nvSpPr>
         <p:spPr>
           <a:xfrm>
-            <a:off x="5212080" y="5120640"/>
-            <a:ext cx="5029200" cy="822960"/>
+            <a:off x="8321040" y="6217920"/>
+            <a:ext cx="3108960" cy="256032"/>
           </a:xfrm>
           <a:prstGeom prst="roundRect">
             <a:avLst/>
           </a:prstGeom>
           <a:solidFill>
-            <a:srgbClr val="E8F5E9"/>
-          </a:solidFill>
-          <a:ln w="12700">
-            <a:solidFill>
-              <a:srgbClr val="27AE60"/>
-            </a:solidFill>
+            <a:srgbClr val="FFFFFF"/>
+          </a:solidFill>
+          <a:ln>
+            <a:noFill/>
           </a:ln>
         </p:spPr>
         <p:style>
@@ -10974,44 +11710,38 @@
           <a:lstStyle/>
           <a:p>
             <a:pPr algn="ctr">
-              <a:defRPr sz="1300" b="0">
-                <a:solidFill>
-                  <a:srgbClr val="27AE60"/>
-                </a:solidFill>
-                <a:latin typeface="Calibri"/>
-              </a:defRPr>
-            </a:pPr>
-            <a:r>
-              <a:t>Available immediately —</a:t>
-            </a:r>
-            <a:br/>
-            <a:r>
-              <a:t>new tools, better session management</a:t>
-            </a:r>
-          </a:p>
-        </p:txBody>
-      </p:sp>
-      <p:sp>
-        <p:nvSpPr>
-          <p:cNvPr id="20" name="Rounded Rectangle 19"/>
+              <a:defRPr sz="900" b="0">
+                <a:solidFill>
+                  <a:srgbClr val="2C5F8A"/>
+                </a:solidFill>
+                <a:latin typeface="Calibri"/>
+              </a:defRPr>
+            </a:pPr>
+            <a:r>
+              <a:t>YES → Agent</a:t>
+            </a:r>
+          </a:p>
+        </p:txBody>
+      </p:sp>
+      <p:sp>
+        <p:nvSpPr>
+          <p:cNvPr id="23" name="Rounded Rectangle 22"/>
           <p:cNvSpPr/>
           <p:nvPr/>
         </p:nvSpPr>
         <p:spPr>
           <a:xfrm>
-            <a:off x="1371600" y="6126480"/>
-            <a:ext cx="9418320" cy="457200"/>
+            <a:off x="457200" y="6492240"/>
+            <a:ext cx="4754880" cy="256032"/>
           </a:xfrm>
           <a:prstGeom prst="roundRect">
             <a:avLst/>
           </a:prstGeom>
           <a:solidFill>
-            <a:srgbClr val="E3F2FD"/>
-          </a:solidFill>
-          <a:ln w="12700">
-            <a:solidFill>
-              <a:srgbClr val="3A86C8"/>
-            </a:solidFill>
+            <a:srgbClr val="F5F7FA"/>
+          </a:solidFill>
+          <a:ln>
+            <a:noFill/>
           </a:ln>
         </p:spPr>
         <p:style>
@@ -11032,16 +11762,122 @@
           <a:bodyPr rtlCol="0" anchor="ctr" wrap="square" lIns="182880" rIns="182880" tIns="91440" bIns="91440"/>
           <a:lstStyle/>
           <a:p>
+            <a:pPr algn="l">
+              <a:defRPr sz="900" b="1">
+                <a:solidFill>
+                  <a:srgbClr val="1A1A2E"/>
+                </a:solidFill>
+                <a:latin typeface="Calibri"/>
+              </a:defRPr>
+            </a:pPr>
+            <a:r>
+              <a:t>Does it run on a schedule (daily/weekly)?</a:t>
+            </a:r>
+          </a:p>
+        </p:txBody>
+      </p:sp>
+      <p:sp>
+        <p:nvSpPr>
+          <p:cNvPr id="24" name="Rounded Rectangle 23"/>
+          <p:cNvSpPr/>
+          <p:nvPr/>
+        </p:nvSpPr>
+        <p:spPr>
+          <a:xfrm>
+            <a:off x="5212080" y="6492240"/>
+            <a:ext cx="3108960" cy="256032"/>
+          </a:xfrm>
+          <a:prstGeom prst="roundRect">
+            <a:avLst/>
+          </a:prstGeom>
+          <a:solidFill>
+            <a:srgbClr val="F5F7FA"/>
+          </a:solidFill>
+          <a:ln>
+            <a:noFill/>
+          </a:ln>
+        </p:spPr>
+        <p:style>
+          <a:lnRef idx="1">
+            <a:schemeClr val="accent1"/>
+          </a:lnRef>
+          <a:fillRef idx="3">
+            <a:schemeClr val="accent1"/>
+          </a:fillRef>
+          <a:effectRef idx="2">
+            <a:schemeClr val="accent1"/>
+          </a:effectRef>
+          <a:fontRef idx="minor">
+            <a:schemeClr val="lt1"/>
+          </a:fontRef>
+        </p:style>
+        <p:txBody>
+          <a:bodyPr rtlCol="0" anchor="ctr" wrap="square" lIns="182880" rIns="182880" tIns="91440" bIns="91440"/>
+          <a:lstStyle/>
+          <a:p>
             <a:pPr algn="ctr">
-              <a:defRPr sz="1400" b="1">
-                <a:solidFill>
-                  <a:srgbClr val="1B2A4A"/>
-                </a:solidFill>
-                <a:latin typeface="Calibri"/>
-              </a:defRPr>
-            </a:pPr>
-            <a:r>
-              <a:t>You don't rebuild anything. You don't restart the bot. The next request just runs a better model.</a:t>
+              <a:defRPr sz="900" b="0">
+                <a:solidFill>
+                  <a:srgbClr val="27AE60"/>
+                </a:solidFill>
+                <a:latin typeface="Calibri"/>
+              </a:defRPr>
+            </a:pPr>
+            <a:r>
+              <a:t>YES → n8n</a:t>
+            </a:r>
+          </a:p>
+        </p:txBody>
+      </p:sp>
+      <p:sp>
+        <p:nvSpPr>
+          <p:cNvPr id="25" name="Rounded Rectangle 24"/>
+          <p:cNvSpPr/>
+          <p:nvPr/>
+        </p:nvSpPr>
+        <p:spPr>
+          <a:xfrm>
+            <a:off x="8321040" y="6492240"/>
+            <a:ext cx="3108960" cy="256032"/>
+          </a:xfrm>
+          <a:prstGeom prst="roundRect">
+            <a:avLst/>
+          </a:prstGeom>
+          <a:solidFill>
+            <a:srgbClr val="F5F7FA"/>
+          </a:solidFill>
+          <a:ln>
+            <a:noFill/>
+          </a:ln>
+        </p:spPr>
+        <p:style>
+          <a:lnRef idx="1">
+            <a:schemeClr val="accent1"/>
+          </a:lnRef>
+          <a:fillRef idx="3">
+            <a:schemeClr val="accent1"/>
+          </a:fillRef>
+          <a:effectRef idx="2">
+            <a:schemeClr val="accent1"/>
+          </a:effectRef>
+          <a:fontRef idx="minor">
+            <a:schemeClr val="lt1"/>
+          </a:fontRef>
+        </p:style>
+        <p:txBody>
+          <a:bodyPr rtlCol="0" anchor="ctr" wrap="square" lIns="182880" rIns="182880" tIns="91440" bIns="91440"/>
+          <a:lstStyle/>
+          <a:p>
+            <a:pPr algn="ctr">
+              <a:defRPr sz="900" b="0">
+                <a:solidFill>
+                  <a:srgbClr val="2C5F8A"/>
+                </a:solidFill>
+                <a:latin typeface="Calibri"/>
+              </a:defRPr>
+            </a:pPr>
+            <a:r>
+              <a:t>On-demand → Agent</a:t>
             </a:r>
           </a:p>
         </p:txBody>
@@ -11146,7 +11982,7 @@
               </a:defRPr>
             </a:pPr>
             <a:r>
-              <a:t>Self-Maintaining via Telegram</a:t>
+              <a:t>When Anthropic Improves, You Improve</a:t>
             </a:r>
           </a:p>
         </p:txBody>
@@ -11182,7 +12018,7 @@
               </a:defRPr>
             </a:pPr>
             <a:r>
-              <a:t>No git, no terminal, no developer needed</a:t>
+              <a:t>Free upgrades, no code changes needed</a:t>
             </a:r>
           </a:p>
         </p:txBody>
@@ -11196,16 +12032,18 @@
         <p:spPr>
           <a:xfrm>
             <a:off x="457200" y="1280160"/>
-            <a:ext cx="2743200" cy="822960"/>
+            <a:ext cx="4114800" cy="822960"/>
           </a:xfrm>
           <a:prstGeom prst="roundRect">
             <a:avLst/>
           </a:prstGeom>
           <a:solidFill>
-            <a:srgbClr val="2C5F8A"/>
-          </a:solidFill>
-          <a:ln>
-            <a:noFill/>
+            <a:srgbClr val="FFFFFF"/>
+          </a:solidFill>
+          <a:ln w="12700">
+            <a:solidFill>
+              <a:srgbClr val="DDDDEE"/>
+            </a:solidFill>
           </a:ln>
         </p:spPr>
         <p:style>
@@ -11227,15 +12065,19 @@
           <a:lstStyle/>
           <a:p>
             <a:pPr algn="ctr">
-              <a:defRPr sz="1400" b="1">
-                <a:solidFill>
-                  <a:srgbClr val="FFFFFF"/>
-                </a:solidFill>
-                <a:latin typeface="Calibri"/>
-              </a:defRPr>
-            </a:pPr>
-            <a:r>
-              <a:t>Add a new skill</a:t>
+              <a:defRPr sz="1300" b="1">
+                <a:solidFill>
+                  <a:srgbClr val="1B2A4A"/>
+                </a:solidFill>
+                <a:latin typeface="Calibri"/>
+              </a:defRPr>
+            </a:pPr>
+            <a:r>
+              <a:t>Better reasoning</a:t>
+            </a:r>
+            <a:br/>
+            <a:r>
+              <a:t>(Opus 5, Sonnet 5)</a:t>
             </a:r>
           </a:p>
         </p:txBody>
@@ -11248,14 +12090,14 @@
         </p:nvSpPr>
         <p:spPr>
           <a:xfrm>
-            <a:off x="3291840" y="1508760"/>
-            <a:ext cx="365760" cy="320040"/>
+            <a:off x="4663440" y="1508760"/>
+            <a:ext cx="457200" cy="320040"/>
           </a:xfrm>
           <a:prstGeom prst="rightArrow">
             <a:avLst/>
           </a:prstGeom>
           <a:solidFill>
-            <a:srgbClr val="3A86C8"/>
+            <a:srgbClr val="27AE60"/>
           </a:solidFill>
           <a:ln>
             <a:noFill/>
@@ -11291,8 +12133,67 @@
         </p:nvSpPr>
         <p:spPr>
           <a:xfrm>
-            <a:off x="3749039" y="1280160"/>
-            <a:ext cx="7955279" cy="822960"/>
+            <a:off x="5212080" y="1280160"/>
+            <a:ext cx="5029200" cy="822960"/>
+          </a:xfrm>
+          <a:prstGeom prst="roundRect">
+            <a:avLst/>
+          </a:prstGeom>
+          <a:solidFill>
+            <a:srgbClr val="E8F5E9"/>
+          </a:solidFill>
+          <a:ln w="12700">
+            <a:solidFill>
+              <a:srgbClr val="27AE60"/>
+            </a:solidFill>
+          </a:ln>
+        </p:spPr>
+        <p:style>
+          <a:lnRef idx="1">
+            <a:schemeClr val="accent1"/>
+          </a:lnRef>
+          <a:fillRef idx="3">
+            <a:schemeClr val="accent1"/>
+          </a:fillRef>
+          <a:effectRef idx="2">
+            <a:schemeClr val="accent1"/>
+          </a:effectRef>
+          <a:fontRef idx="minor">
+            <a:schemeClr val="lt1"/>
+          </a:fontRef>
+        </p:style>
+        <p:txBody>
+          <a:bodyPr rtlCol="0" anchor="ctr" wrap="square" lIns="182880" rIns="182880" tIns="91440" bIns="91440"/>
+          <a:lstStyle/>
+          <a:p>
+            <a:pPr algn="ctr">
+              <a:defRPr sz="1300" b="0">
+                <a:solidFill>
+                  <a:srgbClr val="27AE60"/>
+                </a:solidFill>
+                <a:latin typeface="Calibri"/>
+              </a:defRPr>
+            </a:pPr>
+            <a:r>
+              <a:t>More accurate tax computations,</a:t>
+            </a:r>
+            <a:br/>
+            <a:r>
+              <a:t>catches more audit issues</a:t>
+            </a:r>
+          </a:p>
+        </p:txBody>
+      </p:sp>
+      <p:sp>
+        <p:nvSpPr>
+          <p:cNvPr id="8" name="Rounded Rectangle 7"/>
+          <p:cNvSpPr/>
+          <p:nvPr/>
+        </p:nvSpPr>
+        <p:spPr>
+          <a:xfrm>
+            <a:off x="457200" y="2240280"/>
+            <a:ext cx="4114800" cy="822960"/>
           </a:xfrm>
           <a:prstGeom prst="roundRect">
             <a:avLst/>
@@ -11324,40 +12225,36 @@
           <a:bodyPr rtlCol="0" anchor="ctr" wrap="square" lIns="182880" rIns="182880" tIns="91440" bIns="91440"/>
           <a:lstStyle/>
           <a:p>
-            <a:pPr algn="l">
-              <a:defRPr sz="1200" b="0">
-                <a:solidFill>
-                  <a:srgbClr val="1A1A2E"/>
-                </a:solidFill>
-                <a:latin typeface="Calibri"/>
-              </a:defRPr>
-            </a:pPr>
-            <a:r>
-              <a:t>"Create a new skill called /bank-recon that</a:t>
-            </a:r>
-            <a:br/>
-            <a:r>
-              <a:t>prepares bank reconciliation workpapers"</a:t>
-            </a:r>
-          </a:p>
-        </p:txBody>
-      </p:sp>
-      <p:sp>
-        <p:nvSpPr>
-          <p:cNvPr id="8" name="Rounded Rectangle 7"/>
+            <a:pPr algn="ctr">
+              <a:defRPr sz="1300" b="1">
+                <a:solidFill>
+                  <a:srgbClr val="1B2A4A"/>
+                </a:solidFill>
+                <a:latin typeface="Calibri"/>
+              </a:defRPr>
+            </a:pPr>
+            <a:r>
+              <a:t>Larger context window</a:t>
+            </a:r>
+          </a:p>
+        </p:txBody>
+      </p:sp>
+      <p:sp>
+        <p:nvSpPr>
+          <p:cNvPr id="9" name="Right Arrow 8"/>
           <p:cNvSpPr/>
           <p:nvPr/>
         </p:nvSpPr>
         <p:spPr>
           <a:xfrm>
-            <a:off x="457200" y="2267712"/>
-            <a:ext cx="2743200" cy="822960"/>
-          </a:xfrm>
-          <a:prstGeom prst="roundRect">
-            <a:avLst/>
-          </a:prstGeom>
-          <a:solidFill>
-            <a:srgbClr val="2C5F8A"/>
+            <a:off x="4663440" y="2468880"/>
+            <a:ext cx="457200" cy="320040"/>
+          </a:xfrm>
+          <a:prstGeom prst="rightArrow">
+            <a:avLst/>
+          </a:prstGeom>
+          <a:solidFill>
+            <a:srgbClr val="27AE60"/>
           </a:solidFill>
           <a:ln>
             <a:noFill/>
@@ -11378,42 +12275,34 @@
           </a:fontRef>
         </p:style>
         <p:txBody>
-          <a:bodyPr rtlCol="0" anchor="ctr" wrap="square" lIns="182880" rIns="182880" tIns="91440" bIns="91440"/>
-          <a:lstStyle/>
-          <a:p>
-            <a:pPr algn="ctr">
-              <a:defRPr sz="1400" b="1">
-                <a:solidFill>
-                  <a:srgbClr val="FFFFFF"/>
-                </a:solidFill>
-                <a:latin typeface="Calibri"/>
-              </a:defRPr>
-            </a:pPr>
-            <a:r>
-              <a:t>Update tax rates</a:t>
-            </a:r>
-          </a:p>
-        </p:txBody>
-      </p:sp>
-      <p:sp>
-        <p:nvSpPr>
-          <p:cNvPr id="9" name="Right Arrow 8"/>
+          <a:bodyPr rtlCol="0" anchor="ctr"/>
+          <a:lstStyle/>
+          <a:p>
+            <a:pPr algn="ctr"/>
+          </a:p>
+        </p:txBody>
+      </p:sp>
+      <p:sp>
+        <p:nvSpPr>
+          <p:cNvPr id="10" name="Rounded Rectangle 9"/>
           <p:cNvSpPr/>
           <p:nvPr/>
         </p:nvSpPr>
         <p:spPr>
           <a:xfrm>
-            <a:off x="3291840" y="2496312"/>
-            <a:ext cx="365760" cy="320040"/>
-          </a:xfrm>
-          <a:prstGeom prst="rightArrow">
-            <a:avLst/>
-          </a:prstGeom>
-          <a:solidFill>
-            <a:srgbClr val="3A86C8"/>
-          </a:solidFill>
-          <a:ln>
-            <a:noFill/>
+            <a:off x="5212080" y="2240280"/>
+            <a:ext cx="5029200" cy="822960"/>
+          </a:xfrm>
+          <a:prstGeom prst="roundRect">
+            <a:avLst/>
+          </a:prstGeom>
+          <a:solidFill>
+            <a:srgbClr val="E8F5E9"/>
+          </a:solidFill>
+          <a:ln w="12700">
+            <a:solidFill>
+              <a:srgbClr val="27AE60"/>
+            </a:solidFill>
           </a:ln>
         </p:spPr>
         <p:style>
@@ -11431,23 +12320,37 @@
           </a:fontRef>
         </p:style>
         <p:txBody>
-          <a:bodyPr rtlCol="0" anchor="ctr"/>
-          <a:lstStyle/>
-          <a:p>
-            <a:pPr algn="ctr"/>
-          </a:p>
-        </p:txBody>
-      </p:sp>
-      <p:sp>
-        <p:nvSpPr>
-          <p:cNvPr id="10" name="Rounded Rectangle 9"/>
+          <a:bodyPr rtlCol="0" anchor="ctr" wrap="square" lIns="182880" rIns="182880" tIns="91440" bIns="91440"/>
+          <a:lstStyle/>
+          <a:p>
+            <a:pPr algn="ctr">
+              <a:defRPr sz="1300" b="0">
+                <a:solidFill>
+                  <a:srgbClr val="27AE60"/>
+                </a:solidFill>
+                <a:latin typeface="Calibri"/>
+              </a:defRPr>
+            </a:pPr>
+            <a:r>
+              <a:t>Handles bigger trial balances,</a:t>
+            </a:r>
+            <a:br/>
+            <a:r>
+              <a:t>reads longer contracts in one pass</a:t>
+            </a:r>
+          </a:p>
+        </p:txBody>
+      </p:sp>
+      <p:sp>
+        <p:nvSpPr>
+          <p:cNvPr id="11" name="Rounded Rectangle 10"/>
           <p:cNvSpPr/>
           <p:nvPr/>
         </p:nvSpPr>
         <p:spPr>
           <a:xfrm>
-            <a:off x="3749039" y="2267712"/>
-            <a:ext cx="7955279" cy="822960"/>
+            <a:off x="457200" y="3200400"/>
+            <a:ext cx="4114800" cy="822960"/>
           </a:xfrm>
           <a:prstGeom prst="roundRect">
             <a:avLst/>
@@ -11479,40 +12382,36 @@
           <a:bodyPr rtlCol="0" anchor="ctr" wrap="square" lIns="182880" rIns="182880" tIns="91440" bIns="91440"/>
           <a:lstStyle/>
           <a:p>
-            <a:pPr algn="l">
-              <a:defRPr sz="1200" b="0">
-                <a:solidFill>
-                  <a:srgbClr val="1A1A2E"/>
-                </a:solidFill>
-                <a:latin typeface="Calibri"/>
-              </a:defRPr>
-            </a:pPr>
-            <a:r>
-              <a:t>"Update the tax computation skill to change</a:t>
-            </a:r>
-            <a:br/>
-            <a:r>
-              <a:t>the SME threshold from RM600k to RM700k"</a:t>
-            </a:r>
-          </a:p>
-        </p:txBody>
-      </p:sp>
-      <p:sp>
-        <p:nvSpPr>
-          <p:cNvPr id="11" name="Rounded Rectangle 10"/>
+            <a:pPr algn="ctr">
+              <a:defRPr sz="1300" b="1">
+                <a:solidFill>
+                  <a:srgbClr val="1B2A4A"/>
+                </a:solidFill>
+                <a:latin typeface="Calibri"/>
+              </a:defRPr>
+            </a:pPr>
+            <a:r>
+              <a:t>Better tool use</a:t>
+            </a:r>
+          </a:p>
+        </p:txBody>
+      </p:sp>
+      <p:sp>
+        <p:nvSpPr>
+          <p:cNvPr id="12" name="Right Arrow 11"/>
           <p:cNvSpPr/>
           <p:nvPr/>
         </p:nvSpPr>
         <p:spPr>
           <a:xfrm>
-            <a:off x="457200" y="3255264"/>
-            <a:ext cx="2743200" cy="822960"/>
-          </a:xfrm>
-          <a:prstGeom prst="roundRect">
-            <a:avLst/>
-          </a:prstGeom>
-          <a:solidFill>
-            <a:srgbClr val="2C5F8A"/>
+            <a:off x="4663440" y="3429000"/>
+            <a:ext cx="457200" cy="320040"/>
+          </a:xfrm>
+          <a:prstGeom prst="rightArrow">
+            <a:avLst/>
+          </a:prstGeom>
+          <a:solidFill>
+            <a:srgbClr val="27AE60"/>
           </a:solidFill>
           <a:ln>
             <a:noFill/>
@@ -11533,42 +12432,34 @@
           </a:fontRef>
         </p:style>
         <p:txBody>
-          <a:bodyPr rtlCol="0" anchor="ctr" wrap="square" lIns="182880" rIns="182880" tIns="91440" bIns="91440"/>
-          <a:lstStyle/>
-          <a:p>
-            <a:pPr algn="ctr">
-              <a:defRPr sz="1400" b="1">
-                <a:solidFill>
-                  <a:srgbClr val="FFFFFF"/>
-                </a:solidFill>
-                <a:latin typeface="Calibri"/>
-              </a:defRPr>
-            </a:pPr>
-            <a:r>
-              <a:t>Edit a template</a:t>
-            </a:r>
-          </a:p>
-        </p:txBody>
-      </p:sp>
-      <p:sp>
-        <p:nvSpPr>
-          <p:cNvPr id="12" name="Right Arrow 11"/>
+          <a:bodyPr rtlCol="0" anchor="ctr"/>
+          <a:lstStyle/>
+          <a:p>
+            <a:pPr algn="ctr"/>
+          </a:p>
+        </p:txBody>
+      </p:sp>
+      <p:sp>
+        <p:nvSpPr>
+          <p:cNvPr id="13" name="Rounded Rectangle 12"/>
           <p:cNvSpPr/>
           <p:nvPr/>
         </p:nvSpPr>
         <p:spPr>
           <a:xfrm>
-            <a:off x="3291840" y="3483864"/>
-            <a:ext cx="365760" cy="320040"/>
-          </a:xfrm>
-          <a:prstGeom prst="rightArrow">
-            <a:avLst/>
-          </a:prstGeom>
-          <a:solidFill>
-            <a:srgbClr val="3A86C8"/>
-          </a:solidFill>
-          <a:ln>
-            <a:noFill/>
+            <a:off x="5212080" y="3200400"/>
+            <a:ext cx="5029200" cy="822960"/>
+          </a:xfrm>
+          <a:prstGeom prst="roundRect">
+            <a:avLst/>
+          </a:prstGeom>
+          <a:solidFill>
+            <a:srgbClr val="E8F5E9"/>
+          </a:solidFill>
+          <a:ln w="12700">
+            <a:solidFill>
+              <a:srgbClr val="27AE60"/>
+            </a:solidFill>
           </a:ln>
         </p:spPr>
         <p:style>
@@ -11586,23 +12477,37 @@
           </a:fontRef>
         </p:style>
         <p:txBody>
-          <a:bodyPr rtlCol="0" anchor="ctr"/>
-          <a:lstStyle/>
-          <a:p>
-            <a:pPr algn="ctr"/>
-          </a:p>
-        </p:txBody>
-      </p:sp>
-      <p:sp>
-        <p:nvSpPr>
-          <p:cNvPr id="13" name="Rounded Rectangle 12"/>
+          <a:bodyPr rtlCol="0" anchor="ctr" wrap="square" lIns="182880" rIns="182880" tIns="91440" bIns="91440"/>
+          <a:lstStyle/>
+          <a:p>
+            <a:pPr algn="ctr">
+              <a:defRPr sz="1300" b="0">
+                <a:solidFill>
+                  <a:srgbClr val="27AE60"/>
+                </a:solidFill>
+                <a:latin typeface="Calibri"/>
+              </a:defRPr>
+            </a:pPr>
+            <a:r>
+              <a:t>More reliable Excel/Word operations,</a:t>
+            </a:r>
+            <a:br/>
+            <a:r>
+              <a:t>fewer MCP errors</a:t>
+            </a:r>
+          </a:p>
+        </p:txBody>
+      </p:sp>
+      <p:sp>
+        <p:nvSpPr>
+          <p:cNvPr id="14" name="Rounded Rectangle 13"/>
           <p:cNvSpPr/>
           <p:nvPr/>
         </p:nvSpPr>
         <p:spPr>
           <a:xfrm>
-            <a:off x="3749039" y="3255264"/>
-            <a:ext cx="7955279" cy="822960"/>
+            <a:off x="457200" y="4160520"/>
+            <a:ext cx="4114800" cy="822960"/>
           </a:xfrm>
           <a:prstGeom prst="roundRect">
             <a:avLst/>
@@ -11634,40 +12539,36 @@
           <a:bodyPr rtlCol="0" anchor="ctr" wrap="square" lIns="182880" rIns="182880" tIns="91440" bIns="91440"/>
           <a:lstStyle/>
           <a:p>
-            <a:pPr algn="l">
-              <a:defRPr sz="1200" b="0">
-                <a:solidFill>
-                  <a:srgbClr val="1A1A2E"/>
-                </a:solidFill>
-                <a:latin typeface="Calibri"/>
-              </a:defRPr>
-            </a:pPr>
-            <a:r>
-              <a:t>"Open the audit planning template and add</a:t>
-            </a:r>
-            <a:br/>
-            <a:r>
-              <a:t>a column for inherent risk rating"</a:t>
-            </a:r>
-          </a:p>
-        </p:txBody>
-      </p:sp>
-      <p:sp>
-        <p:nvSpPr>
-          <p:cNvPr id="14" name="Rounded Rectangle 13"/>
+            <a:pPr algn="ctr">
+              <a:defRPr sz="1300" b="1">
+                <a:solidFill>
+                  <a:srgbClr val="1B2A4A"/>
+                </a:solidFill>
+                <a:latin typeface="Calibri"/>
+              </a:defRPr>
+            </a:pPr>
+            <a:r>
+              <a:t>Faster inference</a:t>
+            </a:r>
+          </a:p>
+        </p:txBody>
+      </p:sp>
+      <p:sp>
+        <p:nvSpPr>
+          <p:cNvPr id="15" name="Right Arrow 14"/>
           <p:cNvSpPr/>
           <p:nvPr/>
         </p:nvSpPr>
         <p:spPr>
           <a:xfrm>
-            <a:off x="457200" y="4242816"/>
-            <a:ext cx="2743200" cy="822960"/>
-          </a:xfrm>
-          <a:prstGeom prst="roundRect">
-            <a:avLst/>
-          </a:prstGeom>
-          <a:solidFill>
-            <a:srgbClr val="2C5F8A"/>
+            <a:off x="4663440" y="4389120"/>
+            <a:ext cx="457200" cy="320040"/>
+          </a:xfrm>
+          <a:prstGeom prst="rightArrow">
+            <a:avLst/>
+          </a:prstGeom>
+          <a:solidFill>
+            <a:srgbClr val="27AE60"/>
           </a:solidFill>
           <a:ln>
             <a:noFill/>
@@ -11688,42 +12589,34 @@
           </a:fontRef>
         </p:style>
         <p:txBody>
-          <a:bodyPr rtlCol="0" anchor="ctr" wrap="square" lIns="182880" rIns="182880" tIns="91440" bIns="91440"/>
-          <a:lstStyle/>
-          <a:p>
-            <a:pPr algn="ctr">
-              <a:defRPr sz="1400" b="1">
-                <a:solidFill>
-                  <a:srgbClr val="FFFFFF"/>
-                </a:solidFill>
-                <a:latin typeface="Calibri"/>
-              </a:defRPr>
-            </a:pPr>
-            <a:r>
-              <a:t>Fix the bot itself</a:t>
-            </a:r>
-          </a:p>
-        </p:txBody>
-      </p:sp>
-      <p:sp>
-        <p:nvSpPr>
-          <p:cNvPr id="15" name="Right Arrow 14"/>
+          <a:bodyPr rtlCol="0" anchor="ctr"/>
+          <a:lstStyle/>
+          <a:p>
+            <a:pPr algn="ctr"/>
+          </a:p>
+        </p:txBody>
+      </p:sp>
+      <p:sp>
+        <p:nvSpPr>
+          <p:cNvPr id="16" name="Rounded Rectangle 15"/>
           <p:cNvSpPr/>
           <p:nvPr/>
         </p:nvSpPr>
         <p:spPr>
           <a:xfrm>
-            <a:off x="3291840" y="4471416"/>
-            <a:ext cx="365760" cy="320040"/>
-          </a:xfrm>
-          <a:prstGeom prst="rightArrow">
-            <a:avLst/>
-          </a:prstGeom>
-          <a:solidFill>
-            <a:srgbClr val="3A86C8"/>
-          </a:solidFill>
-          <a:ln>
-            <a:noFill/>
+            <a:off x="5212080" y="4160520"/>
+            <a:ext cx="5029200" cy="822960"/>
+          </a:xfrm>
+          <a:prstGeom prst="roundRect">
+            <a:avLst/>
+          </a:prstGeom>
+          <a:solidFill>
+            <a:srgbClr val="E8F5E9"/>
+          </a:solidFill>
+          <a:ln w="12700">
+            <a:solidFill>
+              <a:srgbClr val="27AE60"/>
+            </a:solidFill>
           </a:ln>
         </p:spPr>
         <p:style>
@@ -11741,23 +12634,37 @@
           </a:fontRef>
         </p:style>
         <p:txBody>
-          <a:bodyPr rtlCol="0" anchor="ctr"/>
-          <a:lstStyle/>
-          <a:p>
-            <a:pPr algn="ctr"/>
-          </a:p>
-        </p:txBody>
-      </p:sp>
-      <p:sp>
-        <p:nvSpPr>
-          <p:cNvPr id="16" name="Rounded Rectangle 15"/>
+          <a:bodyPr rtlCol="0" anchor="ctr" wrap="square" lIns="182880" rIns="182880" tIns="91440" bIns="91440"/>
+          <a:lstStyle/>
+          <a:p>
+            <a:pPr algn="ctr">
+              <a:defRPr sz="1300" b="0">
+                <a:solidFill>
+                  <a:srgbClr val="27AE60"/>
+                </a:solidFill>
+                <a:latin typeface="Calibri"/>
+              </a:defRPr>
+            </a:pPr>
+            <a:r>
+              <a:t>Quicker responses,</a:t>
+            </a:r>
+            <a:br/>
+            <a:r>
+              <a:t>shorter wait times in Telegram</a:t>
+            </a:r>
+          </a:p>
+        </p:txBody>
+      </p:sp>
+      <p:sp>
+        <p:nvSpPr>
+          <p:cNvPr id="17" name="Rounded Rectangle 16"/>
           <p:cNvSpPr/>
           <p:nvPr/>
         </p:nvSpPr>
         <p:spPr>
           <a:xfrm>
-            <a:off x="3749039" y="4242816"/>
-            <a:ext cx="7955279" cy="822960"/>
+            <a:off x="457200" y="5120640"/>
+            <a:ext cx="4114800" cy="822960"/>
           </a:xfrm>
           <a:prstGeom prst="roundRect">
             <a:avLst/>
@@ -11789,40 +12696,36 @@
           <a:bodyPr rtlCol="0" anchor="ctr" wrap="square" lIns="182880" rIns="182880" tIns="91440" bIns="91440"/>
           <a:lstStyle/>
           <a:p>
-            <a:pPr algn="l">
-              <a:defRPr sz="1200" b="0">
-                <a:solidFill>
-                  <a:srgbClr val="1A1A2E"/>
-                </a:solidFill>
-                <a:latin typeface="Calibri"/>
-              </a:defRPr>
-            </a:pPr>
-            <a:r>
-              <a:t>"Edit claude-runner.js to add the Google</a:t>
-            </a:r>
-            <a:br/>
-            <a:r>
-              <a:t>Drive MCP server with these keywords..."</a:t>
-            </a:r>
-          </a:p>
-        </p:txBody>
-      </p:sp>
-      <p:sp>
-        <p:nvSpPr>
-          <p:cNvPr id="17" name="Rounded Rectangle 16"/>
+            <a:pPr algn="ctr">
+              <a:defRPr sz="1300" b="1">
+                <a:solidFill>
+                  <a:srgbClr val="1B2A4A"/>
+                </a:solidFill>
+                <a:latin typeface="Calibri"/>
+              </a:defRPr>
+            </a:pPr>
+            <a:r>
+              <a:t>New CLI features</a:t>
+            </a:r>
+          </a:p>
+        </p:txBody>
+      </p:sp>
+      <p:sp>
+        <p:nvSpPr>
+          <p:cNvPr id="18" name="Right Arrow 17"/>
           <p:cNvSpPr/>
           <p:nvPr/>
         </p:nvSpPr>
         <p:spPr>
           <a:xfrm>
-            <a:off x="457200" y="5230368"/>
-            <a:ext cx="2743200" cy="822960"/>
-          </a:xfrm>
-          <a:prstGeom prst="roundRect">
-            <a:avLst/>
-          </a:prstGeom>
-          <a:solidFill>
-            <a:srgbClr val="2C5F8A"/>
+            <a:off x="4663440" y="5349240"/>
+            <a:ext cx="457200" cy="320040"/>
+          </a:xfrm>
+          <a:prstGeom prst="rightArrow">
+            <a:avLst/>
+          </a:prstGeom>
+          <a:solidFill>
+            <a:srgbClr val="27AE60"/>
           </a:solidFill>
           <a:ln>
             <a:noFill/>
@@ -11843,42 +12746,34 @@
           </a:fontRef>
         </p:style>
         <p:txBody>
-          <a:bodyPr rtlCol="0" anchor="ctr" wrap="square" lIns="182880" rIns="182880" tIns="91440" bIns="91440"/>
-          <a:lstStyle/>
-          <a:p>
-            <a:pPr algn="ctr">
-              <a:defRPr sz="1400" b="1">
-                <a:solidFill>
-                  <a:srgbClr val="FFFFFF"/>
-                </a:solidFill>
-                <a:latin typeface="Calibri"/>
-              </a:defRPr>
-            </a:pPr>
-            <a:r>
-              <a:t>Backup everything</a:t>
-            </a:r>
-          </a:p>
-        </p:txBody>
-      </p:sp>
-      <p:sp>
-        <p:nvSpPr>
-          <p:cNvPr id="18" name="Right Arrow 17"/>
+          <a:bodyPr rtlCol="0" anchor="ctr"/>
+          <a:lstStyle/>
+          <a:p>
+            <a:pPr algn="ctr"/>
+          </a:p>
+        </p:txBody>
+      </p:sp>
+      <p:sp>
+        <p:nvSpPr>
+          <p:cNvPr id="19" name="Rounded Rectangle 18"/>
           <p:cNvSpPr/>
           <p:nvPr/>
         </p:nvSpPr>
         <p:spPr>
           <a:xfrm>
-            <a:off x="3291840" y="5458968"/>
-            <a:ext cx="365760" cy="320040"/>
-          </a:xfrm>
-          <a:prstGeom prst="rightArrow">
-            <a:avLst/>
-          </a:prstGeom>
-          <a:solidFill>
-            <a:srgbClr val="3A86C8"/>
-          </a:solidFill>
-          <a:ln>
-            <a:noFill/>
+            <a:off x="5212080" y="5120640"/>
+            <a:ext cx="5029200" cy="822960"/>
+          </a:xfrm>
+          <a:prstGeom prst="roundRect">
+            <a:avLst/>
+          </a:prstGeom>
+          <a:solidFill>
+            <a:srgbClr val="E8F5E9"/>
+          </a:solidFill>
+          <a:ln w="12700">
+            <a:solidFill>
+              <a:srgbClr val="27AE60"/>
+            </a:solidFill>
           </a:ln>
         </p:spPr>
         <p:style>
@@ -11896,33 +12791,47 @@
           </a:fontRef>
         </p:style>
         <p:txBody>
-          <a:bodyPr rtlCol="0" anchor="ctr"/>
-          <a:lstStyle/>
-          <a:p>
-            <a:pPr algn="ctr"/>
-          </a:p>
-        </p:txBody>
-      </p:sp>
-      <p:sp>
-        <p:nvSpPr>
-          <p:cNvPr id="19" name="Rounded Rectangle 18"/>
+          <a:bodyPr rtlCol="0" anchor="ctr" wrap="square" lIns="182880" rIns="182880" tIns="91440" bIns="91440"/>
+          <a:lstStyle/>
+          <a:p>
+            <a:pPr algn="ctr">
+              <a:defRPr sz="1300" b="0">
+                <a:solidFill>
+                  <a:srgbClr val="27AE60"/>
+                </a:solidFill>
+                <a:latin typeface="Calibri"/>
+              </a:defRPr>
+            </a:pPr>
+            <a:r>
+              <a:t>Available immediately —</a:t>
+            </a:r>
+            <a:br/>
+            <a:r>
+              <a:t>new tools, better session management</a:t>
+            </a:r>
+          </a:p>
+        </p:txBody>
+      </p:sp>
+      <p:sp>
+        <p:nvSpPr>
+          <p:cNvPr id="20" name="Rounded Rectangle 19"/>
           <p:cNvSpPr/>
           <p:nvPr/>
         </p:nvSpPr>
         <p:spPr>
           <a:xfrm>
-            <a:off x="3749039" y="5230368"/>
-            <a:ext cx="7955279" cy="822960"/>
+            <a:off x="1371600" y="6126480"/>
+            <a:ext cx="9418320" cy="457200"/>
           </a:xfrm>
           <a:prstGeom prst="roundRect">
             <a:avLst/>
           </a:prstGeom>
           <a:solidFill>
-            <a:srgbClr val="FFFFFF"/>
+            <a:srgbClr val="E3F2FD"/>
           </a:solidFill>
           <a:ln w="12700">
             <a:solidFill>
-              <a:srgbClr val="DDDDEE"/>
+              <a:srgbClr val="3A86C8"/>
             </a:solidFill>
           </a:ln>
         </p:spPr>
@@ -11944,65 +12853,6 @@
           <a:bodyPr rtlCol="0" anchor="ctr" wrap="square" lIns="182880" rIns="182880" tIns="91440" bIns="91440"/>
           <a:lstStyle/>
           <a:p>
-            <a:pPr algn="l">
-              <a:defRPr sz="1200" b="0">
-                <a:solidFill>
-                  <a:srgbClr val="1A1A2E"/>
-                </a:solidFill>
-                <a:latin typeface="Calibri"/>
-              </a:defRPr>
-            </a:pPr>
-            <a:r>
-              <a:t>"Zip up the skills folder and send</a:t>
-            </a:r>
-            <a:br/>
-            <a:r>
-              <a:t>it to me on Telegram"</a:t>
-            </a:r>
-          </a:p>
-        </p:txBody>
-      </p:sp>
-      <p:sp>
-        <p:nvSpPr>
-          <p:cNvPr id="20" name="Rounded Rectangle 19"/>
-          <p:cNvSpPr/>
-          <p:nvPr/>
-        </p:nvSpPr>
-        <p:spPr>
-          <a:xfrm>
-            <a:off x="1371600" y="6309360"/>
-            <a:ext cx="9418320" cy="411480"/>
-          </a:xfrm>
-          <a:prstGeom prst="roundRect">
-            <a:avLst/>
-          </a:prstGeom>
-          <a:solidFill>
-            <a:srgbClr val="E3F2FD"/>
-          </a:solidFill>
-          <a:ln w="12700">
-            <a:solidFill>
-              <a:srgbClr val="3A86C8"/>
-            </a:solidFill>
-          </a:ln>
-        </p:spPr>
-        <p:style>
-          <a:lnRef idx="1">
-            <a:schemeClr val="accent1"/>
-          </a:lnRef>
-          <a:fillRef idx="3">
-            <a:schemeClr val="accent1"/>
-          </a:fillRef>
-          <a:effectRef idx="2">
-            <a:schemeClr val="accent1"/>
-          </a:effectRef>
-          <a:fontRef idx="minor">
-            <a:schemeClr val="lt1"/>
-          </a:fontRef>
-        </p:style>
-        <p:txBody>
-          <a:bodyPr rtlCol="0" anchor="ctr" wrap="square" lIns="182880" rIns="182880" tIns="91440" bIns="91440"/>
-          <a:lstStyle/>
-          <a:p>
             <a:pPr algn="ctr">
               <a:defRPr sz="1400" b="1">
                 <a:solidFill>
@@ -12012,7 +12862,7 @@
               </a:defRPr>
             </a:pPr>
             <a:r>
-              <a:t>Claude CLI has full filesystem access.  The Telegram user IS the admin.</a:t>
+              <a:t>You don't rebuild anything. You don't restart the bot. The next request just runs a better model.</a:t>
             </a:r>
           </a:p>
         </p:txBody>
@@ -12117,7 +12967,7 @@
               </a:defRPr>
             </a:pPr>
             <a:r>
-              <a:t>Concurrent Sessions on Mac Mini</a:t>
+              <a:t>Self-Maintaining via Telegram</a:t>
             </a:r>
           </a:p>
         </p:txBody>
@@ -12153,63 +13003,27 @@
               </a:defRPr>
             </a:pPr>
             <a:r>
-              <a:t>Multiple staff, multiple engagements, simultaneously</a:t>
-            </a:r>
-          </a:p>
-        </p:txBody>
-      </p:sp>
-      <p:sp>
-        <p:nvSpPr>
-          <p:cNvPr id="5" name="TextBox 4"/>
-          <p:cNvSpPr txBox="1"/>
-          <p:nvPr/>
-        </p:nvSpPr>
-        <p:spPr>
-          <a:xfrm>
-            <a:off x="457200" y="1188720"/>
-            <a:ext cx="10972800" cy="320040"/>
-          </a:xfrm>
-          <a:prstGeom prst="rect">
-            <a:avLst/>
-          </a:prstGeom>
-          <a:noFill/>
-        </p:spPr>
-        <p:txBody>
-          <a:bodyPr wrap="square">
-            <a:spAutoFit/>
-          </a:bodyPr>
-          <a:lstStyle/>
-          <a:p>
-            <a:pPr algn="l">
-              <a:defRPr sz="1500" b="1">
-                <a:solidFill>
-                  <a:srgbClr val="1B2A4A"/>
-                </a:solidFill>
-                <a:latin typeface="Calibri"/>
-              </a:defRPr>
-            </a:pPr>
-            <a:r>
-              <a:t>Each user request spawns an independent Claude CLI process:</a:t>
-            </a:r>
-          </a:p>
-        </p:txBody>
-      </p:sp>
-      <p:sp>
-        <p:nvSpPr>
-          <p:cNvPr id="6" name="Rounded Rectangle 5"/>
+              <a:t>No git, no terminal, no developer needed</a:t>
+            </a:r>
+          </a:p>
+        </p:txBody>
+      </p:sp>
+      <p:sp>
+        <p:nvSpPr>
+          <p:cNvPr id="5" name="Rounded Rectangle 4"/>
           <p:cNvSpPr/>
           <p:nvPr/>
         </p:nvSpPr>
         <p:spPr>
           <a:xfrm>
-            <a:off x="457200" y="1737360"/>
-            <a:ext cx="2926080" cy="640080"/>
+            <a:off x="457200" y="1280160"/>
+            <a:ext cx="2743200" cy="822960"/>
           </a:xfrm>
           <a:prstGeom prst="roundRect">
             <a:avLst/>
           </a:prstGeom>
           <a:solidFill>
-            <a:srgbClr val="27AE60"/>
+            <a:srgbClr val="2C5F8A"/>
           </a:solidFill>
           <a:ln>
             <a:noFill/>
@@ -12234,7 +13048,7 @@
           <a:lstStyle/>
           <a:p>
             <a:pPr algn="ctr">
-              <a:defRPr sz="1300" b="1">
+              <a:defRPr sz="1400" b="1">
                 <a:solidFill>
                   <a:srgbClr val="FFFFFF"/>
                 </a:solidFill>
@@ -12242,27 +13056,27 @@
               </a:defRPr>
             </a:pPr>
             <a:r>
-              <a:t>User A (Audit Senior)</a:t>
-            </a:r>
-          </a:p>
-        </p:txBody>
-      </p:sp>
-      <p:sp>
-        <p:nvSpPr>
-          <p:cNvPr id="7" name="Right Arrow 6"/>
+              <a:t>Add a new skill</a:t>
+            </a:r>
+          </a:p>
+        </p:txBody>
+      </p:sp>
+      <p:sp>
+        <p:nvSpPr>
+          <p:cNvPr id="6" name="Right Arrow 5"/>
           <p:cNvSpPr/>
           <p:nvPr/>
         </p:nvSpPr>
         <p:spPr>
           <a:xfrm>
-            <a:off x="3474720" y="1901952"/>
-            <a:ext cx="365760" cy="274320"/>
+            <a:off x="3291840" y="1508760"/>
+            <a:ext cx="365760" cy="320040"/>
           </a:xfrm>
           <a:prstGeom prst="rightArrow">
             <a:avLst/>
           </a:prstGeom>
           <a:solidFill>
-            <a:srgbClr val="27AE60"/>
+            <a:srgbClr val="3A86C8"/>
           </a:solidFill>
           <a:ln>
             <a:noFill/>
@@ -12292,14 +13106,14 @@
       </p:sp>
       <p:sp>
         <p:nvSpPr>
-          <p:cNvPr id="8" name="Rounded Rectangle 7"/>
+          <p:cNvPr id="7" name="Rounded Rectangle 6"/>
           <p:cNvSpPr/>
           <p:nvPr/>
         </p:nvSpPr>
         <p:spPr>
           <a:xfrm>
-            <a:off x="3931920" y="1737360"/>
-            <a:ext cx="3657600" cy="640080"/>
+            <a:off x="3749039" y="1280160"/>
+            <a:ext cx="7955279" cy="822960"/>
           </a:xfrm>
           <a:prstGeom prst="roundRect">
             <a:avLst/>
@@ -12307,9 +13121,9 @@
           <a:solidFill>
             <a:srgbClr val="FFFFFF"/>
           </a:solidFill>
-          <a:ln w="19050">
+          <a:ln w="12700">
             <a:solidFill>
-              <a:srgbClr val="27AE60"/>
+              <a:srgbClr val="DDDDEE"/>
             </a:solidFill>
           </a:ln>
         </p:spPr>
@@ -12331,36 +13145,136 @@
           <a:bodyPr rtlCol="0" anchor="ctr" wrap="square" lIns="182880" rIns="182880" tIns="91440" bIns="91440"/>
           <a:lstStyle/>
           <a:p>
+            <a:pPr algn="l">
+              <a:defRPr sz="1200" b="0">
+                <a:solidFill>
+                  <a:srgbClr val="1A1A2E"/>
+                </a:solidFill>
+                <a:latin typeface="Calibri"/>
+              </a:defRPr>
+            </a:pPr>
+            <a:r>
+              <a:t>"Create a new skill called /bank-recon that</a:t>
+            </a:r>
+            <a:br/>
+            <a:r>
+              <a:t>prepares bank reconciliation workpapers"</a:t>
+            </a:r>
+          </a:p>
+        </p:txBody>
+      </p:sp>
+      <p:sp>
+        <p:nvSpPr>
+          <p:cNvPr id="8" name="Rounded Rectangle 7"/>
+          <p:cNvSpPr/>
+          <p:nvPr/>
+        </p:nvSpPr>
+        <p:spPr>
+          <a:xfrm>
+            <a:off x="457200" y="2267712"/>
+            <a:ext cx="2743200" cy="822960"/>
+          </a:xfrm>
+          <a:prstGeom prst="roundRect">
+            <a:avLst/>
+          </a:prstGeom>
+          <a:solidFill>
+            <a:srgbClr val="2C5F8A"/>
+          </a:solidFill>
+          <a:ln>
+            <a:noFill/>
+          </a:ln>
+        </p:spPr>
+        <p:style>
+          <a:lnRef idx="1">
+            <a:schemeClr val="accent1"/>
+          </a:lnRef>
+          <a:fillRef idx="3">
+            <a:schemeClr val="accent1"/>
+          </a:fillRef>
+          <a:effectRef idx="2">
+            <a:schemeClr val="accent1"/>
+          </a:effectRef>
+          <a:fontRef idx="minor">
+            <a:schemeClr val="lt1"/>
+          </a:fontRef>
+        </p:style>
+        <p:txBody>
+          <a:bodyPr rtlCol="0" anchor="ctr" wrap="square" lIns="182880" rIns="182880" tIns="91440" bIns="91440"/>
+          <a:lstStyle/>
+          <a:p>
             <a:pPr algn="ctr">
-              <a:defRPr sz="1300" b="0">
-                <a:solidFill>
-                  <a:srgbClr val="1A1A2E"/>
-                </a:solidFill>
-                <a:latin typeface="Calibri"/>
-              </a:defRPr>
-            </a:pPr>
-            <a:r>
-              <a:t>ABC Sdn Bhd — Debtors workpaper</a:t>
-            </a:r>
-          </a:p>
-        </p:txBody>
-      </p:sp>
-      <p:sp>
-        <p:nvSpPr>
-          <p:cNvPr id="9" name="Rounded Rectangle 8"/>
+              <a:defRPr sz="1400" b="1">
+                <a:solidFill>
+                  <a:srgbClr val="FFFFFF"/>
+                </a:solidFill>
+                <a:latin typeface="Calibri"/>
+              </a:defRPr>
+            </a:pPr>
+            <a:r>
+              <a:t>Update tax rates</a:t>
+            </a:r>
+          </a:p>
+        </p:txBody>
+      </p:sp>
+      <p:sp>
+        <p:nvSpPr>
+          <p:cNvPr id="9" name="Right Arrow 8"/>
           <p:cNvSpPr/>
           <p:nvPr/>
         </p:nvSpPr>
         <p:spPr>
           <a:xfrm>
-            <a:off x="7772400" y="1737360"/>
-            <a:ext cx="3931920" cy="640080"/>
+            <a:off x="3291840" y="2496312"/>
+            <a:ext cx="365760" cy="320040"/>
+          </a:xfrm>
+          <a:prstGeom prst="rightArrow">
+            <a:avLst/>
+          </a:prstGeom>
+          <a:solidFill>
+            <a:srgbClr val="3A86C8"/>
+          </a:solidFill>
+          <a:ln>
+            <a:noFill/>
+          </a:ln>
+        </p:spPr>
+        <p:style>
+          <a:lnRef idx="1">
+            <a:schemeClr val="accent1"/>
+          </a:lnRef>
+          <a:fillRef idx="3">
+            <a:schemeClr val="accent1"/>
+          </a:fillRef>
+          <a:effectRef idx="2">
+            <a:schemeClr val="accent1"/>
+          </a:effectRef>
+          <a:fontRef idx="minor">
+            <a:schemeClr val="lt1"/>
+          </a:fontRef>
+        </p:style>
+        <p:txBody>
+          <a:bodyPr rtlCol="0" anchor="ctr"/>
+          <a:lstStyle/>
+          <a:p>
+            <a:pPr algn="ctr"/>
+          </a:p>
+        </p:txBody>
+      </p:sp>
+      <p:sp>
+        <p:nvSpPr>
+          <p:cNvPr id="10" name="Rounded Rectangle 9"/>
+          <p:cNvSpPr/>
+          <p:nvPr/>
+        </p:nvSpPr>
+        <p:spPr>
+          <a:xfrm>
+            <a:off x="3749039" y="2267712"/>
+            <a:ext cx="7955279" cy="822960"/>
           </a:xfrm>
           <a:prstGeom prst="roundRect">
             <a:avLst/>
           </a:prstGeom>
           <a:solidFill>
-            <a:srgbClr val="F5F7FA"/>
+            <a:srgbClr val="FFFFFF"/>
           </a:solidFill>
           <a:ln w="12700">
             <a:solidFill>
@@ -12386,36 +13300,40 @@
           <a:bodyPr rtlCol="0" anchor="ctr" wrap="square" lIns="182880" rIns="182880" tIns="91440" bIns="91440"/>
           <a:lstStyle/>
           <a:p>
-            <a:pPr algn="ctr">
+            <a:pPr algn="l">
               <a:defRPr sz="1200" b="0">
                 <a:solidFill>
-                  <a:srgbClr val="5A5A6E"/>
-                </a:solidFill>
-                <a:latin typeface="Calibri"/>
-              </a:defRPr>
-            </a:pPr>
-            <a:r>
-              <a:t>claude process #1  (~200MB RAM)</a:t>
-            </a:r>
-          </a:p>
-        </p:txBody>
-      </p:sp>
-      <p:sp>
-        <p:nvSpPr>
-          <p:cNvPr id="10" name="Rounded Rectangle 9"/>
+                  <a:srgbClr val="1A1A2E"/>
+                </a:solidFill>
+                <a:latin typeface="Calibri"/>
+              </a:defRPr>
+            </a:pPr>
+            <a:r>
+              <a:t>"Update the tax computation skill to change</a:t>
+            </a:r>
+            <a:br/>
+            <a:r>
+              <a:t>the SME threshold from RM600k to RM700k"</a:t>
+            </a:r>
+          </a:p>
+        </p:txBody>
+      </p:sp>
+      <p:sp>
+        <p:nvSpPr>
+          <p:cNvPr id="11" name="Rounded Rectangle 10"/>
           <p:cNvSpPr/>
           <p:nvPr/>
         </p:nvSpPr>
         <p:spPr>
           <a:xfrm>
-            <a:off x="457200" y="2514600"/>
-            <a:ext cx="2926080" cy="640080"/>
+            <a:off x="457200" y="3255264"/>
+            <a:ext cx="2743200" cy="822960"/>
           </a:xfrm>
           <a:prstGeom prst="roundRect">
             <a:avLst/>
           </a:prstGeom>
           <a:solidFill>
-            <a:srgbClr val="3A86C8"/>
+            <a:srgbClr val="2C5F8A"/>
           </a:solidFill>
           <a:ln>
             <a:noFill/>
@@ -12440,7 +13358,7 @@
           <a:lstStyle/>
           <a:p>
             <a:pPr algn="ctr">
-              <a:defRPr sz="1300" b="1">
+              <a:defRPr sz="1400" b="1">
                 <a:solidFill>
                   <a:srgbClr val="FFFFFF"/>
                 </a:solidFill>
@@ -12448,21 +13366,21 @@
               </a:defRPr>
             </a:pPr>
             <a:r>
-              <a:t>User B (Tax Associate)</a:t>
-            </a:r>
-          </a:p>
-        </p:txBody>
-      </p:sp>
-      <p:sp>
-        <p:nvSpPr>
-          <p:cNvPr id="11" name="Right Arrow 10"/>
+              <a:t>Edit a template</a:t>
+            </a:r>
+          </a:p>
+        </p:txBody>
+      </p:sp>
+      <p:sp>
+        <p:nvSpPr>
+          <p:cNvPr id="12" name="Right Arrow 11"/>
           <p:cNvSpPr/>
           <p:nvPr/>
         </p:nvSpPr>
         <p:spPr>
           <a:xfrm>
-            <a:off x="3474720" y="2679192"/>
-            <a:ext cx="365760" cy="274320"/>
+            <a:off x="3291840" y="3483864"/>
+            <a:ext cx="365760" cy="320040"/>
           </a:xfrm>
           <a:prstGeom prst="rightArrow">
             <a:avLst/>
@@ -12498,14 +13416,14 @@
       </p:sp>
       <p:sp>
         <p:nvSpPr>
-          <p:cNvPr id="12" name="Rounded Rectangle 11"/>
+          <p:cNvPr id="13" name="Rounded Rectangle 12"/>
           <p:cNvSpPr/>
           <p:nvPr/>
         </p:nvSpPr>
         <p:spPr>
           <a:xfrm>
-            <a:off x="3931920" y="2514600"/>
-            <a:ext cx="3657600" cy="640080"/>
+            <a:off x="3749039" y="3255264"/>
+            <a:ext cx="7955279" cy="822960"/>
           </a:xfrm>
           <a:prstGeom prst="roundRect">
             <a:avLst/>
@@ -12513,9 +13431,9 @@
           <a:solidFill>
             <a:srgbClr val="FFFFFF"/>
           </a:solidFill>
-          <a:ln w="19050">
+          <a:ln w="12700">
             <a:solidFill>
-              <a:srgbClr val="3A86C8"/>
+              <a:srgbClr val="DDDDEE"/>
             </a:solidFill>
           </a:ln>
         </p:spPr>
@@ -12537,36 +13455,136 @@
           <a:bodyPr rtlCol="0" anchor="ctr" wrap="square" lIns="182880" rIns="182880" tIns="91440" bIns="91440"/>
           <a:lstStyle/>
           <a:p>
+            <a:pPr algn="l">
+              <a:defRPr sz="1200" b="0">
+                <a:solidFill>
+                  <a:srgbClr val="1A1A2E"/>
+                </a:solidFill>
+                <a:latin typeface="Calibri"/>
+              </a:defRPr>
+            </a:pPr>
+            <a:r>
+              <a:t>"Open the audit planning template and add</a:t>
+            </a:r>
+            <a:br/>
+            <a:r>
+              <a:t>a column for inherent risk rating"</a:t>
+            </a:r>
+          </a:p>
+        </p:txBody>
+      </p:sp>
+      <p:sp>
+        <p:nvSpPr>
+          <p:cNvPr id="14" name="Rounded Rectangle 13"/>
+          <p:cNvSpPr/>
+          <p:nvPr/>
+        </p:nvSpPr>
+        <p:spPr>
+          <a:xfrm>
+            <a:off x="457200" y="4242816"/>
+            <a:ext cx="2743200" cy="822960"/>
+          </a:xfrm>
+          <a:prstGeom prst="roundRect">
+            <a:avLst/>
+          </a:prstGeom>
+          <a:solidFill>
+            <a:srgbClr val="2C5F8A"/>
+          </a:solidFill>
+          <a:ln>
+            <a:noFill/>
+          </a:ln>
+        </p:spPr>
+        <p:style>
+          <a:lnRef idx="1">
+            <a:schemeClr val="accent1"/>
+          </a:lnRef>
+          <a:fillRef idx="3">
+            <a:schemeClr val="accent1"/>
+          </a:fillRef>
+          <a:effectRef idx="2">
+            <a:schemeClr val="accent1"/>
+          </a:effectRef>
+          <a:fontRef idx="minor">
+            <a:schemeClr val="lt1"/>
+          </a:fontRef>
+        </p:style>
+        <p:txBody>
+          <a:bodyPr rtlCol="0" anchor="ctr" wrap="square" lIns="182880" rIns="182880" tIns="91440" bIns="91440"/>
+          <a:lstStyle/>
+          <a:p>
             <a:pPr algn="ctr">
-              <a:defRPr sz="1300" b="0">
-                <a:solidFill>
-                  <a:srgbClr val="1A1A2E"/>
-                </a:solidFill>
-                <a:latin typeface="Calibri"/>
-              </a:defRPr>
-            </a:pPr>
-            <a:r>
-              <a:t>DEF PLT — Tax computation</a:t>
-            </a:r>
-          </a:p>
-        </p:txBody>
-      </p:sp>
-      <p:sp>
-        <p:nvSpPr>
-          <p:cNvPr id="13" name="Rounded Rectangle 12"/>
+              <a:defRPr sz="1400" b="1">
+                <a:solidFill>
+                  <a:srgbClr val="FFFFFF"/>
+                </a:solidFill>
+                <a:latin typeface="Calibri"/>
+              </a:defRPr>
+            </a:pPr>
+            <a:r>
+              <a:t>Fix the bot itself</a:t>
+            </a:r>
+          </a:p>
+        </p:txBody>
+      </p:sp>
+      <p:sp>
+        <p:nvSpPr>
+          <p:cNvPr id="15" name="Right Arrow 14"/>
           <p:cNvSpPr/>
           <p:nvPr/>
         </p:nvSpPr>
         <p:spPr>
           <a:xfrm>
-            <a:off x="7772400" y="2514600"/>
-            <a:ext cx="3931920" cy="640080"/>
+            <a:off x="3291840" y="4471416"/>
+            <a:ext cx="365760" cy="320040"/>
+          </a:xfrm>
+          <a:prstGeom prst="rightArrow">
+            <a:avLst/>
+          </a:prstGeom>
+          <a:solidFill>
+            <a:srgbClr val="3A86C8"/>
+          </a:solidFill>
+          <a:ln>
+            <a:noFill/>
+          </a:ln>
+        </p:spPr>
+        <p:style>
+          <a:lnRef idx="1">
+            <a:schemeClr val="accent1"/>
+          </a:lnRef>
+          <a:fillRef idx="3">
+            <a:schemeClr val="accent1"/>
+          </a:fillRef>
+          <a:effectRef idx="2">
+            <a:schemeClr val="accent1"/>
+          </a:effectRef>
+          <a:fontRef idx="minor">
+            <a:schemeClr val="lt1"/>
+          </a:fontRef>
+        </p:style>
+        <p:txBody>
+          <a:bodyPr rtlCol="0" anchor="ctr"/>
+          <a:lstStyle/>
+          <a:p>
+            <a:pPr algn="ctr"/>
+          </a:p>
+        </p:txBody>
+      </p:sp>
+      <p:sp>
+        <p:nvSpPr>
+          <p:cNvPr id="16" name="Rounded Rectangle 15"/>
+          <p:cNvSpPr/>
+          <p:nvPr/>
+        </p:nvSpPr>
+        <p:spPr>
+          <a:xfrm>
+            <a:off x="3749039" y="4242816"/>
+            <a:ext cx="7955279" cy="822960"/>
           </a:xfrm>
           <a:prstGeom prst="roundRect">
             <a:avLst/>
           </a:prstGeom>
           <a:solidFill>
-            <a:srgbClr val="F5F7FA"/>
+            <a:srgbClr val="FFFFFF"/>
           </a:solidFill>
           <a:ln w="12700">
             <a:solidFill>
@@ -12592,30 +13610,34 @@
           <a:bodyPr rtlCol="0" anchor="ctr" wrap="square" lIns="182880" rIns="182880" tIns="91440" bIns="91440"/>
           <a:lstStyle/>
           <a:p>
-            <a:pPr algn="ctr">
+            <a:pPr algn="l">
               <a:defRPr sz="1200" b="0">
                 <a:solidFill>
-                  <a:srgbClr val="5A5A6E"/>
-                </a:solidFill>
-                <a:latin typeface="Calibri"/>
-              </a:defRPr>
-            </a:pPr>
-            <a:r>
-              <a:t>claude process #2  (~200MB RAM)</a:t>
-            </a:r>
-          </a:p>
-        </p:txBody>
-      </p:sp>
-      <p:sp>
-        <p:nvSpPr>
-          <p:cNvPr id="14" name="Rounded Rectangle 13"/>
+                  <a:srgbClr val="1A1A2E"/>
+                </a:solidFill>
+                <a:latin typeface="Calibri"/>
+              </a:defRPr>
+            </a:pPr>
+            <a:r>
+              <a:t>"Edit claude-runner.js to add the Google</a:t>
+            </a:r>
+            <a:br/>
+            <a:r>
+              <a:t>Drive MCP server with these keywords..."</a:t>
+            </a:r>
+          </a:p>
+        </p:txBody>
+      </p:sp>
+      <p:sp>
+        <p:nvSpPr>
+          <p:cNvPr id="17" name="Rounded Rectangle 16"/>
           <p:cNvSpPr/>
           <p:nvPr/>
         </p:nvSpPr>
         <p:spPr>
           <a:xfrm>
-            <a:off x="457200" y="3291840"/>
-            <a:ext cx="2926080" cy="640080"/>
+            <a:off x="457200" y="5230368"/>
+            <a:ext cx="2743200" cy="822960"/>
           </a:xfrm>
           <a:prstGeom prst="roundRect">
             <a:avLst/>
@@ -12646,7 +13668,7 @@
           <a:lstStyle/>
           <a:p>
             <a:pPr algn="ctr">
-              <a:defRPr sz="1300" b="1">
+              <a:defRPr sz="1400" b="1">
                 <a:solidFill>
                   <a:srgbClr val="FFFFFF"/>
                 </a:solidFill>
@@ -12654,27 +13676,27 @@
               </a:defRPr>
             </a:pPr>
             <a:r>
-              <a:t>User C (Manager)</a:t>
-            </a:r>
-          </a:p>
-        </p:txBody>
-      </p:sp>
-      <p:sp>
-        <p:nvSpPr>
-          <p:cNvPr id="15" name="Right Arrow 14"/>
+              <a:t>Backup everything</a:t>
+            </a:r>
+          </a:p>
+        </p:txBody>
+      </p:sp>
+      <p:sp>
+        <p:nvSpPr>
+          <p:cNvPr id="18" name="Right Arrow 17"/>
           <p:cNvSpPr/>
           <p:nvPr/>
         </p:nvSpPr>
         <p:spPr>
           <a:xfrm>
-            <a:off x="3474720" y="3456432"/>
-            <a:ext cx="365760" cy="274320"/>
+            <a:off x="3291840" y="5458968"/>
+            <a:ext cx="365760" cy="320040"/>
           </a:xfrm>
           <a:prstGeom prst="rightArrow">
             <a:avLst/>
           </a:prstGeom>
           <a:solidFill>
-            <a:srgbClr val="2C5F8A"/>
+            <a:srgbClr val="3A86C8"/>
           </a:solidFill>
           <a:ln>
             <a:noFill/>
@@ -12704,14 +13726,14 @@
       </p:sp>
       <p:sp>
         <p:nvSpPr>
-          <p:cNvPr id="16" name="Rounded Rectangle 15"/>
+          <p:cNvPr id="19" name="Rounded Rectangle 18"/>
           <p:cNvSpPr/>
           <p:nvPr/>
         </p:nvSpPr>
         <p:spPr>
           <a:xfrm>
-            <a:off x="3931920" y="3291840"/>
-            <a:ext cx="3657600" cy="640080"/>
+            <a:off x="3749039" y="5230368"/>
+            <a:ext cx="7955279" cy="822960"/>
           </a:xfrm>
           <a:prstGeom prst="roundRect">
             <a:avLst/>
@@ -12719,9 +13741,9 @@
           <a:solidFill>
             <a:srgbClr val="FFFFFF"/>
           </a:solidFill>
-          <a:ln w="19050">
+          <a:ln w="12700">
             <a:solidFill>
-              <a:srgbClr val="2C5F8A"/>
+              <a:srgbClr val="DDDDEE"/>
             </a:solidFill>
           </a:ln>
         </p:spPr>
@@ -12743,40 +13765,44 @@
           <a:bodyPr rtlCol="0" anchor="ctr" wrap="square" lIns="182880" rIns="182880" tIns="91440" bIns="91440"/>
           <a:lstStyle/>
           <a:p>
-            <a:pPr algn="ctr">
-              <a:defRPr sz="1300" b="0">
-                <a:solidFill>
-                  <a:srgbClr val="1A1A2E"/>
-                </a:solidFill>
-                <a:latin typeface="Calibri"/>
-              </a:defRPr>
-            </a:pPr>
-            <a:r>
-              <a:t>GHI Corp — Compilation FS</a:t>
-            </a:r>
-          </a:p>
-        </p:txBody>
-      </p:sp>
-      <p:sp>
-        <p:nvSpPr>
-          <p:cNvPr id="17" name="Rounded Rectangle 16"/>
+            <a:pPr algn="l">
+              <a:defRPr sz="1200" b="0">
+                <a:solidFill>
+                  <a:srgbClr val="1A1A2E"/>
+                </a:solidFill>
+                <a:latin typeface="Calibri"/>
+              </a:defRPr>
+            </a:pPr>
+            <a:r>
+              <a:t>"Zip up the skills folder and send</a:t>
+            </a:r>
+            <a:br/>
+            <a:r>
+              <a:t>it to me on Telegram"</a:t>
+            </a:r>
+          </a:p>
+        </p:txBody>
+      </p:sp>
+      <p:sp>
+        <p:nvSpPr>
+          <p:cNvPr id="20" name="Rounded Rectangle 19"/>
           <p:cNvSpPr/>
           <p:nvPr/>
         </p:nvSpPr>
         <p:spPr>
           <a:xfrm>
-            <a:off x="7772400" y="3291840"/>
-            <a:ext cx="3931920" cy="640080"/>
+            <a:off x="1371600" y="6309360"/>
+            <a:ext cx="9418320" cy="411480"/>
           </a:xfrm>
           <a:prstGeom prst="roundRect">
             <a:avLst/>
           </a:prstGeom>
           <a:solidFill>
-            <a:srgbClr val="F5F7FA"/>
+            <a:srgbClr val="E3F2FD"/>
           </a:solidFill>
           <a:ln w="12700">
             <a:solidFill>
-              <a:srgbClr val="DDDDEE"/>
+              <a:srgbClr val="3A86C8"/>
             </a:solidFill>
           </a:ln>
         </p:spPr>
@@ -12799,43 +13825,7 @@
           <a:lstStyle/>
           <a:p>
             <a:pPr algn="ctr">
-              <a:defRPr sz="1200" b="0">
-                <a:solidFill>
-                  <a:srgbClr val="5A5A6E"/>
-                </a:solidFill>
-                <a:latin typeface="Calibri"/>
-              </a:defRPr>
-            </a:pPr>
-            <a:r>
-              <a:t>claude process #3  (~200MB RAM)</a:t>
-            </a:r>
-          </a:p>
-        </p:txBody>
-      </p:sp>
-      <p:sp>
-        <p:nvSpPr>
-          <p:cNvPr id="18" name="TextBox 17"/>
-          <p:cNvSpPr txBox="1"/>
-          <p:nvPr/>
-        </p:nvSpPr>
-        <p:spPr>
-          <a:xfrm>
-            <a:off x="457200" y="4297680"/>
-            <a:ext cx="10972800" cy="320040"/>
-          </a:xfrm>
-          <a:prstGeom prst="rect">
-            <a:avLst/>
-          </a:prstGeom>
-          <a:noFill/>
-        </p:spPr>
-        <p:txBody>
-          <a:bodyPr wrap="square">
-            <a:spAutoFit/>
-          </a:bodyPr>
-          <a:lstStyle/>
-          <a:p>
-            <a:pPr algn="l">
-              <a:defRPr sz="1500" b="1">
+              <a:defRPr sz="1400" b="1">
                 <a:solidFill>
                   <a:srgbClr val="1B2A4A"/>
                 </a:solidFill>
@@ -12843,857 +13833,7 @@
               </a:defRPr>
             </a:pPr>
             <a:r>
-              <a:t>Mac Mini capacity (practical limits):</a:t>
-            </a:r>
-          </a:p>
-        </p:txBody>
-      </p:sp>
-      <p:sp>
-        <p:nvSpPr>
-          <p:cNvPr id="19" name="Rounded Rectangle 18"/>
-          <p:cNvSpPr/>
-          <p:nvPr/>
-        </p:nvSpPr>
-        <p:spPr>
-          <a:xfrm>
-            <a:off x="457200" y="4709160"/>
-            <a:ext cx="2560320" cy="411480"/>
-          </a:xfrm>
-          <a:prstGeom prst="roundRect">
-            <a:avLst/>
-          </a:prstGeom>
-          <a:solidFill>
-            <a:srgbClr val="1B2A4A"/>
-          </a:solidFill>
-          <a:ln>
-            <a:noFill/>
-          </a:ln>
-        </p:spPr>
-        <p:style>
-          <a:lnRef idx="1">
-            <a:schemeClr val="accent1"/>
-          </a:lnRef>
-          <a:fillRef idx="3">
-            <a:schemeClr val="accent1"/>
-          </a:fillRef>
-          <a:effectRef idx="2">
-            <a:schemeClr val="accent1"/>
-          </a:effectRef>
-          <a:fontRef idx="minor">
-            <a:schemeClr val="lt1"/>
-          </a:fontRef>
-        </p:style>
-        <p:txBody>
-          <a:bodyPr rtlCol="0" anchor="ctr" wrap="square" lIns="182880" rIns="182880" tIns="91440" bIns="91440"/>
-          <a:lstStyle/>
-          <a:p>
-            <a:pPr algn="ctr">
-              <a:defRPr sz="1100" b="1">
-                <a:solidFill>
-                  <a:srgbClr val="FFFFFF"/>
-                </a:solidFill>
-                <a:latin typeface="Calibri"/>
-              </a:defRPr>
-            </a:pPr>
-            <a:r>
-              <a:t>Concurrent Sessions</a:t>
-            </a:r>
-          </a:p>
-        </p:txBody>
-      </p:sp>
-      <p:sp>
-        <p:nvSpPr>
-          <p:cNvPr id="20" name="Rounded Rectangle 19"/>
-          <p:cNvSpPr/>
-          <p:nvPr/>
-        </p:nvSpPr>
-        <p:spPr>
-          <a:xfrm>
-            <a:off x="3017520" y="4709160"/>
-            <a:ext cx="2103120" cy="411480"/>
-          </a:xfrm>
-          <a:prstGeom prst="roundRect">
-            <a:avLst/>
-          </a:prstGeom>
-          <a:solidFill>
-            <a:srgbClr val="1B2A4A"/>
-          </a:solidFill>
-          <a:ln>
-            <a:noFill/>
-          </a:ln>
-        </p:spPr>
-        <p:style>
-          <a:lnRef idx="1">
-            <a:schemeClr val="accent1"/>
-          </a:lnRef>
-          <a:fillRef idx="3">
-            <a:schemeClr val="accent1"/>
-          </a:fillRef>
-          <a:effectRef idx="2">
-            <a:schemeClr val="accent1"/>
-          </a:effectRef>
-          <a:fontRef idx="minor">
-            <a:schemeClr val="lt1"/>
-          </a:fontRef>
-        </p:style>
-        <p:txBody>
-          <a:bodyPr rtlCol="0" anchor="ctr" wrap="square" lIns="182880" rIns="182880" tIns="91440" bIns="91440"/>
-          <a:lstStyle/>
-          <a:p>
-            <a:pPr algn="ctr">
-              <a:defRPr sz="1100" b="1">
-                <a:solidFill>
-                  <a:srgbClr val="FFFFFF"/>
-                </a:solidFill>
-                <a:latin typeface="Calibri"/>
-              </a:defRPr>
-            </a:pPr>
-            <a:r>
-              <a:t>1–2</a:t>
-            </a:r>
-          </a:p>
-        </p:txBody>
-      </p:sp>
-      <p:sp>
-        <p:nvSpPr>
-          <p:cNvPr id="21" name="Rounded Rectangle 20"/>
-          <p:cNvSpPr/>
-          <p:nvPr/>
-        </p:nvSpPr>
-        <p:spPr>
-          <a:xfrm>
-            <a:off x="5120640" y="4709160"/>
-            <a:ext cx="2103120" cy="411480"/>
-          </a:xfrm>
-          <a:prstGeom prst="roundRect">
-            <a:avLst/>
-          </a:prstGeom>
-          <a:solidFill>
-            <a:srgbClr val="1B2A4A"/>
-          </a:solidFill>
-          <a:ln>
-            <a:noFill/>
-          </a:ln>
-        </p:spPr>
-        <p:style>
-          <a:lnRef idx="1">
-            <a:schemeClr val="accent1"/>
-          </a:lnRef>
-          <a:fillRef idx="3">
-            <a:schemeClr val="accent1"/>
-          </a:fillRef>
-          <a:effectRef idx="2">
-            <a:schemeClr val="accent1"/>
-          </a:effectRef>
-          <a:fontRef idx="minor">
-            <a:schemeClr val="lt1"/>
-          </a:fontRef>
-        </p:style>
-        <p:txBody>
-          <a:bodyPr rtlCol="0" anchor="ctr" wrap="square" lIns="182880" rIns="182880" tIns="91440" bIns="91440"/>
-          <a:lstStyle/>
-          <a:p>
-            <a:pPr algn="ctr">
-              <a:defRPr sz="1100" b="1">
-                <a:solidFill>
-                  <a:srgbClr val="FFFFFF"/>
-                </a:solidFill>
-                <a:latin typeface="Calibri"/>
-              </a:defRPr>
-            </a:pPr>
-            <a:r>
-              <a:t>3–4</a:t>
-            </a:r>
-          </a:p>
-        </p:txBody>
-      </p:sp>
-      <p:sp>
-        <p:nvSpPr>
-          <p:cNvPr id="22" name="Rounded Rectangle 21"/>
-          <p:cNvSpPr/>
-          <p:nvPr/>
-        </p:nvSpPr>
-        <p:spPr>
-          <a:xfrm>
-            <a:off x="7223760" y="4709160"/>
-            <a:ext cx="2560320" cy="411480"/>
-          </a:xfrm>
-          <a:prstGeom prst="roundRect">
-            <a:avLst/>
-          </a:prstGeom>
-          <a:solidFill>
-            <a:srgbClr val="1B2A4A"/>
-          </a:solidFill>
-          <a:ln>
-            <a:noFill/>
-          </a:ln>
-        </p:spPr>
-        <p:style>
-          <a:lnRef idx="1">
-            <a:schemeClr val="accent1"/>
-          </a:lnRef>
-          <a:fillRef idx="3">
-            <a:schemeClr val="accent1"/>
-          </a:fillRef>
-          <a:effectRef idx="2">
-            <a:schemeClr val="accent1"/>
-          </a:effectRef>
-          <a:fontRef idx="minor">
-            <a:schemeClr val="lt1"/>
-          </a:fontRef>
-        </p:style>
-        <p:txBody>
-          <a:bodyPr rtlCol="0" anchor="ctr" wrap="square" lIns="182880" rIns="182880" tIns="91440" bIns="91440"/>
-          <a:lstStyle/>
-          <a:p>
-            <a:pPr algn="ctr">
-              <a:defRPr sz="1100" b="1">
-                <a:solidFill>
-                  <a:srgbClr val="FFFFFF"/>
-                </a:solidFill>
-                <a:latin typeface="Calibri"/>
-              </a:defRPr>
-            </a:pPr>
-            <a:r>
-              <a:t>5–6</a:t>
-            </a:r>
-          </a:p>
-        </p:txBody>
-      </p:sp>
-      <p:sp>
-        <p:nvSpPr>
-          <p:cNvPr id="23" name="Rounded Rectangle 22"/>
-          <p:cNvSpPr/>
-          <p:nvPr/>
-        </p:nvSpPr>
-        <p:spPr>
-          <a:xfrm>
-            <a:off x="9784080" y="4709160"/>
-            <a:ext cx="2377440" cy="411480"/>
-          </a:xfrm>
-          <a:prstGeom prst="roundRect">
-            <a:avLst/>
-          </a:prstGeom>
-          <a:solidFill>
-            <a:srgbClr val="1B2A4A"/>
-          </a:solidFill>
-          <a:ln>
-            <a:noFill/>
-          </a:ln>
-        </p:spPr>
-        <p:style>
-          <a:lnRef idx="1">
-            <a:schemeClr val="accent1"/>
-          </a:lnRef>
-          <a:fillRef idx="3">
-            <a:schemeClr val="accent1"/>
-          </a:fillRef>
-          <a:effectRef idx="2">
-            <a:schemeClr val="accent1"/>
-          </a:effectRef>
-          <a:fontRef idx="minor">
-            <a:schemeClr val="lt1"/>
-          </a:fontRef>
-        </p:style>
-        <p:txBody>
-          <a:bodyPr rtlCol="0" anchor="ctr" wrap="square" lIns="182880" rIns="182880" tIns="91440" bIns="91440"/>
-          <a:lstStyle/>
-          <a:p>
-            <a:pPr algn="ctr">
-              <a:defRPr sz="1100" b="1">
-                <a:solidFill>
-                  <a:srgbClr val="FFFFFF"/>
-                </a:solidFill>
-                <a:latin typeface="Calibri"/>
-              </a:defRPr>
-            </a:pPr>
-            <a:r>
-              <a:t>7+</a:t>
-            </a:r>
-          </a:p>
-        </p:txBody>
-      </p:sp>
-      <p:sp>
-        <p:nvSpPr>
-          <p:cNvPr id="24" name="Rounded Rectangle 23"/>
-          <p:cNvSpPr/>
-          <p:nvPr/>
-        </p:nvSpPr>
-        <p:spPr>
-          <a:xfrm>
-            <a:off x="457200" y="5166360"/>
-            <a:ext cx="2560320" cy="411480"/>
-          </a:xfrm>
-          <a:prstGeom prst="roundRect">
-            <a:avLst/>
-          </a:prstGeom>
-          <a:solidFill>
-            <a:srgbClr val="F0F0F5"/>
-          </a:solidFill>
-          <a:ln>
-            <a:noFill/>
-          </a:ln>
-        </p:spPr>
-        <p:style>
-          <a:lnRef idx="1">
-            <a:schemeClr val="accent1"/>
-          </a:lnRef>
-          <a:fillRef idx="3">
-            <a:schemeClr val="accent1"/>
-          </a:fillRef>
-          <a:effectRef idx="2">
-            <a:schemeClr val="accent1"/>
-          </a:effectRef>
-          <a:fontRef idx="minor">
-            <a:schemeClr val="lt1"/>
-          </a:fontRef>
-        </p:style>
-        <p:txBody>
-          <a:bodyPr rtlCol="0" anchor="ctr" wrap="square" lIns="182880" rIns="182880" tIns="91440" bIns="91440"/>
-          <a:lstStyle/>
-          <a:p>
-            <a:pPr algn="ctr">
-              <a:defRPr sz="1100" b="1">
-                <a:solidFill>
-                  <a:srgbClr val="1B2A4A"/>
-                </a:solidFill>
-                <a:latin typeface="Calibri"/>
-              </a:defRPr>
-            </a:pPr>
-            <a:r>
-              <a:t>Mac Mini M2 (16GB)</a:t>
-            </a:r>
-          </a:p>
-        </p:txBody>
-      </p:sp>
-      <p:sp>
-        <p:nvSpPr>
-          <p:cNvPr id="25" name="Rounded Rectangle 24"/>
-          <p:cNvSpPr/>
-          <p:nvPr/>
-        </p:nvSpPr>
-        <p:spPr>
-          <a:xfrm>
-            <a:off x="3017520" y="5166360"/>
-            <a:ext cx="2103120" cy="411480"/>
-          </a:xfrm>
-          <a:prstGeom prst="roundRect">
-            <a:avLst/>
-          </a:prstGeom>
-          <a:solidFill>
-            <a:srgbClr val="FFFFFF"/>
-          </a:solidFill>
-          <a:ln>
-            <a:noFill/>
-          </a:ln>
-        </p:spPr>
-        <p:style>
-          <a:lnRef idx="1">
-            <a:schemeClr val="accent1"/>
-          </a:lnRef>
-          <a:fillRef idx="3">
-            <a:schemeClr val="accent1"/>
-          </a:fillRef>
-          <a:effectRef idx="2">
-            <a:schemeClr val="accent1"/>
-          </a:effectRef>
-          <a:fontRef idx="minor">
-            <a:schemeClr val="lt1"/>
-          </a:fontRef>
-        </p:style>
-        <p:txBody>
-          <a:bodyPr rtlCol="0" anchor="ctr" wrap="square" lIns="182880" rIns="182880" tIns="91440" bIns="91440"/>
-          <a:lstStyle/>
-          <a:p>
-            <a:pPr algn="ctr">
-              <a:defRPr sz="1100" b="0">
-                <a:solidFill>
-                  <a:srgbClr val="27AE60"/>
-                </a:solidFill>
-                <a:latin typeface="Calibri"/>
-              </a:defRPr>
-            </a:pPr>
-            <a:r>
-              <a:t>Comfortable</a:t>
-            </a:r>
-          </a:p>
-        </p:txBody>
-      </p:sp>
-      <p:sp>
-        <p:nvSpPr>
-          <p:cNvPr id="26" name="Rounded Rectangle 25"/>
-          <p:cNvSpPr/>
-          <p:nvPr/>
-        </p:nvSpPr>
-        <p:spPr>
-          <a:xfrm>
-            <a:off x="5120640" y="5166360"/>
-            <a:ext cx="2103120" cy="411480"/>
-          </a:xfrm>
-          <a:prstGeom prst="roundRect">
-            <a:avLst/>
-          </a:prstGeom>
-          <a:solidFill>
-            <a:srgbClr val="FFFFFF"/>
-          </a:solidFill>
-          <a:ln>
-            <a:noFill/>
-          </a:ln>
-        </p:spPr>
-        <p:style>
-          <a:lnRef idx="1">
-            <a:schemeClr val="accent1"/>
-          </a:lnRef>
-          <a:fillRef idx="3">
-            <a:schemeClr val="accent1"/>
-          </a:fillRef>
-          <a:effectRef idx="2">
-            <a:schemeClr val="accent1"/>
-          </a:effectRef>
-          <a:fontRef idx="minor">
-            <a:schemeClr val="lt1"/>
-          </a:fontRef>
-        </p:style>
-        <p:txBody>
-          <a:bodyPr rtlCol="0" anchor="ctr" wrap="square" lIns="182880" rIns="182880" tIns="91440" bIns="91440"/>
-          <a:lstStyle/>
-          <a:p>
-            <a:pPr algn="ctr">
-              <a:defRPr sz="1100" b="0">
-                <a:solidFill>
-                  <a:srgbClr val="3A86C8"/>
-                </a:solidFill>
-                <a:latin typeface="Calibri"/>
-              </a:defRPr>
-            </a:pPr>
-            <a:r>
-              <a:t>Fine</a:t>
-            </a:r>
-          </a:p>
-        </p:txBody>
-      </p:sp>
-      <p:sp>
-        <p:nvSpPr>
-          <p:cNvPr id="27" name="Rounded Rectangle 26"/>
-          <p:cNvSpPr/>
-          <p:nvPr/>
-        </p:nvSpPr>
-        <p:spPr>
-          <a:xfrm>
-            <a:off x="7223760" y="5166360"/>
-            <a:ext cx="2560320" cy="411480"/>
-          </a:xfrm>
-          <a:prstGeom prst="roundRect">
-            <a:avLst/>
-          </a:prstGeom>
-          <a:solidFill>
-            <a:srgbClr val="FFFFFF"/>
-          </a:solidFill>
-          <a:ln>
-            <a:noFill/>
-          </a:ln>
-        </p:spPr>
-        <p:style>
-          <a:lnRef idx="1">
-            <a:schemeClr val="accent1"/>
-          </a:lnRef>
-          <a:fillRef idx="3">
-            <a:schemeClr val="accent1"/>
-          </a:fillRef>
-          <a:effectRef idx="2">
-            <a:schemeClr val="accent1"/>
-          </a:effectRef>
-          <a:fontRef idx="minor">
-            <a:schemeClr val="lt1"/>
-          </a:fontRef>
-        </p:style>
-        <p:txBody>
-          <a:bodyPr rtlCol="0" anchor="ctr" wrap="square" lIns="182880" rIns="182880" tIns="91440" bIns="91440"/>
-          <a:lstStyle/>
-          <a:p>
-            <a:pPr algn="ctr">
-              <a:defRPr sz="1100" b="0">
-                <a:solidFill>
-                  <a:srgbClr val="E67E22"/>
-                </a:solidFill>
-                <a:latin typeface="Calibri"/>
-              </a:defRPr>
-            </a:pPr>
-            <a:r>
-              <a:t>Memory pressure</a:t>
-            </a:r>
-          </a:p>
-        </p:txBody>
-      </p:sp>
-      <p:sp>
-        <p:nvSpPr>
-          <p:cNvPr id="28" name="Rounded Rectangle 27"/>
-          <p:cNvSpPr/>
-          <p:nvPr/>
-        </p:nvSpPr>
-        <p:spPr>
-          <a:xfrm>
-            <a:off x="9784080" y="5166360"/>
-            <a:ext cx="2377440" cy="411480"/>
-          </a:xfrm>
-          <a:prstGeom prst="roundRect">
-            <a:avLst/>
-          </a:prstGeom>
-          <a:solidFill>
-            <a:srgbClr val="FFFFFF"/>
-          </a:solidFill>
-          <a:ln>
-            <a:noFill/>
-          </a:ln>
-        </p:spPr>
-        <p:style>
-          <a:lnRef idx="1">
-            <a:schemeClr val="accent1"/>
-          </a:lnRef>
-          <a:fillRef idx="3">
-            <a:schemeClr val="accent1"/>
-          </a:fillRef>
-          <a:effectRef idx="2">
-            <a:schemeClr val="accent1"/>
-          </a:effectRef>
-          <a:fontRef idx="minor">
-            <a:schemeClr val="lt1"/>
-          </a:fontRef>
-        </p:style>
-        <p:txBody>
-          <a:bodyPr rtlCol="0" anchor="ctr" wrap="square" lIns="182880" rIns="182880" tIns="91440" bIns="91440"/>
-          <a:lstStyle/>
-          <a:p>
-            <a:pPr algn="ctr">
-              <a:defRPr sz="1100" b="0">
-                <a:solidFill>
-                  <a:srgbClr val="C0392B"/>
-                </a:solidFill>
-                <a:latin typeface="Calibri"/>
-              </a:defRPr>
-            </a:pPr>
-            <a:r>
-              <a:t>Sluggish</a:t>
-            </a:r>
-          </a:p>
-        </p:txBody>
-      </p:sp>
-      <p:sp>
-        <p:nvSpPr>
-          <p:cNvPr id="29" name="Rounded Rectangle 28"/>
-          <p:cNvSpPr/>
-          <p:nvPr/>
-        </p:nvSpPr>
-        <p:spPr>
-          <a:xfrm>
-            <a:off x="457200" y="5623560"/>
-            <a:ext cx="2560320" cy="411480"/>
-          </a:xfrm>
-          <a:prstGeom prst="roundRect">
-            <a:avLst/>
-          </a:prstGeom>
-          <a:solidFill>
-            <a:srgbClr val="F0F0F5"/>
-          </a:solidFill>
-          <a:ln>
-            <a:noFill/>
-          </a:ln>
-        </p:spPr>
-        <p:style>
-          <a:lnRef idx="1">
-            <a:schemeClr val="accent1"/>
-          </a:lnRef>
-          <a:fillRef idx="3">
-            <a:schemeClr val="accent1"/>
-          </a:fillRef>
-          <a:effectRef idx="2">
-            <a:schemeClr val="accent1"/>
-          </a:effectRef>
-          <a:fontRef idx="minor">
-            <a:schemeClr val="lt1"/>
-          </a:fontRef>
-        </p:style>
-        <p:txBody>
-          <a:bodyPr rtlCol="0" anchor="ctr" wrap="square" lIns="182880" rIns="182880" tIns="91440" bIns="91440"/>
-          <a:lstStyle/>
-          <a:p>
-            <a:pPr algn="ctr">
-              <a:defRPr sz="1100" b="1">
-                <a:solidFill>
-                  <a:srgbClr val="1B2A4A"/>
-                </a:solidFill>
-                <a:latin typeface="Calibri"/>
-              </a:defRPr>
-            </a:pPr>
-            <a:r>
-              <a:t>Mac Mini M4 (24GB)</a:t>
-            </a:r>
-          </a:p>
-        </p:txBody>
-      </p:sp>
-      <p:sp>
-        <p:nvSpPr>
-          <p:cNvPr id="30" name="Rounded Rectangle 29"/>
-          <p:cNvSpPr/>
-          <p:nvPr/>
-        </p:nvSpPr>
-        <p:spPr>
-          <a:xfrm>
-            <a:off x="3017520" y="5623560"/>
-            <a:ext cx="2103120" cy="411480"/>
-          </a:xfrm>
-          <a:prstGeom prst="roundRect">
-            <a:avLst/>
-          </a:prstGeom>
-          <a:solidFill>
-            <a:srgbClr val="FFFFFF"/>
-          </a:solidFill>
-          <a:ln>
-            <a:noFill/>
-          </a:ln>
-        </p:spPr>
-        <p:style>
-          <a:lnRef idx="1">
-            <a:schemeClr val="accent1"/>
-          </a:lnRef>
-          <a:fillRef idx="3">
-            <a:schemeClr val="accent1"/>
-          </a:fillRef>
-          <a:effectRef idx="2">
-            <a:schemeClr val="accent1"/>
-          </a:effectRef>
-          <a:fontRef idx="minor">
-            <a:schemeClr val="lt1"/>
-          </a:fontRef>
-        </p:style>
-        <p:txBody>
-          <a:bodyPr rtlCol="0" anchor="ctr" wrap="square" lIns="182880" rIns="182880" tIns="91440" bIns="91440"/>
-          <a:lstStyle/>
-          <a:p>
-            <a:pPr algn="ctr">
-              <a:defRPr sz="1100" b="0">
-                <a:solidFill>
-                  <a:srgbClr val="27AE60"/>
-                </a:solidFill>
-                <a:latin typeface="Calibri"/>
-              </a:defRPr>
-            </a:pPr>
-            <a:r>
-              <a:t>Comfortable</a:t>
-            </a:r>
-          </a:p>
-        </p:txBody>
-      </p:sp>
-      <p:sp>
-        <p:nvSpPr>
-          <p:cNvPr id="31" name="Rounded Rectangle 30"/>
-          <p:cNvSpPr/>
-          <p:nvPr/>
-        </p:nvSpPr>
-        <p:spPr>
-          <a:xfrm>
-            <a:off x="5120640" y="5623560"/>
-            <a:ext cx="2103120" cy="411480"/>
-          </a:xfrm>
-          <a:prstGeom prst="roundRect">
-            <a:avLst/>
-          </a:prstGeom>
-          <a:solidFill>
-            <a:srgbClr val="FFFFFF"/>
-          </a:solidFill>
-          <a:ln>
-            <a:noFill/>
-          </a:ln>
-        </p:spPr>
-        <p:style>
-          <a:lnRef idx="1">
-            <a:schemeClr val="accent1"/>
-          </a:lnRef>
-          <a:fillRef idx="3">
-            <a:schemeClr val="accent1"/>
-          </a:fillRef>
-          <a:effectRef idx="2">
-            <a:schemeClr val="accent1"/>
-          </a:effectRef>
-          <a:fontRef idx="minor">
-            <a:schemeClr val="lt1"/>
-          </a:fontRef>
-        </p:style>
-        <p:txBody>
-          <a:bodyPr rtlCol="0" anchor="ctr" wrap="square" lIns="182880" rIns="182880" tIns="91440" bIns="91440"/>
-          <a:lstStyle/>
-          <a:p>
-            <a:pPr algn="ctr">
-              <a:defRPr sz="1100" b="0">
-                <a:solidFill>
-                  <a:srgbClr val="27AE60"/>
-                </a:solidFill>
-                <a:latin typeface="Calibri"/>
-              </a:defRPr>
-            </a:pPr>
-            <a:r>
-              <a:t>Comfortable</a:t>
-            </a:r>
-          </a:p>
-        </p:txBody>
-      </p:sp>
-      <p:sp>
-        <p:nvSpPr>
-          <p:cNvPr id="32" name="Rounded Rectangle 31"/>
-          <p:cNvSpPr/>
-          <p:nvPr/>
-        </p:nvSpPr>
-        <p:spPr>
-          <a:xfrm>
-            <a:off x="7223760" y="5623560"/>
-            <a:ext cx="2560320" cy="411480"/>
-          </a:xfrm>
-          <a:prstGeom prst="roundRect">
-            <a:avLst/>
-          </a:prstGeom>
-          <a:solidFill>
-            <a:srgbClr val="FFFFFF"/>
-          </a:solidFill>
-          <a:ln>
-            <a:noFill/>
-          </a:ln>
-        </p:spPr>
-        <p:style>
-          <a:lnRef idx="1">
-            <a:schemeClr val="accent1"/>
-          </a:lnRef>
-          <a:fillRef idx="3">
-            <a:schemeClr val="accent1"/>
-          </a:fillRef>
-          <a:effectRef idx="2">
-            <a:schemeClr val="accent1"/>
-          </a:effectRef>
-          <a:fontRef idx="minor">
-            <a:schemeClr val="lt1"/>
-          </a:fontRef>
-        </p:style>
-        <p:txBody>
-          <a:bodyPr rtlCol="0" anchor="ctr" wrap="square" lIns="182880" rIns="182880" tIns="91440" bIns="91440"/>
-          <a:lstStyle/>
-          <a:p>
-            <a:pPr algn="ctr">
-              <a:defRPr sz="1100" b="0">
-                <a:solidFill>
-                  <a:srgbClr val="3A86C8"/>
-                </a:solidFill>
-                <a:latin typeface="Calibri"/>
-              </a:defRPr>
-            </a:pPr>
-            <a:r>
-              <a:t>Fine</a:t>
-            </a:r>
-          </a:p>
-        </p:txBody>
-      </p:sp>
-      <p:sp>
-        <p:nvSpPr>
-          <p:cNvPr id="33" name="Rounded Rectangle 32"/>
-          <p:cNvSpPr/>
-          <p:nvPr/>
-        </p:nvSpPr>
-        <p:spPr>
-          <a:xfrm>
-            <a:off x="9784080" y="5623560"/>
-            <a:ext cx="2377440" cy="411480"/>
-          </a:xfrm>
-          <a:prstGeom prst="roundRect">
-            <a:avLst/>
-          </a:prstGeom>
-          <a:solidFill>
-            <a:srgbClr val="FFFFFF"/>
-          </a:solidFill>
-          <a:ln>
-            <a:noFill/>
-          </a:ln>
-        </p:spPr>
-        <p:style>
-          <a:lnRef idx="1">
-            <a:schemeClr val="accent1"/>
-          </a:lnRef>
-          <a:fillRef idx="3">
-            <a:schemeClr val="accent1"/>
-          </a:fillRef>
-          <a:effectRef idx="2">
-            <a:schemeClr val="accent1"/>
-          </a:effectRef>
-          <a:fontRef idx="minor">
-            <a:schemeClr val="lt1"/>
-          </a:fontRef>
-        </p:style>
-        <p:txBody>
-          <a:bodyPr rtlCol="0" anchor="ctr" wrap="square" lIns="182880" rIns="182880" tIns="91440" bIns="91440"/>
-          <a:lstStyle/>
-          <a:p>
-            <a:pPr algn="ctr">
-              <a:defRPr sz="1100" b="0">
-                <a:solidFill>
-                  <a:srgbClr val="E67E22"/>
-                </a:solidFill>
-                <a:latin typeface="Calibri"/>
-              </a:defRPr>
-            </a:pPr>
-            <a:r>
-              <a:t>Possible</a:t>
-            </a:r>
-          </a:p>
-        </p:txBody>
-      </p:sp>
-      <p:sp>
-        <p:nvSpPr>
-          <p:cNvPr id="34" name="Rounded Rectangle 33"/>
-          <p:cNvSpPr/>
-          <p:nvPr/>
-        </p:nvSpPr>
-        <p:spPr>
-          <a:xfrm>
-            <a:off x="1371600" y="6309360"/>
-            <a:ext cx="9418320" cy="411480"/>
-          </a:xfrm>
-          <a:prstGeom prst="roundRect">
-            <a:avLst/>
-          </a:prstGeom>
-          <a:solidFill>
-            <a:srgbClr val="E3F2FD"/>
-          </a:solidFill>
-          <a:ln w="12700">
-            <a:solidFill>
-              <a:srgbClr val="3A86C8"/>
-            </a:solidFill>
-          </a:ln>
-        </p:spPr>
-        <p:style>
-          <a:lnRef idx="1">
-            <a:schemeClr val="accent1"/>
-          </a:lnRef>
-          <a:fillRef idx="3">
-            <a:schemeClr val="accent1"/>
-          </a:fillRef>
-          <a:effectRef idx="2">
-            <a:schemeClr val="accent1"/>
-          </a:effectRef>
-          <a:fontRef idx="minor">
-            <a:schemeClr val="lt1"/>
-          </a:fontRef>
-        </p:style>
-        <p:txBody>
-          <a:bodyPr rtlCol="0" anchor="ctr" wrap="square" lIns="182880" rIns="182880" tIns="91440" bIns="91440"/>
-          <a:lstStyle/>
-          <a:p>
-            <a:pPr algn="ctr">
-              <a:defRPr sz="1300" b="1">
-                <a:solidFill>
-                  <a:srgbClr val="1B2A4A"/>
-                </a:solidFill>
-                <a:latin typeface="Calibri"/>
-              </a:defRPr>
-            </a:pPr>
-            <a:r>
-              <a:t>Real ceiling:  Anthropic API rate limit (shared across all sessions), not Mac Mini hardware</a:t>
+              <a:t>Claude CLI has full filesystem access.  The Telegram user IS the admin.</a:t>
             </a:r>
           </a:p>
         </p:txBody>
@@ -13798,7 +13938,7 @@
               </a:defRPr>
             </a:pPr>
             <a:r>
-              <a:t>Recommendation: Hybrid Approach</a:t>
+              <a:t>Concurrent Sessions on Mac Mini</a:t>
             </a:r>
           </a:p>
         </p:txBody>
@@ -13834,21 +13974,57 @@
               </a:defRPr>
             </a:pPr>
             <a:r>
-              <a:t>Best of both worlds — estimated 70-75% success rate</a:t>
-            </a:r>
-          </a:p>
-        </p:txBody>
-      </p:sp>
-      <p:sp>
-        <p:nvSpPr>
-          <p:cNvPr id="5" name="Rounded Rectangle 4"/>
+              <a:t>Multiple staff, multiple engagements, simultaneously</a:t>
+            </a:r>
+          </a:p>
+        </p:txBody>
+      </p:sp>
+      <p:sp>
+        <p:nvSpPr>
+          <p:cNvPr id="5" name="TextBox 4"/>
+          <p:cNvSpPr txBox="1"/>
+          <p:nvPr/>
+        </p:nvSpPr>
+        <p:spPr>
+          <a:xfrm>
+            <a:off x="457200" y="1188720"/>
+            <a:ext cx="10972800" cy="320040"/>
+          </a:xfrm>
+          <a:prstGeom prst="rect">
+            <a:avLst/>
+          </a:prstGeom>
+          <a:noFill/>
+        </p:spPr>
+        <p:txBody>
+          <a:bodyPr wrap="square">
+            <a:spAutoFit/>
+          </a:bodyPr>
+          <a:lstStyle/>
+          <a:p>
+            <a:pPr algn="l">
+              <a:defRPr sz="1500" b="1">
+                <a:solidFill>
+                  <a:srgbClr val="1B2A4A"/>
+                </a:solidFill>
+                <a:latin typeface="Calibri"/>
+              </a:defRPr>
+            </a:pPr>
+            <a:r>
+              <a:t>Each user request spawns an independent Claude CLI process:</a:t>
+            </a:r>
+          </a:p>
+        </p:txBody>
+      </p:sp>
+      <p:sp>
+        <p:nvSpPr>
+          <p:cNvPr id="6" name="Rounded Rectangle 5"/>
           <p:cNvSpPr/>
           <p:nvPr/>
         </p:nvSpPr>
         <p:spPr>
           <a:xfrm>
-            <a:off x="457200" y="1280160"/>
-            <a:ext cx="11247120" cy="457200"/>
+            <a:off x="457200" y="1737360"/>
+            <a:ext cx="2926080" cy="640080"/>
           </a:xfrm>
           <a:prstGeom prst="roundRect">
             <a:avLst/>
@@ -13879,7 +14055,7 @@
           <a:lstStyle/>
           <a:p>
             <a:pPr algn="ctr">
-              <a:defRPr sz="1600" b="1">
+              <a:defRPr sz="1300" b="1">
                 <a:solidFill>
                   <a:srgbClr val="FFFFFF"/>
                 </a:solidFill>
@@ -13887,114 +14063,27 @@
               </a:defRPr>
             </a:pPr>
             <a:r>
-              <a:t>TIER 1:  Telegram Bot for All Staff  (daily work)</a:t>
-            </a:r>
-          </a:p>
-        </p:txBody>
-      </p:sp>
-      <p:sp>
-        <p:nvSpPr>
-          <p:cNvPr id="6" name="TextBox 5"/>
-          <p:cNvSpPr txBox="1"/>
-          <p:nvPr/>
-        </p:nvSpPr>
-        <p:spPr>
-          <a:xfrm>
-            <a:off x="731520" y="1828800"/>
-            <a:ext cx="10515600" cy="1188720"/>
-          </a:xfrm>
-          <a:prstGeom prst="rect">
-            <a:avLst/>
-          </a:prstGeom>
-          <a:noFill/>
-        </p:spPr>
-        <p:txBody>
-          <a:bodyPr wrap="square">
-            <a:spAutoFit/>
-          </a:bodyPr>
-          <a:lstStyle/>
-          <a:p>
-            <a:pPr>
-              <a:spcAft>
-                <a:spcPts val="600"/>
-              </a:spcAft>
-              <a:defRPr sz="1300">
-                <a:solidFill>
-                  <a:srgbClr val="1A1A2E"/>
-                </a:solidFill>
-                <a:latin typeface="Calibri"/>
-              </a:defRPr>
-            </a:pPr>
-            <a:r>
-              <a:t>•  Every staff member uses Telegram to interact with AI</a:t>
-            </a:r>
-          </a:p>
-          <a:p>
-            <a:pPr>
-              <a:spcAft>
-                <a:spcPts val="600"/>
-              </a:spcAft>
-              <a:defRPr sz="1300">
-                <a:solidFill>
-                  <a:srgbClr val="1A1A2E"/>
-                </a:solidFill>
-                <a:latin typeface="Calibri"/>
-              </a:defRPr>
-            </a:pPr>
-            <a:r>
-              <a:t>•  Send requests, receive deliverables, review and approve</a:t>
-            </a:r>
-          </a:p>
-          <a:p>
-            <a:pPr>
-              <a:spcAft>
-                <a:spcPts val="600"/>
-              </a:spcAft>
-              <a:defRPr sz="1300">
-                <a:solidFill>
-                  <a:srgbClr val="1A1A2E"/>
-                </a:solidFill>
-                <a:latin typeface="Calibri"/>
-              </a:defRPr>
-            </a:pPr>
-            <a:r>
-              <a:t>•  Zero training needed — they already know how to chat</a:t>
-            </a:r>
-          </a:p>
-          <a:p>
-            <a:pPr>
-              <a:spcAft>
-                <a:spcPts val="600"/>
-              </a:spcAft>
-              <a:defRPr sz="1300">
-                <a:solidFill>
-                  <a:srgbClr val="1A1A2E"/>
-                </a:solidFill>
-                <a:latin typeface="Calibri"/>
-              </a:defRPr>
-            </a:pPr>
-            <a:r>
-              <a:t>•  Expected adoption: 80-90%</a:t>
-            </a:r>
-          </a:p>
-        </p:txBody>
-      </p:sp>
-      <p:sp>
-        <p:nvSpPr>
-          <p:cNvPr id="7" name="Rounded Rectangle 6"/>
+              <a:t>User A (Audit Senior)</a:t>
+            </a:r>
+          </a:p>
+        </p:txBody>
+      </p:sp>
+      <p:sp>
+        <p:nvSpPr>
+          <p:cNvPr id="7" name="Right Arrow 6"/>
           <p:cNvSpPr/>
           <p:nvPr/>
         </p:nvSpPr>
         <p:spPr>
           <a:xfrm>
-            <a:off x="457200" y="3200400"/>
-            <a:ext cx="11247120" cy="457200"/>
-          </a:xfrm>
-          <a:prstGeom prst="roundRect">
-            <a:avLst/>
-          </a:prstGeom>
-          <a:solidFill>
-            <a:srgbClr val="2C5F8A"/>
+            <a:off x="3474720" y="1901952"/>
+            <a:ext cx="365760" cy="274320"/>
+          </a:xfrm>
+          <a:prstGeom prst="rightArrow">
+            <a:avLst/>
+          </a:prstGeom>
+          <a:solidFill>
+            <a:srgbClr val="27AE60"/>
           </a:solidFill>
           <a:ln>
             <a:noFill/>
@@ -14015,130 +14104,33 @@
           </a:fontRef>
         </p:style>
         <p:txBody>
-          <a:bodyPr rtlCol="0" anchor="ctr" wrap="square" lIns="182880" rIns="182880" tIns="91440" bIns="91440"/>
-          <a:lstStyle/>
-          <a:p>
-            <a:pPr algn="ctr">
-              <a:defRPr sz="1600" b="1">
-                <a:solidFill>
-                  <a:srgbClr val="FFFFFF"/>
-                </a:solidFill>
-                <a:latin typeface="Calibri"/>
-              </a:defRPr>
-            </a:pPr>
-            <a:r>
-              <a:t>TIER 2:  Claude Code CLI for 1–2 Power Users  (maintenance &amp; edge cases)</a:t>
-            </a:r>
-          </a:p>
-        </p:txBody>
-      </p:sp>
-      <p:sp>
-        <p:nvSpPr>
-          <p:cNvPr id="8" name="TextBox 7"/>
-          <p:cNvSpPr txBox="1"/>
-          <p:nvPr/>
-        </p:nvSpPr>
-        <p:spPr>
-          <a:xfrm>
-            <a:off x="731520" y="3749039"/>
-            <a:ext cx="10515600" cy="1188720"/>
-          </a:xfrm>
-          <a:prstGeom prst="rect">
-            <a:avLst/>
-          </a:prstGeom>
-          <a:noFill/>
-        </p:spPr>
-        <p:txBody>
-          <a:bodyPr wrap="square">
-            <a:spAutoFit/>
-          </a:bodyPr>
-          <a:lstStyle/>
-          <a:p>
-            <a:pPr>
-              <a:spcAft>
-                <a:spcPts val="600"/>
-              </a:spcAft>
-              <a:defRPr sz="1300">
-                <a:solidFill>
-                  <a:srgbClr val="1A1A2E"/>
-                </a:solidFill>
-                <a:latin typeface="Calibri"/>
-              </a:defRPr>
-            </a:pPr>
-            <a:r>
-              <a:t>•  Firm's IT person or tech-savvy senior learns Claude CLI</a:t>
-            </a:r>
-          </a:p>
-          <a:p>
-            <a:pPr>
-              <a:spcAft>
-                <a:spcPts val="600"/>
-              </a:spcAft>
-              <a:defRPr sz="1300">
-                <a:solidFill>
-                  <a:srgbClr val="1A1A2E"/>
-                </a:solidFill>
-                <a:latin typeface="Calibri"/>
-              </a:defRPr>
-            </a:pPr>
-            <a:r>
-              <a:t>•  Maintains skills, updates templates, debugs issues</a:t>
-            </a:r>
-          </a:p>
-          <a:p>
-            <a:pPr>
-              <a:spcAft>
-                <a:spcPts val="600"/>
-              </a:spcAft>
-              <a:defRPr sz="1300">
-                <a:solidFill>
-                  <a:srgbClr val="1A1A2E"/>
-                </a:solidFill>
-                <a:latin typeface="Calibri"/>
-              </a:defRPr>
-            </a:pPr>
-            <a:r>
-              <a:t>•  Handles complex requests too nuanced for standard skills</a:t>
-            </a:r>
-          </a:p>
-          <a:p>
-            <a:pPr>
-              <a:spcAft>
-                <a:spcPts val="600"/>
-              </a:spcAft>
-              <a:defRPr sz="1300">
-                <a:solidFill>
-                  <a:srgbClr val="1A1A2E"/>
-                </a:solidFill>
-                <a:latin typeface="Calibri"/>
-              </a:defRPr>
-            </a:pPr>
-            <a:r>
-              <a:t>•  You train these 1–2 people, not the whole firm</a:t>
-            </a:r>
-          </a:p>
-        </p:txBody>
-      </p:sp>
-      <p:sp>
-        <p:nvSpPr>
-          <p:cNvPr id="9" name="Rounded Rectangle 8"/>
+          <a:bodyPr rtlCol="0" anchor="ctr"/>
+          <a:lstStyle/>
+          <a:p>
+            <a:pPr algn="ctr"/>
+          </a:p>
+        </p:txBody>
+      </p:sp>
+      <p:sp>
+        <p:nvSpPr>
+          <p:cNvPr id="8" name="Rounded Rectangle 7"/>
           <p:cNvSpPr/>
           <p:nvPr/>
         </p:nvSpPr>
         <p:spPr>
           <a:xfrm>
-            <a:off x="1371600" y="5120640"/>
-            <a:ext cx="9418320" cy="1463040"/>
+            <a:off x="3931920" y="1737360"/>
+            <a:ext cx="3657600" cy="640080"/>
           </a:xfrm>
           <a:prstGeom prst="roundRect">
             <a:avLst/>
           </a:prstGeom>
           <a:solidFill>
-            <a:srgbClr val="E3F2FD"/>
-          </a:solidFill>
-          <a:ln w="25400">
+            <a:srgbClr val="FFFFFF"/>
+          </a:solidFill>
+          <a:ln w="19050">
             <a:solidFill>
-              <a:srgbClr val="3A86C8"/>
+              <a:srgbClr val="27AE60"/>
             </a:solidFill>
           </a:ln>
         </p:spPr>
@@ -14160,8 +14152,511 @@
           <a:bodyPr rtlCol="0" anchor="ctr" wrap="square" lIns="182880" rIns="182880" tIns="91440" bIns="91440"/>
           <a:lstStyle/>
           <a:p>
+            <a:pPr algn="ctr">
+              <a:defRPr sz="1300" b="0">
+                <a:solidFill>
+                  <a:srgbClr val="1A1A2E"/>
+                </a:solidFill>
+                <a:latin typeface="Calibri"/>
+              </a:defRPr>
+            </a:pPr>
+            <a:r>
+              <a:t>ABC Sdn Bhd — Debtors workpaper</a:t>
+            </a:r>
+          </a:p>
+        </p:txBody>
+      </p:sp>
+      <p:sp>
+        <p:nvSpPr>
+          <p:cNvPr id="9" name="Rounded Rectangle 8"/>
+          <p:cNvSpPr/>
+          <p:nvPr/>
+        </p:nvSpPr>
+        <p:spPr>
+          <a:xfrm>
+            <a:off x="7772400" y="1737360"/>
+            <a:ext cx="3931920" cy="640080"/>
+          </a:xfrm>
+          <a:prstGeom prst="roundRect">
+            <a:avLst/>
+          </a:prstGeom>
+          <a:solidFill>
+            <a:srgbClr val="F5F7FA"/>
+          </a:solidFill>
+          <a:ln w="12700">
+            <a:solidFill>
+              <a:srgbClr val="DDDDEE"/>
+            </a:solidFill>
+          </a:ln>
+        </p:spPr>
+        <p:style>
+          <a:lnRef idx="1">
+            <a:schemeClr val="accent1"/>
+          </a:lnRef>
+          <a:fillRef idx="3">
+            <a:schemeClr val="accent1"/>
+          </a:fillRef>
+          <a:effectRef idx="2">
+            <a:schemeClr val="accent1"/>
+          </a:effectRef>
+          <a:fontRef idx="minor">
+            <a:schemeClr val="lt1"/>
+          </a:fontRef>
+        </p:style>
+        <p:txBody>
+          <a:bodyPr rtlCol="0" anchor="ctr" wrap="square" lIns="182880" rIns="182880" tIns="91440" bIns="91440"/>
+          <a:lstStyle/>
+          <a:p>
+            <a:pPr algn="ctr">
+              <a:defRPr sz="1200" b="0">
+                <a:solidFill>
+                  <a:srgbClr val="5A5A6E"/>
+                </a:solidFill>
+                <a:latin typeface="Calibri"/>
+              </a:defRPr>
+            </a:pPr>
+            <a:r>
+              <a:t>claude process #1  (~200MB RAM)</a:t>
+            </a:r>
+          </a:p>
+        </p:txBody>
+      </p:sp>
+      <p:sp>
+        <p:nvSpPr>
+          <p:cNvPr id="10" name="Rounded Rectangle 9"/>
+          <p:cNvSpPr/>
+          <p:nvPr/>
+        </p:nvSpPr>
+        <p:spPr>
+          <a:xfrm>
+            <a:off x="457200" y="2514600"/>
+            <a:ext cx="2926080" cy="640080"/>
+          </a:xfrm>
+          <a:prstGeom prst="roundRect">
+            <a:avLst/>
+          </a:prstGeom>
+          <a:solidFill>
+            <a:srgbClr val="3A86C8"/>
+          </a:solidFill>
+          <a:ln>
+            <a:noFill/>
+          </a:ln>
+        </p:spPr>
+        <p:style>
+          <a:lnRef idx="1">
+            <a:schemeClr val="accent1"/>
+          </a:lnRef>
+          <a:fillRef idx="3">
+            <a:schemeClr val="accent1"/>
+          </a:fillRef>
+          <a:effectRef idx="2">
+            <a:schemeClr val="accent1"/>
+          </a:effectRef>
+          <a:fontRef idx="minor">
+            <a:schemeClr val="lt1"/>
+          </a:fontRef>
+        </p:style>
+        <p:txBody>
+          <a:bodyPr rtlCol="0" anchor="ctr" wrap="square" lIns="182880" rIns="182880" tIns="91440" bIns="91440"/>
+          <a:lstStyle/>
+          <a:p>
+            <a:pPr algn="ctr">
+              <a:defRPr sz="1300" b="1">
+                <a:solidFill>
+                  <a:srgbClr val="FFFFFF"/>
+                </a:solidFill>
+                <a:latin typeface="Calibri"/>
+              </a:defRPr>
+            </a:pPr>
+            <a:r>
+              <a:t>User B (Tax Associate)</a:t>
+            </a:r>
+          </a:p>
+        </p:txBody>
+      </p:sp>
+      <p:sp>
+        <p:nvSpPr>
+          <p:cNvPr id="11" name="Right Arrow 10"/>
+          <p:cNvSpPr/>
+          <p:nvPr/>
+        </p:nvSpPr>
+        <p:spPr>
+          <a:xfrm>
+            <a:off x="3474720" y="2679192"/>
+            <a:ext cx="365760" cy="274320"/>
+          </a:xfrm>
+          <a:prstGeom prst="rightArrow">
+            <a:avLst/>
+          </a:prstGeom>
+          <a:solidFill>
+            <a:srgbClr val="3A86C8"/>
+          </a:solidFill>
+          <a:ln>
+            <a:noFill/>
+          </a:ln>
+        </p:spPr>
+        <p:style>
+          <a:lnRef idx="1">
+            <a:schemeClr val="accent1"/>
+          </a:lnRef>
+          <a:fillRef idx="3">
+            <a:schemeClr val="accent1"/>
+          </a:fillRef>
+          <a:effectRef idx="2">
+            <a:schemeClr val="accent1"/>
+          </a:effectRef>
+          <a:fontRef idx="minor">
+            <a:schemeClr val="lt1"/>
+          </a:fontRef>
+        </p:style>
+        <p:txBody>
+          <a:bodyPr rtlCol="0" anchor="ctr"/>
+          <a:lstStyle/>
+          <a:p>
+            <a:pPr algn="ctr"/>
+          </a:p>
+        </p:txBody>
+      </p:sp>
+      <p:sp>
+        <p:nvSpPr>
+          <p:cNvPr id="12" name="Rounded Rectangle 11"/>
+          <p:cNvSpPr/>
+          <p:nvPr/>
+        </p:nvSpPr>
+        <p:spPr>
+          <a:xfrm>
+            <a:off x="3931920" y="2514600"/>
+            <a:ext cx="3657600" cy="640080"/>
+          </a:xfrm>
+          <a:prstGeom prst="roundRect">
+            <a:avLst/>
+          </a:prstGeom>
+          <a:solidFill>
+            <a:srgbClr val="FFFFFF"/>
+          </a:solidFill>
+          <a:ln w="19050">
+            <a:solidFill>
+              <a:srgbClr val="3A86C8"/>
+            </a:solidFill>
+          </a:ln>
+        </p:spPr>
+        <p:style>
+          <a:lnRef idx="1">
+            <a:schemeClr val="accent1"/>
+          </a:lnRef>
+          <a:fillRef idx="3">
+            <a:schemeClr val="accent1"/>
+          </a:fillRef>
+          <a:effectRef idx="2">
+            <a:schemeClr val="accent1"/>
+          </a:effectRef>
+          <a:fontRef idx="minor">
+            <a:schemeClr val="lt1"/>
+          </a:fontRef>
+        </p:style>
+        <p:txBody>
+          <a:bodyPr rtlCol="0" anchor="ctr" wrap="square" lIns="182880" rIns="182880" tIns="91440" bIns="91440"/>
+          <a:lstStyle/>
+          <a:p>
+            <a:pPr algn="ctr">
+              <a:defRPr sz="1300" b="0">
+                <a:solidFill>
+                  <a:srgbClr val="1A1A2E"/>
+                </a:solidFill>
+                <a:latin typeface="Calibri"/>
+              </a:defRPr>
+            </a:pPr>
+            <a:r>
+              <a:t>DEF PLT — Tax computation</a:t>
+            </a:r>
+          </a:p>
+        </p:txBody>
+      </p:sp>
+      <p:sp>
+        <p:nvSpPr>
+          <p:cNvPr id="13" name="Rounded Rectangle 12"/>
+          <p:cNvSpPr/>
+          <p:nvPr/>
+        </p:nvSpPr>
+        <p:spPr>
+          <a:xfrm>
+            <a:off x="7772400" y="2514600"/>
+            <a:ext cx="3931920" cy="640080"/>
+          </a:xfrm>
+          <a:prstGeom prst="roundRect">
+            <a:avLst/>
+          </a:prstGeom>
+          <a:solidFill>
+            <a:srgbClr val="F5F7FA"/>
+          </a:solidFill>
+          <a:ln w="12700">
+            <a:solidFill>
+              <a:srgbClr val="DDDDEE"/>
+            </a:solidFill>
+          </a:ln>
+        </p:spPr>
+        <p:style>
+          <a:lnRef idx="1">
+            <a:schemeClr val="accent1"/>
+          </a:lnRef>
+          <a:fillRef idx="3">
+            <a:schemeClr val="accent1"/>
+          </a:fillRef>
+          <a:effectRef idx="2">
+            <a:schemeClr val="accent1"/>
+          </a:effectRef>
+          <a:fontRef idx="minor">
+            <a:schemeClr val="lt1"/>
+          </a:fontRef>
+        </p:style>
+        <p:txBody>
+          <a:bodyPr rtlCol="0" anchor="ctr" wrap="square" lIns="182880" rIns="182880" tIns="91440" bIns="91440"/>
+          <a:lstStyle/>
+          <a:p>
+            <a:pPr algn="ctr">
+              <a:defRPr sz="1200" b="0">
+                <a:solidFill>
+                  <a:srgbClr val="5A5A6E"/>
+                </a:solidFill>
+                <a:latin typeface="Calibri"/>
+              </a:defRPr>
+            </a:pPr>
+            <a:r>
+              <a:t>claude process #2  (~200MB RAM)</a:t>
+            </a:r>
+          </a:p>
+        </p:txBody>
+      </p:sp>
+      <p:sp>
+        <p:nvSpPr>
+          <p:cNvPr id="14" name="Rounded Rectangle 13"/>
+          <p:cNvSpPr/>
+          <p:nvPr/>
+        </p:nvSpPr>
+        <p:spPr>
+          <a:xfrm>
+            <a:off x="457200" y="3291840"/>
+            <a:ext cx="2926080" cy="640080"/>
+          </a:xfrm>
+          <a:prstGeom prst="roundRect">
+            <a:avLst/>
+          </a:prstGeom>
+          <a:solidFill>
+            <a:srgbClr val="2C5F8A"/>
+          </a:solidFill>
+          <a:ln>
+            <a:noFill/>
+          </a:ln>
+        </p:spPr>
+        <p:style>
+          <a:lnRef idx="1">
+            <a:schemeClr val="accent1"/>
+          </a:lnRef>
+          <a:fillRef idx="3">
+            <a:schemeClr val="accent1"/>
+          </a:fillRef>
+          <a:effectRef idx="2">
+            <a:schemeClr val="accent1"/>
+          </a:effectRef>
+          <a:fontRef idx="minor">
+            <a:schemeClr val="lt1"/>
+          </a:fontRef>
+        </p:style>
+        <p:txBody>
+          <a:bodyPr rtlCol="0" anchor="ctr" wrap="square" lIns="182880" rIns="182880" tIns="91440" bIns="91440"/>
+          <a:lstStyle/>
+          <a:p>
+            <a:pPr algn="ctr">
+              <a:defRPr sz="1300" b="1">
+                <a:solidFill>
+                  <a:srgbClr val="FFFFFF"/>
+                </a:solidFill>
+                <a:latin typeface="Calibri"/>
+              </a:defRPr>
+            </a:pPr>
+            <a:r>
+              <a:t>User C (Manager)</a:t>
+            </a:r>
+          </a:p>
+        </p:txBody>
+      </p:sp>
+      <p:sp>
+        <p:nvSpPr>
+          <p:cNvPr id="15" name="Right Arrow 14"/>
+          <p:cNvSpPr/>
+          <p:nvPr/>
+        </p:nvSpPr>
+        <p:spPr>
+          <a:xfrm>
+            <a:off x="3474720" y="3456432"/>
+            <a:ext cx="365760" cy="274320"/>
+          </a:xfrm>
+          <a:prstGeom prst="rightArrow">
+            <a:avLst/>
+          </a:prstGeom>
+          <a:solidFill>
+            <a:srgbClr val="2C5F8A"/>
+          </a:solidFill>
+          <a:ln>
+            <a:noFill/>
+          </a:ln>
+        </p:spPr>
+        <p:style>
+          <a:lnRef idx="1">
+            <a:schemeClr val="accent1"/>
+          </a:lnRef>
+          <a:fillRef idx="3">
+            <a:schemeClr val="accent1"/>
+          </a:fillRef>
+          <a:effectRef idx="2">
+            <a:schemeClr val="accent1"/>
+          </a:effectRef>
+          <a:fontRef idx="minor">
+            <a:schemeClr val="lt1"/>
+          </a:fontRef>
+        </p:style>
+        <p:txBody>
+          <a:bodyPr rtlCol="0" anchor="ctr"/>
+          <a:lstStyle/>
+          <a:p>
+            <a:pPr algn="ctr"/>
+          </a:p>
+        </p:txBody>
+      </p:sp>
+      <p:sp>
+        <p:nvSpPr>
+          <p:cNvPr id="16" name="Rounded Rectangle 15"/>
+          <p:cNvSpPr/>
+          <p:nvPr/>
+        </p:nvSpPr>
+        <p:spPr>
+          <a:xfrm>
+            <a:off x="3931920" y="3291840"/>
+            <a:ext cx="3657600" cy="640080"/>
+          </a:xfrm>
+          <a:prstGeom prst="roundRect">
+            <a:avLst/>
+          </a:prstGeom>
+          <a:solidFill>
+            <a:srgbClr val="FFFFFF"/>
+          </a:solidFill>
+          <a:ln w="19050">
+            <a:solidFill>
+              <a:srgbClr val="2C5F8A"/>
+            </a:solidFill>
+          </a:ln>
+        </p:spPr>
+        <p:style>
+          <a:lnRef idx="1">
+            <a:schemeClr val="accent1"/>
+          </a:lnRef>
+          <a:fillRef idx="3">
+            <a:schemeClr val="accent1"/>
+          </a:fillRef>
+          <a:effectRef idx="2">
+            <a:schemeClr val="accent1"/>
+          </a:effectRef>
+          <a:fontRef idx="minor">
+            <a:schemeClr val="lt1"/>
+          </a:fontRef>
+        </p:style>
+        <p:txBody>
+          <a:bodyPr rtlCol="0" anchor="ctr" wrap="square" lIns="182880" rIns="182880" tIns="91440" bIns="91440"/>
+          <a:lstStyle/>
+          <a:p>
+            <a:pPr algn="ctr">
+              <a:defRPr sz="1300" b="0">
+                <a:solidFill>
+                  <a:srgbClr val="1A1A2E"/>
+                </a:solidFill>
+                <a:latin typeface="Calibri"/>
+              </a:defRPr>
+            </a:pPr>
+            <a:r>
+              <a:t>GHI Corp — Compilation FS</a:t>
+            </a:r>
+          </a:p>
+        </p:txBody>
+      </p:sp>
+      <p:sp>
+        <p:nvSpPr>
+          <p:cNvPr id="17" name="Rounded Rectangle 16"/>
+          <p:cNvSpPr/>
+          <p:nvPr/>
+        </p:nvSpPr>
+        <p:spPr>
+          <a:xfrm>
+            <a:off x="7772400" y="3291840"/>
+            <a:ext cx="3931920" cy="640080"/>
+          </a:xfrm>
+          <a:prstGeom prst="roundRect">
+            <a:avLst/>
+          </a:prstGeom>
+          <a:solidFill>
+            <a:srgbClr val="F5F7FA"/>
+          </a:solidFill>
+          <a:ln w="12700">
+            <a:solidFill>
+              <a:srgbClr val="DDDDEE"/>
+            </a:solidFill>
+          </a:ln>
+        </p:spPr>
+        <p:style>
+          <a:lnRef idx="1">
+            <a:schemeClr val="accent1"/>
+          </a:lnRef>
+          <a:fillRef idx="3">
+            <a:schemeClr val="accent1"/>
+          </a:fillRef>
+          <a:effectRef idx="2">
+            <a:schemeClr val="accent1"/>
+          </a:effectRef>
+          <a:fontRef idx="minor">
+            <a:schemeClr val="lt1"/>
+          </a:fontRef>
+        </p:style>
+        <p:txBody>
+          <a:bodyPr rtlCol="0" anchor="ctr" wrap="square" lIns="182880" rIns="182880" tIns="91440" bIns="91440"/>
+          <a:lstStyle/>
+          <a:p>
+            <a:pPr algn="ctr">
+              <a:defRPr sz="1200" b="0">
+                <a:solidFill>
+                  <a:srgbClr val="5A5A6E"/>
+                </a:solidFill>
+                <a:latin typeface="Calibri"/>
+              </a:defRPr>
+            </a:pPr>
+            <a:r>
+              <a:t>claude process #3  (~200MB RAM)</a:t>
+            </a:r>
+          </a:p>
+        </p:txBody>
+      </p:sp>
+      <p:sp>
+        <p:nvSpPr>
+          <p:cNvPr id="18" name="TextBox 17"/>
+          <p:cNvSpPr txBox="1"/>
+          <p:nvPr/>
+        </p:nvSpPr>
+        <p:spPr>
+          <a:xfrm>
+            <a:off x="457200" y="4297680"/>
+            <a:ext cx="10972800" cy="320040"/>
+          </a:xfrm>
+          <a:prstGeom prst="rect">
+            <a:avLst/>
+          </a:prstGeom>
+          <a:noFill/>
+        </p:spPr>
+        <p:txBody>
+          <a:bodyPr wrap="square">
+            <a:spAutoFit/>
+          </a:bodyPr>
+          <a:lstStyle/>
+          <a:p>
             <a:pPr algn="l">
-              <a:defRPr sz="1400" b="0">
+              <a:defRPr sz="1500" b="1">
                 <a:solidFill>
                   <a:srgbClr val="1B2A4A"/>
                 </a:solidFill>
@@ -14169,24 +14664,857 @@
               </a:defRPr>
             </a:pPr>
             <a:r>
-              <a:t>Result</a:t>
-            </a:r>
-            <a:br/>
-            <a:br/>
-            <a:r>
-              <a:t>•  90%+ adoption  (Telegram for everyone)</a:t>
-            </a:r>
-            <a:br/>
-            <a:r>
-              <a:t>•  Self-sustaining  (power users maintain without you)</a:t>
-            </a:r>
-            <a:br/>
-            <a:r>
-              <a:t>•  High skill ceiling  (CLI available for complex tasks)</a:t>
-            </a:r>
-            <a:br/>
-            <a:r>
-              <a:t>•  Resilient  (if bot breaks, power user fixes it in 10 min)</a:t>
+              <a:t>Mac Mini capacity (practical limits):</a:t>
+            </a:r>
+          </a:p>
+        </p:txBody>
+      </p:sp>
+      <p:sp>
+        <p:nvSpPr>
+          <p:cNvPr id="19" name="Rounded Rectangle 18"/>
+          <p:cNvSpPr/>
+          <p:nvPr/>
+        </p:nvSpPr>
+        <p:spPr>
+          <a:xfrm>
+            <a:off x="457200" y="4709160"/>
+            <a:ext cx="2560320" cy="411480"/>
+          </a:xfrm>
+          <a:prstGeom prst="roundRect">
+            <a:avLst/>
+          </a:prstGeom>
+          <a:solidFill>
+            <a:srgbClr val="1B2A4A"/>
+          </a:solidFill>
+          <a:ln>
+            <a:noFill/>
+          </a:ln>
+        </p:spPr>
+        <p:style>
+          <a:lnRef idx="1">
+            <a:schemeClr val="accent1"/>
+          </a:lnRef>
+          <a:fillRef idx="3">
+            <a:schemeClr val="accent1"/>
+          </a:fillRef>
+          <a:effectRef idx="2">
+            <a:schemeClr val="accent1"/>
+          </a:effectRef>
+          <a:fontRef idx="minor">
+            <a:schemeClr val="lt1"/>
+          </a:fontRef>
+        </p:style>
+        <p:txBody>
+          <a:bodyPr rtlCol="0" anchor="ctr" wrap="square" lIns="182880" rIns="182880" tIns="91440" bIns="91440"/>
+          <a:lstStyle/>
+          <a:p>
+            <a:pPr algn="ctr">
+              <a:defRPr sz="1100" b="1">
+                <a:solidFill>
+                  <a:srgbClr val="FFFFFF"/>
+                </a:solidFill>
+                <a:latin typeface="Calibri"/>
+              </a:defRPr>
+            </a:pPr>
+            <a:r>
+              <a:t>Concurrent Sessions</a:t>
+            </a:r>
+          </a:p>
+        </p:txBody>
+      </p:sp>
+      <p:sp>
+        <p:nvSpPr>
+          <p:cNvPr id="20" name="Rounded Rectangle 19"/>
+          <p:cNvSpPr/>
+          <p:nvPr/>
+        </p:nvSpPr>
+        <p:spPr>
+          <a:xfrm>
+            <a:off x="3017520" y="4709160"/>
+            <a:ext cx="2103120" cy="411480"/>
+          </a:xfrm>
+          <a:prstGeom prst="roundRect">
+            <a:avLst/>
+          </a:prstGeom>
+          <a:solidFill>
+            <a:srgbClr val="1B2A4A"/>
+          </a:solidFill>
+          <a:ln>
+            <a:noFill/>
+          </a:ln>
+        </p:spPr>
+        <p:style>
+          <a:lnRef idx="1">
+            <a:schemeClr val="accent1"/>
+          </a:lnRef>
+          <a:fillRef idx="3">
+            <a:schemeClr val="accent1"/>
+          </a:fillRef>
+          <a:effectRef idx="2">
+            <a:schemeClr val="accent1"/>
+          </a:effectRef>
+          <a:fontRef idx="minor">
+            <a:schemeClr val="lt1"/>
+          </a:fontRef>
+        </p:style>
+        <p:txBody>
+          <a:bodyPr rtlCol="0" anchor="ctr" wrap="square" lIns="182880" rIns="182880" tIns="91440" bIns="91440"/>
+          <a:lstStyle/>
+          <a:p>
+            <a:pPr algn="ctr">
+              <a:defRPr sz="1100" b="1">
+                <a:solidFill>
+                  <a:srgbClr val="FFFFFF"/>
+                </a:solidFill>
+                <a:latin typeface="Calibri"/>
+              </a:defRPr>
+            </a:pPr>
+            <a:r>
+              <a:t>1–2</a:t>
+            </a:r>
+          </a:p>
+        </p:txBody>
+      </p:sp>
+      <p:sp>
+        <p:nvSpPr>
+          <p:cNvPr id="21" name="Rounded Rectangle 20"/>
+          <p:cNvSpPr/>
+          <p:nvPr/>
+        </p:nvSpPr>
+        <p:spPr>
+          <a:xfrm>
+            <a:off x="5120640" y="4709160"/>
+            <a:ext cx="2103120" cy="411480"/>
+          </a:xfrm>
+          <a:prstGeom prst="roundRect">
+            <a:avLst/>
+          </a:prstGeom>
+          <a:solidFill>
+            <a:srgbClr val="1B2A4A"/>
+          </a:solidFill>
+          <a:ln>
+            <a:noFill/>
+          </a:ln>
+        </p:spPr>
+        <p:style>
+          <a:lnRef idx="1">
+            <a:schemeClr val="accent1"/>
+          </a:lnRef>
+          <a:fillRef idx="3">
+            <a:schemeClr val="accent1"/>
+          </a:fillRef>
+          <a:effectRef idx="2">
+            <a:schemeClr val="accent1"/>
+          </a:effectRef>
+          <a:fontRef idx="minor">
+            <a:schemeClr val="lt1"/>
+          </a:fontRef>
+        </p:style>
+        <p:txBody>
+          <a:bodyPr rtlCol="0" anchor="ctr" wrap="square" lIns="182880" rIns="182880" tIns="91440" bIns="91440"/>
+          <a:lstStyle/>
+          <a:p>
+            <a:pPr algn="ctr">
+              <a:defRPr sz="1100" b="1">
+                <a:solidFill>
+                  <a:srgbClr val="FFFFFF"/>
+                </a:solidFill>
+                <a:latin typeface="Calibri"/>
+              </a:defRPr>
+            </a:pPr>
+            <a:r>
+              <a:t>3–4</a:t>
+            </a:r>
+          </a:p>
+        </p:txBody>
+      </p:sp>
+      <p:sp>
+        <p:nvSpPr>
+          <p:cNvPr id="22" name="Rounded Rectangle 21"/>
+          <p:cNvSpPr/>
+          <p:nvPr/>
+        </p:nvSpPr>
+        <p:spPr>
+          <a:xfrm>
+            <a:off x="7223760" y="4709160"/>
+            <a:ext cx="2560320" cy="411480"/>
+          </a:xfrm>
+          <a:prstGeom prst="roundRect">
+            <a:avLst/>
+          </a:prstGeom>
+          <a:solidFill>
+            <a:srgbClr val="1B2A4A"/>
+          </a:solidFill>
+          <a:ln>
+            <a:noFill/>
+          </a:ln>
+        </p:spPr>
+        <p:style>
+          <a:lnRef idx="1">
+            <a:schemeClr val="accent1"/>
+          </a:lnRef>
+          <a:fillRef idx="3">
+            <a:schemeClr val="accent1"/>
+          </a:fillRef>
+          <a:effectRef idx="2">
+            <a:schemeClr val="accent1"/>
+          </a:effectRef>
+          <a:fontRef idx="minor">
+            <a:schemeClr val="lt1"/>
+          </a:fontRef>
+        </p:style>
+        <p:txBody>
+          <a:bodyPr rtlCol="0" anchor="ctr" wrap="square" lIns="182880" rIns="182880" tIns="91440" bIns="91440"/>
+          <a:lstStyle/>
+          <a:p>
+            <a:pPr algn="ctr">
+              <a:defRPr sz="1100" b="1">
+                <a:solidFill>
+                  <a:srgbClr val="FFFFFF"/>
+                </a:solidFill>
+                <a:latin typeface="Calibri"/>
+              </a:defRPr>
+            </a:pPr>
+            <a:r>
+              <a:t>5–6</a:t>
+            </a:r>
+          </a:p>
+        </p:txBody>
+      </p:sp>
+      <p:sp>
+        <p:nvSpPr>
+          <p:cNvPr id="23" name="Rounded Rectangle 22"/>
+          <p:cNvSpPr/>
+          <p:nvPr/>
+        </p:nvSpPr>
+        <p:spPr>
+          <a:xfrm>
+            <a:off x="9784080" y="4709160"/>
+            <a:ext cx="2377440" cy="411480"/>
+          </a:xfrm>
+          <a:prstGeom prst="roundRect">
+            <a:avLst/>
+          </a:prstGeom>
+          <a:solidFill>
+            <a:srgbClr val="1B2A4A"/>
+          </a:solidFill>
+          <a:ln>
+            <a:noFill/>
+          </a:ln>
+        </p:spPr>
+        <p:style>
+          <a:lnRef idx="1">
+            <a:schemeClr val="accent1"/>
+          </a:lnRef>
+          <a:fillRef idx="3">
+            <a:schemeClr val="accent1"/>
+          </a:fillRef>
+          <a:effectRef idx="2">
+            <a:schemeClr val="accent1"/>
+          </a:effectRef>
+          <a:fontRef idx="minor">
+            <a:schemeClr val="lt1"/>
+          </a:fontRef>
+        </p:style>
+        <p:txBody>
+          <a:bodyPr rtlCol="0" anchor="ctr" wrap="square" lIns="182880" rIns="182880" tIns="91440" bIns="91440"/>
+          <a:lstStyle/>
+          <a:p>
+            <a:pPr algn="ctr">
+              <a:defRPr sz="1100" b="1">
+                <a:solidFill>
+                  <a:srgbClr val="FFFFFF"/>
+                </a:solidFill>
+                <a:latin typeface="Calibri"/>
+              </a:defRPr>
+            </a:pPr>
+            <a:r>
+              <a:t>7+</a:t>
+            </a:r>
+          </a:p>
+        </p:txBody>
+      </p:sp>
+      <p:sp>
+        <p:nvSpPr>
+          <p:cNvPr id="24" name="Rounded Rectangle 23"/>
+          <p:cNvSpPr/>
+          <p:nvPr/>
+        </p:nvSpPr>
+        <p:spPr>
+          <a:xfrm>
+            <a:off x="457200" y="5166360"/>
+            <a:ext cx="2560320" cy="411480"/>
+          </a:xfrm>
+          <a:prstGeom prst="roundRect">
+            <a:avLst/>
+          </a:prstGeom>
+          <a:solidFill>
+            <a:srgbClr val="F0F0F5"/>
+          </a:solidFill>
+          <a:ln>
+            <a:noFill/>
+          </a:ln>
+        </p:spPr>
+        <p:style>
+          <a:lnRef idx="1">
+            <a:schemeClr val="accent1"/>
+          </a:lnRef>
+          <a:fillRef idx="3">
+            <a:schemeClr val="accent1"/>
+          </a:fillRef>
+          <a:effectRef idx="2">
+            <a:schemeClr val="accent1"/>
+          </a:effectRef>
+          <a:fontRef idx="minor">
+            <a:schemeClr val="lt1"/>
+          </a:fontRef>
+        </p:style>
+        <p:txBody>
+          <a:bodyPr rtlCol="0" anchor="ctr" wrap="square" lIns="182880" rIns="182880" tIns="91440" bIns="91440"/>
+          <a:lstStyle/>
+          <a:p>
+            <a:pPr algn="ctr">
+              <a:defRPr sz="1100" b="1">
+                <a:solidFill>
+                  <a:srgbClr val="1B2A4A"/>
+                </a:solidFill>
+                <a:latin typeface="Calibri"/>
+              </a:defRPr>
+            </a:pPr>
+            <a:r>
+              <a:t>Mac Mini M2 (16GB)</a:t>
+            </a:r>
+          </a:p>
+        </p:txBody>
+      </p:sp>
+      <p:sp>
+        <p:nvSpPr>
+          <p:cNvPr id="25" name="Rounded Rectangle 24"/>
+          <p:cNvSpPr/>
+          <p:nvPr/>
+        </p:nvSpPr>
+        <p:spPr>
+          <a:xfrm>
+            <a:off x="3017520" y="5166360"/>
+            <a:ext cx="2103120" cy="411480"/>
+          </a:xfrm>
+          <a:prstGeom prst="roundRect">
+            <a:avLst/>
+          </a:prstGeom>
+          <a:solidFill>
+            <a:srgbClr val="FFFFFF"/>
+          </a:solidFill>
+          <a:ln>
+            <a:noFill/>
+          </a:ln>
+        </p:spPr>
+        <p:style>
+          <a:lnRef idx="1">
+            <a:schemeClr val="accent1"/>
+          </a:lnRef>
+          <a:fillRef idx="3">
+            <a:schemeClr val="accent1"/>
+          </a:fillRef>
+          <a:effectRef idx="2">
+            <a:schemeClr val="accent1"/>
+          </a:effectRef>
+          <a:fontRef idx="minor">
+            <a:schemeClr val="lt1"/>
+          </a:fontRef>
+        </p:style>
+        <p:txBody>
+          <a:bodyPr rtlCol="0" anchor="ctr" wrap="square" lIns="182880" rIns="182880" tIns="91440" bIns="91440"/>
+          <a:lstStyle/>
+          <a:p>
+            <a:pPr algn="ctr">
+              <a:defRPr sz="1100" b="0">
+                <a:solidFill>
+                  <a:srgbClr val="27AE60"/>
+                </a:solidFill>
+                <a:latin typeface="Calibri"/>
+              </a:defRPr>
+            </a:pPr>
+            <a:r>
+              <a:t>Comfortable</a:t>
+            </a:r>
+          </a:p>
+        </p:txBody>
+      </p:sp>
+      <p:sp>
+        <p:nvSpPr>
+          <p:cNvPr id="26" name="Rounded Rectangle 25"/>
+          <p:cNvSpPr/>
+          <p:nvPr/>
+        </p:nvSpPr>
+        <p:spPr>
+          <a:xfrm>
+            <a:off x="5120640" y="5166360"/>
+            <a:ext cx="2103120" cy="411480"/>
+          </a:xfrm>
+          <a:prstGeom prst="roundRect">
+            <a:avLst/>
+          </a:prstGeom>
+          <a:solidFill>
+            <a:srgbClr val="FFFFFF"/>
+          </a:solidFill>
+          <a:ln>
+            <a:noFill/>
+          </a:ln>
+        </p:spPr>
+        <p:style>
+          <a:lnRef idx="1">
+            <a:schemeClr val="accent1"/>
+          </a:lnRef>
+          <a:fillRef idx="3">
+            <a:schemeClr val="accent1"/>
+          </a:fillRef>
+          <a:effectRef idx="2">
+            <a:schemeClr val="accent1"/>
+          </a:effectRef>
+          <a:fontRef idx="minor">
+            <a:schemeClr val="lt1"/>
+          </a:fontRef>
+        </p:style>
+        <p:txBody>
+          <a:bodyPr rtlCol="0" anchor="ctr" wrap="square" lIns="182880" rIns="182880" tIns="91440" bIns="91440"/>
+          <a:lstStyle/>
+          <a:p>
+            <a:pPr algn="ctr">
+              <a:defRPr sz="1100" b="0">
+                <a:solidFill>
+                  <a:srgbClr val="3A86C8"/>
+                </a:solidFill>
+                <a:latin typeface="Calibri"/>
+              </a:defRPr>
+            </a:pPr>
+            <a:r>
+              <a:t>Fine</a:t>
+            </a:r>
+          </a:p>
+        </p:txBody>
+      </p:sp>
+      <p:sp>
+        <p:nvSpPr>
+          <p:cNvPr id="27" name="Rounded Rectangle 26"/>
+          <p:cNvSpPr/>
+          <p:nvPr/>
+        </p:nvSpPr>
+        <p:spPr>
+          <a:xfrm>
+            <a:off x="7223760" y="5166360"/>
+            <a:ext cx="2560320" cy="411480"/>
+          </a:xfrm>
+          <a:prstGeom prst="roundRect">
+            <a:avLst/>
+          </a:prstGeom>
+          <a:solidFill>
+            <a:srgbClr val="FFFFFF"/>
+          </a:solidFill>
+          <a:ln>
+            <a:noFill/>
+          </a:ln>
+        </p:spPr>
+        <p:style>
+          <a:lnRef idx="1">
+            <a:schemeClr val="accent1"/>
+          </a:lnRef>
+          <a:fillRef idx="3">
+            <a:schemeClr val="accent1"/>
+          </a:fillRef>
+          <a:effectRef idx="2">
+            <a:schemeClr val="accent1"/>
+          </a:effectRef>
+          <a:fontRef idx="minor">
+            <a:schemeClr val="lt1"/>
+          </a:fontRef>
+        </p:style>
+        <p:txBody>
+          <a:bodyPr rtlCol="0" anchor="ctr" wrap="square" lIns="182880" rIns="182880" tIns="91440" bIns="91440"/>
+          <a:lstStyle/>
+          <a:p>
+            <a:pPr algn="ctr">
+              <a:defRPr sz="1100" b="0">
+                <a:solidFill>
+                  <a:srgbClr val="E67E22"/>
+                </a:solidFill>
+                <a:latin typeface="Calibri"/>
+              </a:defRPr>
+            </a:pPr>
+            <a:r>
+              <a:t>Memory pressure</a:t>
+            </a:r>
+          </a:p>
+        </p:txBody>
+      </p:sp>
+      <p:sp>
+        <p:nvSpPr>
+          <p:cNvPr id="28" name="Rounded Rectangle 27"/>
+          <p:cNvSpPr/>
+          <p:nvPr/>
+        </p:nvSpPr>
+        <p:spPr>
+          <a:xfrm>
+            <a:off x="9784080" y="5166360"/>
+            <a:ext cx="2377440" cy="411480"/>
+          </a:xfrm>
+          <a:prstGeom prst="roundRect">
+            <a:avLst/>
+          </a:prstGeom>
+          <a:solidFill>
+            <a:srgbClr val="FFFFFF"/>
+          </a:solidFill>
+          <a:ln>
+            <a:noFill/>
+          </a:ln>
+        </p:spPr>
+        <p:style>
+          <a:lnRef idx="1">
+            <a:schemeClr val="accent1"/>
+          </a:lnRef>
+          <a:fillRef idx="3">
+            <a:schemeClr val="accent1"/>
+          </a:fillRef>
+          <a:effectRef idx="2">
+            <a:schemeClr val="accent1"/>
+          </a:effectRef>
+          <a:fontRef idx="minor">
+            <a:schemeClr val="lt1"/>
+          </a:fontRef>
+        </p:style>
+        <p:txBody>
+          <a:bodyPr rtlCol="0" anchor="ctr" wrap="square" lIns="182880" rIns="182880" tIns="91440" bIns="91440"/>
+          <a:lstStyle/>
+          <a:p>
+            <a:pPr algn="ctr">
+              <a:defRPr sz="1100" b="0">
+                <a:solidFill>
+                  <a:srgbClr val="C0392B"/>
+                </a:solidFill>
+                <a:latin typeface="Calibri"/>
+              </a:defRPr>
+            </a:pPr>
+            <a:r>
+              <a:t>Sluggish</a:t>
+            </a:r>
+          </a:p>
+        </p:txBody>
+      </p:sp>
+      <p:sp>
+        <p:nvSpPr>
+          <p:cNvPr id="29" name="Rounded Rectangle 28"/>
+          <p:cNvSpPr/>
+          <p:nvPr/>
+        </p:nvSpPr>
+        <p:spPr>
+          <a:xfrm>
+            <a:off x="457200" y="5623560"/>
+            <a:ext cx="2560320" cy="411480"/>
+          </a:xfrm>
+          <a:prstGeom prst="roundRect">
+            <a:avLst/>
+          </a:prstGeom>
+          <a:solidFill>
+            <a:srgbClr val="F0F0F5"/>
+          </a:solidFill>
+          <a:ln>
+            <a:noFill/>
+          </a:ln>
+        </p:spPr>
+        <p:style>
+          <a:lnRef idx="1">
+            <a:schemeClr val="accent1"/>
+          </a:lnRef>
+          <a:fillRef idx="3">
+            <a:schemeClr val="accent1"/>
+          </a:fillRef>
+          <a:effectRef idx="2">
+            <a:schemeClr val="accent1"/>
+          </a:effectRef>
+          <a:fontRef idx="minor">
+            <a:schemeClr val="lt1"/>
+          </a:fontRef>
+        </p:style>
+        <p:txBody>
+          <a:bodyPr rtlCol="0" anchor="ctr" wrap="square" lIns="182880" rIns="182880" tIns="91440" bIns="91440"/>
+          <a:lstStyle/>
+          <a:p>
+            <a:pPr algn="ctr">
+              <a:defRPr sz="1100" b="1">
+                <a:solidFill>
+                  <a:srgbClr val="1B2A4A"/>
+                </a:solidFill>
+                <a:latin typeface="Calibri"/>
+              </a:defRPr>
+            </a:pPr>
+            <a:r>
+              <a:t>Mac Mini M4 (24GB)</a:t>
+            </a:r>
+          </a:p>
+        </p:txBody>
+      </p:sp>
+      <p:sp>
+        <p:nvSpPr>
+          <p:cNvPr id="30" name="Rounded Rectangle 29"/>
+          <p:cNvSpPr/>
+          <p:nvPr/>
+        </p:nvSpPr>
+        <p:spPr>
+          <a:xfrm>
+            <a:off x="3017520" y="5623560"/>
+            <a:ext cx="2103120" cy="411480"/>
+          </a:xfrm>
+          <a:prstGeom prst="roundRect">
+            <a:avLst/>
+          </a:prstGeom>
+          <a:solidFill>
+            <a:srgbClr val="FFFFFF"/>
+          </a:solidFill>
+          <a:ln>
+            <a:noFill/>
+          </a:ln>
+        </p:spPr>
+        <p:style>
+          <a:lnRef idx="1">
+            <a:schemeClr val="accent1"/>
+          </a:lnRef>
+          <a:fillRef idx="3">
+            <a:schemeClr val="accent1"/>
+          </a:fillRef>
+          <a:effectRef idx="2">
+            <a:schemeClr val="accent1"/>
+          </a:effectRef>
+          <a:fontRef idx="minor">
+            <a:schemeClr val="lt1"/>
+          </a:fontRef>
+        </p:style>
+        <p:txBody>
+          <a:bodyPr rtlCol="0" anchor="ctr" wrap="square" lIns="182880" rIns="182880" tIns="91440" bIns="91440"/>
+          <a:lstStyle/>
+          <a:p>
+            <a:pPr algn="ctr">
+              <a:defRPr sz="1100" b="0">
+                <a:solidFill>
+                  <a:srgbClr val="27AE60"/>
+                </a:solidFill>
+                <a:latin typeface="Calibri"/>
+              </a:defRPr>
+            </a:pPr>
+            <a:r>
+              <a:t>Comfortable</a:t>
+            </a:r>
+          </a:p>
+        </p:txBody>
+      </p:sp>
+      <p:sp>
+        <p:nvSpPr>
+          <p:cNvPr id="31" name="Rounded Rectangle 30"/>
+          <p:cNvSpPr/>
+          <p:nvPr/>
+        </p:nvSpPr>
+        <p:spPr>
+          <a:xfrm>
+            <a:off x="5120640" y="5623560"/>
+            <a:ext cx="2103120" cy="411480"/>
+          </a:xfrm>
+          <a:prstGeom prst="roundRect">
+            <a:avLst/>
+          </a:prstGeom>
+          <a:solidFill>
+            <a:srgbClr val="FFFFFF"/>
+          </a:solidFill>
+          <a:ln>
+            <a:noFill/>
+          </a:ln>
+        </p:spPr>
+        <p:style>
+          <a:lnRef idx="1">
+            <a:schemeClr val="accent1"/>
+          </a:lnRef>
+          <a:fillRef idx="3">
+            <a:schemeClr val="accent1"/>
+          </a:fillRef>
+          <a:effectRef idx="2">
+            <a:schemeClr val="accent1"/>
+          </a:effectRef>
+          <a:fontRef idx="minor">
+            <a:schemeClr val="lt1"/>
+          </a:fontRef>
+        </p:style>
+        <p:txBody>
+          <a:bodyPr rtlCol="0" anchor="ctr" wrap="square" lIns="182880" rIns="182880" tIns="91440" bIns="91440"/>
+          <a:lstStyle/>
+          <a:p>
+            <a:pPr algn="ctr">
+              <a:defRPr sz="1100" b="0">
+                <a:solidFill>
+                  <a:srgbClr val="27AE60"/>
+                </a:solidFill>
+                <a:latin typeface="Calibri"/>
+              </a:defRPr>
+            </a:pPr>
+            <a:r>
+              <a:t>Comfortable</a:t>
+            </a:r>
+          </a:p>
+        </p:txBody>
+      </p:sp>
+      <p:sp>
+        <p:nvSpPr>
+          <p:cNvPr id="32" name="Rounded Rectangle 31"/>
+          <p:cNvSpPr/>
+          <p:nvPr/>
+        </p:nvSpPr>
+        <p:spPr>
+          <a:xfrm>
+            <a:off x="7223760" y="5623560"/>
+            <a:ext cx="2560320" cy="411480"/>
+          </a:xfrm>
+          <a:prstGeom prst="roundRect">
+            <a:avLst/>
+          </a:prstGeom>
+          <a:solidFill>
+            <a:srgbClr val="FFFFFF"/>
+          </a:solidFill>
+          <a:ln>
+            <a:noFill/>
+          </a:ln>
+        </p:spPr>
+        <p:style>
+          <a:lnRef idx="1">
+            <a:schemeClr val="accent1"/>
+          </a:lnRef>
+          <a:fillRef idx="3">
+            <a:schemeClr val="accent1"/>
+          </a:fillRef>
+          <a:effectRef idx="2">
+            <a:schemeClr val="accent1"/>
+          </a:effectRef>
+          <a:fontRef idx="minor">
+            <a:schemeClr val="lt1"/>
+          </a:fontRef>
+        </p:style>
+        <p:txBody>
+          <a:bodyPr rtlCol="0" anchor="ctr" wrap="square" lIns="182880" rIns="182880" tIns="91440" bIns="91440"/>
+          <a:lstStyle/>
+          <a:p>
+            <a:pPr algn="ctr">
+              <a:defRPr sz="1100" b="0">
+                <a:solidFill>
+                  <a:srgbClr val="3A86C8"/>
+                </a:solidFill>
+                <a:latin typeface="Calibri"/>
+              </a:defRPr>
+            </a:pPr>
+            <a:r>
+              <a:t>Fine</a:t>
+            </a:r>
+          </a:p>
+        </p:txBody>
+      </p:sp>
+      <p:sp>
+        <p:nvSpPr>
+          <p:cNvPr id="33" name="Rounded Rectangle 32"/>
+          <p:cNvSpPr/>
+          <p:nvPr/>
+        </p:nvSpPr>
+        <p:spPr>
+          <a:xfrm>
+            <a:off x="9784080" y="5623560"/>
+            <a:ext cx="2377440" cy="411480"/>
+          </a:xfrm>
+          <a:prstGeom prst="roundRect">
+            <a:avLst/>
+          </a:prstGeom>
+          <a:solidFill>
+            <a:srgbClr val="FFFFFF"/>
+          </a:solidFill>
+          <a:ln>
+            <a:noFill/>
+          </a:ln>
+        </p:spPr>
+        <p:style>
+          <a:lnRef idx="1">
+            <a:schemeClr val="accent1"/>
+          </a:lnRef>
+          <a:fillRef idx="3">
+            <a:schemeClr val="accent1"/>
+          </a:fillRef>
+          <a:effectRef idx="2">
+            <a:schemeClr val="accent1"/>
+          </a:effectRef>
+          <a:fontRef idx="minor">
+            <a:schemeClr val="lt1"/>
+          </a:fontRef>
+        </p:style>
+        <p:txBody>
+          <a:bodyPr rtlCol="0" anchor="ctr" wrap="square" lIns="182880" rIns="182880" tIns="91440" bIns="91440"/>
+          <a:lstStyle/>
+          <a:p>
+            <a:pPr algn="ctr">
+              <a:defRPr sz="1100" b="0">
+                <a:solidFill>
+                  <a:srgbClr val="E67E22"/>
+                </a:solidFill>
+                <a:latin typeface="Calibri"/>
+              </a:defRPr>
+            </a:pPr>
+            <a:r>
+              <a:t>Possible</a:t>
+            </a:r>
+          </a:p>
+        </p:txBody>
+      </p:sp>
+      <p:sp>
+        <p:nvSpPr>
+          <p:cNvPr id="34" name="Rounded Rectangle 33"/>
+          <p:cNvSpPr/>
+          <p:nvPr/>
+        </p:nvSpPr>
+        <p:spPr>
+          <a:xfrm>
+            <a:off x="1371600" y="6309360"/>
+            <a:ext cx="9418320" cy="411480"/>
+          </a:xfrm>
+          <a:prstGeom prst="roundRect">
+            <a:avLst/>
+          </a:prstGeom>
+          <a:solidFill>
+            <a:srgbClr val="E3F2FD"/>
+          </a:solidFill>
+          <a:ln w="12700">
+            <a:solidFill>
+              <a:srgbClr val="3A86C8"/>
+            </a:solidFill>
+          </a:ln>
+        </p:spPr>
+        <p:style>
+          <a:lnRef idx="1">
+            <a:schemeClr val="accent1"/>
+          </a:lnRef>
+          <a:fillRef idx="3">
+            <a:schemeClr val="accent1"/>
+          </a:fillRef>
+          <a:effectRef idx="2">
+            <a:schemeClr val="accent1"/>
+          </a:effectRef>
+          <a:fontRef idx="minor">
+            <a:schemeClr val="lt1"/>
+          </a:fontRef>
+        </p:style>
+        <p:txBody>
+          <a:bodyPr rtlCol="0" anchor="ctr" wrap="square" lIns="182880" rIns="182880" tIns="91440" bIns="91440"/>
+          <a:lstStyle/>
+          <a:p>
+            <a:pPr algn="ctr">
+              <a:defRPr sz="1300" b="1">
+                <a:solidFill>
+                  <a:srgbClr val="1B2A4A"/>
+                </a:solidFill>
+                <a:latin typeface="Calibri"/>
+              </a:defRPr>
+            </a:pPr>
+            <a:r>
+              <a:t>Real ceiling:  Anthropic API rate limit (shared across all sessions), not Mac Mini hardware</a:t>
             </a:r>
           </a:p>
         </p:txBody>
@@ -14200,6 +15528,499 @@
 </file>
 
 <file path=ppt/slides/slide16.xml><?xml version="1.0" encoding="utf-8"?>
+<p:sld xmlns:a="http://schemas.openxmlformats.org/drawingml/2006/main" xmlns:p="http://schemas.openxmlformats.org/presentationml/2006/main" xmlns:r="http://schemas.openxmlformats.org/officeDocument/2006/relationships">
+  <p:cSld>
+    <p:bg>
+      <p:bgPr>
+        <a:solidFill>
+          <a:srgbClr val="F5F7FA"/>
+        </a:solidFill>
+        <a:effectLst/>
+      </p:bgPr>
+    </p:bg>
+    <p:spTree>
+      <p:nvGrpSpPr>
+        <p:cNvPr id="1" name=""/>
+        <p:cNvGrpSpPr/>
+        <p:nvPr/>
+      </p:nvGrpSpPr>
+      <p:grpSpPr/>
+      <p:sp>
+        <p:nvSpPr>
+          <p:cNvPr id="2" name="Rectangle 1"/>
+          <p:cNvSpPr/>
+          <p:nvPr/>
+        </p:nvSpPr>
+        <p:spPr>
+          <a:xfrm>
+            <a:off x="0" y="0"/>
+            <a:ext cx="12191695" cy="1005840"/>
+          </a:xfrm>
+          <a:prstGeom prst="rect">
+            <a:avLst/>
+          </a:prstGeom>
+          <a:solidFill>
+            <a:srgbClr val="1B2A4A"/>
+          </a:solidFill>
+          <a:ln>
+            <a:noFill/>
+          </a:ln>
+        </p:spPr>
+        <p:style>
+          <a:lnRef idx="1">
+            <a:schemeClr val="accent1"/>
+          </a:lnRef>
+          <a:fillRef idx="3">
+            <a:schemeClr val="accent1"/>
+          </a:fillRef>
+          <a:effectRef idx="2">
+            <a:schemeClr val="accent1"/>
+          </a:effectRef>
+          <a:fontRef idx="minor">
+            <a:schemeClr val="lt1"/>
+          </a:fontRef>
+        </p:style>
+        <p:txBody>
+          <a:bodyPr rtlCol="0" anchor="ctr"/>
+          <a:lstStyle/>
+          <a:p>
+            <a:pPr algn="ctr"/>
+          </a:p>
+        </p:txBody>
+      </p:sp>
+      <p:sp>
+        <p:nvSpPr>
+          <p:cNvPr id="3" name="TextBox 2"/>
+          <p:cNvSpPr txBox="1"/>
+          <p:nvPr/>
+        </p:nvSpPr>
+        <p:spPr>
+          <a:xfrm>
+            <a:off x="548640" y="137160"/>
+            <a:ext cx="10972800" cy="502920"/>
+          </a:xfrm>
+          <a:prstGeom prst="rect">
+            <a:avLst/>
+          </a:prstGeom>
+          <a:noFill/>
+        </p:spPr>
+        <p:txBody>
+          <a:bodyPr wrap="square">
+            <a:spAutoFit/>
+          </a:bodyPr>
+          <a:lstStyle/>
+          <a:p>
+            <a:pPr algn="l">
+              <a:defRPr sz="2800" b="1">
+                <a:solidFill>
+                  <a:srgbClr val="FFFFFF"/>
+                </a:solidFill>
+                <a:latin typeface="Calibri"/>
+              </a:defRPr>
+            </a:pPr>
+            <a:r>
+              <a:t>Recommendation: Hybrid Approach</a:t>
+            </a:r>
+          </a:p>
+        </p:txBody>
+      </p:sp>
+      <p:sp>
+        <p:nvSpPr>
+          <p:cNvPr id="4" name="TextBox 3"/>
+          <p:cNvSpPr txBox="1"/>
+          <p:nvPr/>
+        </p:nvSpPr>
+        <p:spPr>
+          <a:xfrm>
+            <a:off x="548640" y="594360"/>
+            <a:ext cx="10972800" cy="320040"/>
+          </a:xfrm>
+          <a:prstGeom prst="rect">
+            <a:avLst/>
+          </a:prstGeom>
+          <a:noFill/>
+        </p:spPr>
+        <p:txBody>
+          <a:bodyPr wrap="square">
+            <a:spAutoFit/>
+          </a:bodyPr>
+          <a:lstStyle/>
+          <a:p>
+            <a:pPr algn="l">
+              <a:defRPr sz="1400" b="0">
+                <a:solidFill>
+                  <a:srgbClr val="B0C4DE"/>
+                </a:solidFill>
+                <a:latin typeface="Calibri"/>
+              </a:defRPr>
+            </a:pPr>
+            <a:r>
+              <a:t>Best of both worlds — estimated 70-75% success rate</a:t>
+            </a:r>
+          </a:p>
+        </p:txBody>
+      </p:sp>
+      <p:sp>
+        <p:nvSpPr>
+          <p:cNvPr id="5" name="Rounded Rectangle 4"/>
+          <p:cNvSpPr/>
+          <p:nvPr/>
+        </p:nvSpPr>
+        <p:spPr>
+          <a:xfrm>
+            <a:off x="457200" y="1280160"/>
+            <a:ext cx="11247120" cy="457200"/>
+          </a:xfrm>
+          <a:prstGeom prst="roundRect">
+            <a:avLst/>
+          </a:prstGeom>
+          <a:solidFill>
+            <a:srgbClr val="27AE60"/>
+          </a:solidFill>
+          <a:ln>
+            <a:noFill/>
+          </a:ln>
+        </p:spPr>
+        <p:style>
+          <a:lnRef idx="1">
+            <a:schemeClr val="accent1"/>
+          </a:lnRef>
+          <a:fillRef idx="3">
+            <a:schemeClr val="accent1"/>
+          </a:fillRef>
+          <a:effectRef idx="2">
+            <a:schemeClr val="accent1"/>
+          </a:effectRef>
+          <a:fontRef idx="minor">
+            <a:schemeClr val="lt1"/>
+          </a:fontRef>
+        </p:style>
+        <p:txBody>
+          <a:bodyPr rtlCol="0" anchor="ctr" wrap="square" lIns="182880" rIns="182880" tIns="91440" bIns="91440"/>
+          <a:lstStyle/>
+          <a:p>
+            <a:pPr algn="ctr">
+              <a:defRPr sz="1600" b="1">
+                <a:solidFill>
+                  <a:srgbClr val="FFFFFF"/>
+                </a:solidFill>
+                <a:latin typeface="Calibri"/>
+              </a:defRPr>
+            </a:pPr>
+            <a:r>
+              <a:t>TIER 1:  Telegram Bot for All Staff  (daily work)</a:t>
+            </a:r>
+          </a:p>
+        </p:txBody>
+      </p:sp>
+      <p:sp>
+        <p:nvSpPr>
+          <p:cNvPr id="6" name="TextBox 5"/>
+          <p:cNvSpPr txBox="1"/>
+          <p:nvPr/>
+        </p:nvSpPr>
+        <p:spPr>
+          <a:xfrm>
+            <a:off x="731520" y="1828800"/>
+            <a:ext cx="10515600" cy="1188720"/>
+          </a:xfrm>
+          <a:prstGeom prst="rect">
+            <a:avLst/>
+          </a:prstGeom>
+          <a:noFill/>
+        </p:spPr>
+        <p:txBody>
+          <a:bodyPr wrap="square">
+            <a:spAutoFit/>
+          </a:bodyPr>
+          <a:lstStyle/>
+          <a:p>
+            <a:pPr>
+              <a:spcAft>
+                <a:spcPts val="600"/>
+              </a:spcAft>
+              <a:defRPr sz="1300">
+                <a:solidFill>
+                  <a:srgbClr val="1A1A2E"/>
+                </a:solidFill>
+                <a:latin typeface="Calibri"/>
+              </a:defRPr>
+            </a:pPr>
+            <a:r>
+              <a:t>•  Every staff member uses Telegram to interact with AI</a:t>
+            </a:r>
+          </a:p>
+          <a:p>
+            <a:pPr>
+              <a:spcAft>
+                <a:spcPts val="600"/>
+              </a:spcAft>
+              <a:defRPr sz="1300">
+                <a:solidFill>
+                  <a:srgbClr val="1A1A2E"/>
+                </a:solidFill>
+                <a:latin typeface="Calibri"/>
+              </a:defRPr>
+            </a:pPr>
+            <a:r>
+              <a:t>•  Send requests, receive deliverables, review and approve</a:t>
+            </a:r>
+          </a:p>
+          <a:p>
+            <a:pPr>
+              <a:spcAft>
+                <a:spcPts val="600"/>
+              </a:spcAft>
+              <a:defRPr sz="1300">
+                <a:solidFill>
+                  <a:srgbClr val="1A1A2E"/>
+                </a:solidFill>
+                <a:latin typeface="Calibri"/>
+              </a:defRPr>
+            </a:pPr>
+            <a:r>
+              <a:t>•  Zero training needed — they already know how to chat</a:t>
+            </a:r>
+          </a:p>
+          <a:p>
+            <a:pPr>
+              <a:spcAft>
+                <a:spcPts val="600"/>
+              </a:spcAft>
+              <a:defRPr sz="1300">
+                <a:solidFill>
+                  <a:srgbClr val="1A1A2E"/>
+                </a:solidFill>
+                <a:latin typeface="Calibri"/>
+              </a:defRPr>
+            </a:pPr>
+            <a:r>
+              <a:t>•  Expected adoption: 80-90%</a:t>
+            </a:r>
+          </a:p>
+        </p:txBody>
+      </p:sp>
+      <p:sp>
+        <p:nvSpPr>
+          <p:cNvPr id="7" name="Rounded Rectangle 6"/>
+          <p:cNvSpPr/>
+          <p:nvPr/>
+        </p:nvSpPr>
+        <p:spPr>
+          <a:xfrm>
+            <a:off x="457200" y="3200400"/>
+            <a:ext cx="11247120" cy="457200"/>
+          </a:xfrm>
+          <a:prstGeom prst="roundRect">
+            <a:avLst/>
+          </a:prstGeom>
+          <a:solidFill>
+            <a:srgbClr val="2C5F8A"/>
+          </a:solidFill>
+          <a:ln>
+            <a:noFill/>
+          </a:ln>
+        </p:spPr>
+        <p:style>
+          <a:lnRef idx="1">
+            <a:schemeClr val="accent1"/>
+          </a:lnRef>
+          <a:fillRef idx="3">
+            <a:schemeClr val="accent1"/>
+          </a:fillRef>
+          <a:effectRef idx="2">
+            <a:schemeClr val="accent1"/>
+          </a:effectRef>
+          <a:fontRef idx="minor">
+            <a:schemeClr val="lt1"/>
+          </a:fontRef>
+        </p:style>
+        <p:txBody>
+          <a:bodyPr rtlCol="0" anchor="ctr" wrap="square" lIns="182880" rIns="182880" tIns="91440" bIns="91440"/>
+          <a:lstStyle/>
+          <a:p>
+            <a:pPr algn="ctr">
+              <a:defRPr sz="1600" b="1">
+                <a:solidFill>
+                  <a:srgbClr val="FFFFFF"/>
+                </a:solidFill>
+                <a:latin typeface="Calibri"/>
+              </a:defRPr>
+            </a:pPr>
+            <a:r>
+              <a:t>TIER 2:  Claude Code CLI for 1–2 Power Users  (maintenance &amp; edge cases)</a:t>
+            </a:r>
+          </a:p>
+        </p:txBody>
+      </p:sp>
+      <p:sp>
+        <p:nvSpPr>
+          <p:cNvPr id="8" name="TextBox 7"/>
+          <p:cNvSpPr txBox="1"/>
+          <p:nvPr/>
+        </p:nvSpPr>
+        <p:spPr>
+          <a:xfrm>
+            <a:off x="731520" y="3749039"/>
+            <a:ext cx="10515600" cy="1188720"/>
+          </a:xfrm>
+          <a:prstGeom prst="rect">
+            <a:avLst/>
+          </a:prstGeom>
+          <a:noFill/>
+        </p:spPr>
+        <p:txBody>
+          <a:bodyPr wrap="square">
+            <a:spAutoFit/>
+          </a:bodyPr>
+          <a:lstStyle/>
+          <a:p>
+            <a:pPr>
+              <a:spcAft>
+                <a:spcPts val="600"/>
+              </a:spcAft>
+              <a:defRPr sz="1300">
+                <a:solidFill>
+                  <a:srgbClr val="1A1A2E"/>
+                </a:solidFill>
+                <a:latin typeface="Calibri"/>
+              </a:defRPr>
+            </a:pPr>
+            <a:r>
+              <a:t>•  Firm's IT person or tech-savvy senior learns Claude CLI</a:t>
+            </a:r>
+          </a:p>
+          <a:p>
+            <a:pPr>
+              <a:spcAft>
+                <a:spcPts val="600"/>
+              </a:spcAft>
+              <a:defRPr sz="1300">
+                <a:solidFill>
+                  <a:srgbClr val="1A1A2E"/>
+                </a:solidFill>
+                <a:latin typeface="Calibri"/>
+              </a:defRPr>
+            </a:pPr>
+            <a:r>
+              <a:t>•  Maintains skills, updates templates, debugs issues</a:t>
+            </a:r>
+          </a:p>
+          <a:p>
+            <a:pPr>
+              <a:spcAft>
+                <a:spcPts val="600"/>
+              </a:spcAft>
+              <a:defRPr sz="1300">
+                <a:solidFill>
+                  <a:srgbClr val="1A1A2E"/>
+                </a:solidFill>
+                <a:latin typeface="Calibri"/>
+              </a:defRPr>
+            </a:pPr>
+            <a:r>
+              <a:t>•  Handles complex requests too nuanced for standard skills</a:t>
+            </a:r>
+          </a:p>
+          <a:p>
+            <a:pPr>
+              <a:spcAft>
+                <a:spcPts val="600"/>
+              </a:spcAft>
+              <a:defRPr sz="1300">
+                <a:solidFill>
+                  <a:srgbClr val="1A1A2E"/>
+                </a:solidFill>
+                <a:latin typeface="Calibri"/>
+              </a:defRPr>
+            </a:pPr>
+            <a:r>
+              <a:t>•  You train these 1–2 people, not the whole firm</a:t>
+            </a:r>
+          </a:p>
+        </p:txBody>
+      </p:sp>
+      <p:sp>
+        <p:nvSpPr>
+          <p:cNvPr id="9" name="Rounded Rectangle 8"/>
+          <p:cNvSpPr/>
+          <p:nvPr/>
+        </p:nvSpPr>
+        <p:spPr>
+          <a:xfrm>
+            <a:off x="1371600" y="5120640"/>
+            <a:ext cx="9418320" cy="1463040"/>
+          </a:xfrm>
+          <a:prstGeom prst="roundRect">
+            <a:avLst/>
+          </a:prstGeom>
+          <a:solidFill>
+            <a:srgbClr val="E3F2FD"/>
+          </a:solidFill>
+          <a:ln w="25400">
+            <a:solidFill>
+              <a:srgbClr val="3A86C8"/>
+            </a:solidFill>
+          </a:ln>
+        </p:spPr>
+        <p:style>
+          <a:lnRef idx="1">
+            <a:schemeClr val="accent1"/>
+          </a:lnRef>
+          <a:fillRef idx="3">
+            <a:schemeClr val="accent1"/>
+          </a:fillRef>
+          <a:effectRef idx="2">
+            <a:schemeClr val="accent1"/>
+          </a:effectRef>
+          <a:fontRef idx="minor">
+            <a:schemeClr val="lt1"/>
+          </a:fontRef>
+        </p:style>
+        <p:txBody>
+          <a:bodyPr rtlCol="0" anchor="ctr" wrap="square" lIns="182880" rIns="182880" tIns="91440" bIns="91440"/>
+          <a:lstStyle/>
+          <a:p>
+            <a:pPr algn="l">
+              <a:defRPr sz="1400" b="0">
+                <a:solidFill>
+                  <a:srgbClr val="1B2A4A"/>
+                </a:solidFill>
+                <a:latin typeface="Calibri"/>
+              </a:defRPr>
+            </a:pPr>
+            <a:r>
+              <a:t>Result</a:t>
+            </a:r>
+            <a:br/>
+            <a:br/>
+            <a:r>
+              <a:t>•  90%+ adoption  (Telegram for everyone)</a:t>
+            </a:r>
+            <a:br/>
+            <a:r>
+              <a:t>•  Self-sustaining  (power users maintain without you)</a:t>
+            </a:r>
+            <a:br/>
+            <a:r>
+              <a:t>•  High skill ceiling  (CLI available for complex tasks)</a:t>
+            </a:r>
+            <a:br/>
+            <a:r>
+              <a:t>•  Resilient  (if bot breaks, power user fixes it in 10 min)</a:t>
+            </a:r>
+          </a:p>
+        </p:txBody>
+      </p:sp>
+    </p:spTree>
+  </p:cSld>
+  <p:clrMapOvr>
+    <a:masterClrMapping/>
+  </p:clrMapOvr>
+</p:sld>
+</file>
+
+<file path=ppt/slides/slide17.xml><?xml version="1.0" encoding="utf-8"?>
 <p:sld xmlns:a="http://schemas.openxmlformats.org/drawingml/2006/main" xmlns:p="http://schemas.openxmlformats.org/presentationml/2006/main" xmlns:r="http://schemas.openxmlformats.org/officeDocument/2006/relationships">
   <p:cSld>
     <p:bg>
